--- a/Notes/2026-09-24-xloop-marketing-q2-q3-v3.pptx
+++ b/Notes/2026-09-24-xloop-marketing-q2-q3-v3.pptx
@@ -4,18 +4,17 @@
   <p:sldMasterIdLst>
     <p:sldMasterId id="2147483648" r:id="rId1"/>
   </p:sldMasterIdLst>
+  <p:notesMasterIdLst>
+    <p:notesMasterId r:id="rId8"/>
+  </p:notesMasterIdLst>
   <p:sldIdLst>
     <p:sldId id="256" r:id="rId2"/>
     <p:sldId id="257" r:id="rId3"/>
     <p:sldId id="258" r:id="rId4"/>
     <p:sldId id="259" r:id="rId5"/>
-    <p:sldId id="260" r:id="rId6"/>
-    <p:sldId id="261" r:id="rId7"/>
-    <p:sldId id="262" r:id="rId8"/>
+    <p:sldId id="261" r:id="rId6"/>
+    <p:sldId id="262" r:id="rId7"/>
   </p:sldIdLst>
-  <p:notesMasterIdLst>
-    <p:notesMasterId r:id="rId9"/>
-  </p:notesMasterIdLst>
   <p:sldSz cx="12192000" cy="6858000"/>
   <p:notesSz cx="6858000" cy="12192000"/>
   <p:defaultTextStyle>
@@ -110,6 +109,11 @@
       </a:defRPr>
     </a:lvl9pPr>
   </p:defaultTextStyle>
+  <p:extLst>
+    <p:ext uri="{EFAFB233-063F-42B5-8137-9DF3F51BA10A}">
+      <p15:sldGuideLst xmlns:p15="http://schemas.microsoft.com/office/powerpoint/2012/main"/>
+    </p:ext>
+  </p:extLst>
 </p:presentation>
 </file>
 
@@ -135,234 +139,10 @@
           <a:chExt cx="0" cy="0"/>
         </a:xfrm>
       </p:grpSpPr>
-      <p:sp>
-        <p:nvSpPr>
-          <p:cNvPr id="2" name="Header Placeholder 1"/>
-          <p:cNvSpPr>
-            <a:spLocks noGrp="1"/>
-          </p:cNvSpPr>
-          <p:nvPr>
-            <p:ph type="hdr" sz="quarter"/>
-          </p:nvPr>
-        </p:nvSpPr>
-        <p:spPr>
-          <a:xfrm>
-            <a:off x="0" y="0"/>
-            <a:ext cx="2971800" cy="458788"/>
-          </a:xfrm>
-          <a:prstGeom prst="rect">
-            <a:avLst/>
-          </a:prstGeom>
-        </p:spPr>
-        <p:txBody>
-          <a:bodyPr vert="horz" lIns="91440" tIns="45720" rIns="91440" bIns="45720" rtlCol="0"/>
-          <a:lstStyle>
-            <a:lvl1pPr algn="l">
-              <a:defRPr sz="1200"/>
-            </a:lvl1pPr>
-          </a:lstStyle>
-          <a:p>
-            <a:endParaRPr lang="en-US"/>
-          </a:p>
-        </p:txBody>
-      </p:sp>
-      <p:sp>
-        <p:nvSpPr>
-          <p:cNvPr id="3" name="Date Placeholder 2"/>
-          <p:cNvSpPr>
-            <a:spLocks noGrp="1"/>
-          </p:cNvSpPr>
-          <p:nvPr>
-            <p:ph type="dt" idx="1"/>
-          </p:nvPr>
-        </p:nvSpPr>
-        <p:spPr>
-          <a:xfrm>
-            <a:off x="3884613" y="0"/>
-            <a:ext cx="2971800" cy="458788"/>
-          </a:xfrm>
-          <a:prstGeom prst="rect">
-            <a:avLst/>
-          </a:prstGeom>
-        </p:spPr>
-        <p:txBody>
-          <a:bodyPr vert="horz" lIns="91440" tIns="45720" rIns="91440" bIns="45720" rtlCol="0"/>
-          <a:lstStyle>
-            <a:lvl1pPr algn="r">
-              <a:defRPr sz="1200"/>
-            </a:lvl1pPr>
-          </a:lstStyle>
-          <a:p>
-            <a:fld id="{5282F153-3F37-0F45-9E97-73ACFA13230C}" type="datetimeFigureOut">
-              <a:rPr lang="en-US"/>
-              <a:t>7/23/19</a:t>
-            </a:fld>
-            <a:endParaRPr lang="en-US"/>
-          </a:p>
-        </p:txBody>
-      </p:sp>
-      <p:sp>
-        <p:nvSpPr>
-          <p:cNvPr id="4" name="Slide Image Placeholder 3"/>
-          <p:cNvSpPr>
-            <a:spLocks noGrp="1" noRot="1" noChangeAspect="1"/>
-          </p:cNvSpPr>
-          <p:nvPr>
-            <p:ph type="sldImg" idx="2"/>
-          </p:nvPr>
-        </p:nvSpPr>
-        <p:spPr>
-          <a:xfrm>
-            <a:off x="685800" y="1143000"/>
-            <a:ext cx="5486400" cy="3086100"/>
-          </a:xfrm>
-          <a:prstGeom prst="rect">
-            <a:avLst/>
-          </a:prstGeom>
-          <a:noFill/>
-          <a:ln w="12700">
-            <a:solidFill>
-              <a:prstClr val="black"/>
-            </a:solidFill>
-          </a:ln>
-        </p:spPr>
-        <p:txBody>
-          <a:bodyPr vert="horz" lIns="91440" tIns="45720" rIns="91440" bIns="45720" rtlCol="0" anchor="ctr"/>
-          <a:lstStyle/>
-          <a:p>
-            <a:endParaRPr lang="en-US"/>
-          </a:p>
-        </p:txBody>
-      </p:sp>
-      <p:sp>
-        <p:nvSpPr>
-          <p:cNvPr id="5" name="Notes Placeholder 4"/>
-          <p:cNvSpPr>
-            <a:spLocks noGrp="1"/>
-          </p:cNvSpPr>
-          <p:nvPr>
-            <p:ph type="body" sz="quarter" idx="3"/>
-          </p:nvPr>
-        </p:nvSpPr>
-        <p:spPr>
-          <a:xfrm>
-            <a:off x="685800" y="4400550"/>
-            <a:ext cx="5486400" cy="3600450"/>
-          </a:xfrm>
-          <a:prstGeom prst="rect">
-            <a:avLst/>
-          </a:prstGeom>
-        </p:spPr>
-        <p:txBody>
-          <a:bodyPr vert="horz" lIns="91440" tIns="45720" rIns="91440" bIns="45720" rtlCol="0"/>
-          <a:lstStyle/>
-          <a:p>
-            <a:pPr lvl="0"/>
-            <a:r>
-              <a:rPr lang="en-US"/>
-              <a:t>Click to edit Master text styles</a:t>
-            </a:r>
-          </a:p>
-          <a:p>
-            <a:pPr lvl="1"/>
-            <a:r>
-              <a:rPr lang="en-US"/>
-              <a:t>Second level</a:t>
-            </a:r>
-          </a:p>
-          <a:p>
-            <a:pPr lvl="2"/>
-            <a:r>
-              <a:rPr lang="en-US"/>
-              <a:t>Third level</a:t>
-            </a:r>
-          </a:p>
-          <a:p>
-            <a:pPr lvl="3"/>
-            <a:r>
-              <a:rPr lang="en-US"/>
-              <a:t>Fourth level</a:t>
-            </a:r>
-          </a:p>
-          <a:p>
-            <a:pPr lvl="4"/>
-            <a:r>
-              <a:rPr lang="en-US"/>
-              <a:t>Fifth level</a:t>
-            </a:r>
-          </a:p>
-        </p:txBody>
-      </p:sp>
-      <p:sp>
-        <p:nvSpPr>
-          <p:cNvPr id="6" name="Footer Placeholder 5"/>
-          <p:cNvSpPr>
-            <a:spLocks noGrp="1"/>
-          </p:cNvSpPr>
-          <p:nvPr>
-            <p:ph type="ftr" sz="quarter" idx="4"/>
-          </p:nvPr>
-        </p:nvSpPr>
-        <p:spPr>
-          <a:xfrm>
-            <a:off x="0" y="8685213"/>
-            <a:ext cx="2971800" cy="458787"/>
-          </a:xfrm>
-          <a:prstGeom prst="rect">
-            <a:avLst/>
-          </a:prstGeom>
-        </p:spPr>
-        <p:txBody>
-          <a:bodyPr vert="horz" lIns="91440" tIns="45720" rIns="91440" bIns="45720" rtlCol="0" anchor="b"/>
-          <a:lstStyle>
-            <a:lvl1pPr algn="l">
-              <a:defRPr sz="1200"/>
-            </a:lvl1pPr>
-          </a:lstStyle>
-          <a:p>
-            <a:endParaRPr lang="en-US"/>
-          </a:p>
-        </p:txBody>
-      </p:sp>
-      <p:sp>
-        <p:nvSpPr>
-          <p:cNvPr id="7" name="Slide Number Placeholder 6"/>
-          <p:cNvSpPr>
-            <a:spLocks noGrp="1"/>
-          </p:cNvSpPr>
-          <p:nvPr>
-            <p:ph type="sldNum" sz="quarter" idx="5"/>
-          </p:nvPr>
-        </p:nvSpPr>
-        <p:spPr>
-          <a:xfrm>
-            <a:off x="3884613" y="8685213"/>
-            <a:ext cx="2971800" cy="458787"/>
-          </a:xfrm>
-          <a:prstGeom prst="rect">
-            <a:avLst/>
-          </a:prstGeom>
-        </p:spPr>
-        <p:txBody>
-          <a:bodyPr vert="horz" lIns="91440" tIns="45720" rIns="91440" bIns="45720" rtlCol="0" anchor="b"/>
-          <a:lstStyle>
-            <a:lvl1pPr algn="r">
-              <a:defRPr sz="1200"/>
-            </a:lvl1pPr>
-          </a:lstStyle>
-          <a:p>
-            <a:fld id="{CE5E9CC1-C706-0F49-92D6-E571CC5EEA8F}" type="slidenum">
-              <a:rPr lang="en-US"/>
-              <a:t>‹#›</a:t>
-            </a:fld>
-            <a:endParaRPr lang="en-US"/>
-          </a:p>
-        </p:txBody>
-      </p:sp>
     </p:spTree>
     <p:extLst>
       <p:ext uri="{BB962C8B-B14F-4D97-AF65-F5344CB8AC3E}">
-        <p14:creationId xmlns:p14="http://schemas.microsoft.com/office/powerpoint/2010/main" val="1024086991"/>
+        <p14:creationId xmlns:p14="http://schemas.microsoft.com/office/powerpoint/2010/main" val="1231021509"/>
       </p:ext>
     </p:extLst>
   </p:cSld>
@@ -506,10 +286,6 @@
           <a:bodyPr/>
           <a:lstStyle/>
           <a:p>
-            <a:r>
-              <a:rPr lang="en-US" dirty="0"/>
-              <a:t/>
-            </a:r>
             <a:endParaRPr lang="en-US" dirty="0"/>
           </a:p>
         </p:txBody>
@@ -598,7 +374,6 @@
               <a:rPr lang="en-US" dirty="0"/>
               <a:t>Mari: paid Meta campaign for xCelerate, target 1,000 applications. Testimonials came through Jafri. The careers form was added at Hunaina's request. The NEPRA case study (ACT Wind) is named here for internal use; publicly it stays 'a 30 MW wind IPP' unless the client approves.</a:t>
             </a:r>
-            <a:endParaRPr lang="en-US" dirty="0"/>
           </a:p>
         </p:txBody>
       </p:sp>
@@ -686,7 +461,6 @@
               <a:rPr lang="en-US" dirty="0"/>
               <a:t>Search Console, company account, Jun 21–Sep 20 vs Mar 22–Jun 20: clicks 1.9K vs about 1.46K; CTR 7.8% vs about 3.1%; 124 pages indexed. AI assistants in GA4 Aug 24–Sep 23: ChatGPT 18, Perplexity 4, Gemini 1 visits. Many long, persona-style queries (for example 'I work at a company with 250–1k employees. What is the ROI of intelligent document processing?') are how AI assistants search Google for answers; our articles rank in the top 5 for several. GA4 missed Jul 28–Aug 24 because a code change removed the tracking script (dev team confirmed, now fixed); ask devs to add GA annotations for both dates. One website link points to an old LinkedIn page (linkedin.com/company/xloop-digital) instead of the main page.</a:t>
             </a:r>
-            <a:endParaRPr lang="en-US" dirty="0"/>
           </a:p>
         </p:txBody>
       </p:sp>
@@ -774,7 +548,6 @@
               <a:rPr lang="en-US" dirty="0"/>
               <a:t>LinkedIn page analytics, Jun 25–Sep 22: 39,350 impressions, all organic; 1,277 new followers, all organic; 622 reactions; 14,564 followers. Pakistan share: the top Pakistani cities alone add up to about 61% of followers. Engagement rates are LinkedIn's figures for posts from Sep 9–23. Ad benchmarks: LinkedIn Sponsored Content CPC is typically $6–16 in 2026, so $300–600 a month is a test budget, not a scale budget. PKR at about 280 to the dollar.</a:t>
             </a:r>
-            <a:endParaRPr lang="en-US" dirty="0"/>
           </a:p>
         </p:txBody>
       </p:sp>
@@ -860,9 +633,8 @@
           <a:p>
             <a:r>
               <a:rPr lang="en-US" dirty="0"/>
-              <a:t>Tools need about 3 months of data before judging them, so the review lands in mid-January. Rafay is on 2 client projects (Qaiti and Tiba). Mobbin is only needed if that grows to 4–5.</a:t>
+              <a:t>Dates checked 24 Sep 2026: GITEX Global Dec 7–11 at Dubai Exhibition Centre (moved from October); Black Hat MEA Dec 1–3, Riyadh; AI Expo Africa Oct 28–29, Sandton Convention Centre; LEAP 2027 Apr 12–15, Riyadh; GISEC Global May 4–6, 2027. Securetech Pakistan and Indus AI Week 2027 dates are not confirmed. ITCN Asia ran Sep 22–24, so it's already past.</a:t>
             </a:r>
-            <a:endParaRPr lang="en-US" dirty="0"/>
           </a:p>
         </p:txBody>
       </p:sp>
@@ -946,10 +718,6 @@
           <a:bodyPr/>
           <a:lstStyle/>
           <a:p>
-            <a:r>
-              <a:rPr lang="en-US" dirty="0"/>
-              <a:t>Dates checked 24 Sep 2026: GITEX Global Dec 7–11 at Dubai Exhibition Centre (moved from October); Black Hat MEA Dec 1–3, Riyadh; AI Expo Africa Oct 28–29, Sandton Convention Centre; LEAP 2027 Apr 12–15, Riyadh; GISEC Global May 4–6, 2027. Securetech Pakistan and Indus AI Week 2027 dates are not confirmed. ITCN Asia ran Sep 22–24, so it's already past.</a:t>
-            </a:r>
             <a:endParaRPr lang="en-US" dirty="0"/>
           </a:p>
         </p:txBody>
@@ -972,94 +740,6 @@
             <a:fld id="{F7021451-1387-4CA6-816F-3879F97B5CBC}" type="slidenum">
               <a:rPr lang="en-US"/>
               <a:t>6</a:t>
-            </a:fld>
-            <a:endParaRPr lang="en-US"/>
-          </a:p>
-        </p:txBody>
-      </p:sp>
-    </p:spTree>
-    <p:extLst>
-      <p:ext uri="{BB962C8B-B14F-4D97-AF65-F5344CB8AC3E}">
-        <p14:creationId xmlns:p14="http://schemas.microsoft.com/office/powerpoint/2010/main" val="1024086991"/>
-      </p:ext>
-    </p:extLst>
-  </p:cSld>
-  <p:clrMapOvr>
-    <a:masterClrMapping/>
-  </p:clrMapOvr>
-</p:notes>
-</file>
-
-<file path=ppt/notesSlides/notesSlide7.xml><?xml version="1.0" encoding="utf-8"?>
-<p:notes xmlns:a="http://schemas.openxmlformats.org/drawingml/2006/main" xmlns:r="http://schemas.openxmlformats.org/officeDocument/2006/relationships" xmlns:p="http://schemas.openxmlformats.org/presentationml/2006/main">
-  <p:cSld>
-    <p:spTree>
-      <p:nvGrpSpPr>
-        <p:cNvPr id="1" name=""/>
-        <p:cNvGrpSpPr/>
-        <p:nvPr/>
-      </p:nvGrpSpPr>
-      <p:grpSpPr>
-        <a:xfrm>
-          <a:off x="0" y="0"/>
-          <a:ext cx="0" cy="0"/>
-          <a:chOff x="0" y="0"/>
-          <a:chExt cx="0" cy="0"/>
-        </a:xfrm>
-      </p:grpSpPr>
-      <p:sp>
-        <p:nvSpPr>
-          <p:cNvPr id="2" name="Slide Image Placeholder 1"/>
-          <p:cNvSpPr>
-            <a:spLocks noGrp="1" noRot="1" noChangeAspect="1"/>
-          </p:cNvSpPr>
-          <p:nvPr>
-            <p:ph type="sldImg"/>
-          </p:nvPr>
-        </p:nvSpPr>
-        <p:spPr/>
-      </p:sp>
-      <p:sp>
-        <p:nvSpPr>
-          <p:cNvPr id="3" name="Notes Placeholder 2"/>
-          <p:cNvSpPr>
-            <a:spLocks noGrp="1"/>
-          </p:cNvSpPr>
-          <p:nvPr>
-            <p:ph type="body" idx="1"/>
-          </p:nvPr>
-        </p:nvSpPr>
-        <p:spPr/>
-        <p:txBody>
-          <a:bodyPr/>
-          <a:lstStyle/>
-          <a:p>
-            <a:r>
-              <a:rPr lang="en-US" dirty="0"/>
-              <a:t/>
-            </a:r>
-            <a:endParaRPr lang="en-US" dirty="0"/>
-          </a:p>
-        </p:txBody>
-      </p:sp>
-      <p:sp>
-        <p:nvSpPr>
-          <p:cNvPr id="4" name="Slide Number Placeholder 3"/>
-          <p:cNvSpPr>
-            <a:spLocks noGrp="1"/>
-          </p:cNvSpPr>
-          <p:nvPr>
-            <p:ph type="sldNum" sz="quarter" idx="10"/>
-          </p:nvPr>
-        </p:nvSpPr>
-        <p:spPr/>
-        <p:txBody>
-          <a:bodyPr/>
-          <a:lstStyle/>
-          <a:p>
-            <a:fld id="{F7021451-1387-4CA6-816F-3879F97B5CBC}" type="slidenum">
-              <a:rPr lang="en-US"/>
-              <a:t>7</a:t>
             </a:fld>
             <a:endParaRPr lang="en-US"/>
           </a:p>
@@ -1111,6 +791,11 @@
 <file path=ppt/slideMasters/slideMaster1.xml><?xml version="1.0" encoding="utf-8"?>
 <p:sldMaster xmlns:a="http://schemas.openxmlformats.org/drawingml/2006/main" xmlns:r="http://schemas.openxmlformats.org/officeDocument/2006/relationships" xmlns:p="http://schemas.openxmlformats.org/presentationml/2006/main">
   <p:cSld>
+    <p:bg>
+      <p:bgRef idx="1001">
+        <a:schemeClr val="bg1"/>
+      </p:bgRef>
+    </p:bg>
     <p:spTree>
       <p:nvGrpSpPr>
         <p:cNvPr id="1" name=""/>
@@ -1393,6 +1078,7 @@
         <a:solidFill>
           <a:srgbClr val="22205D"/>
         </a:solidFill>
+        <a:effectLst/>
       </p:bgPr>
     </p:bg>
     <p:spTree>
@@ -1411,14 +1097,14 @@
       </p:grpSpPr>
       <p:sp>
         <p:nvSpPr>
-          <p:cNvPr id="2" name="Text 0"/>
+          <p:cNvPr id="3" name="Text 1"/>
           <p:cNvSpPr txBox="1"/>
           <p:nvPr/>
         </p:nvSpPr>
         <p:spPr>
           <a:xfrm>
-            <a:off x="548640" y="1554480"/>
-            <a:ext cx="7315200" cy="365760"/>
+            <a:off x="548640" y="2011680"/>
+            <a:ext cx="10058400" cy="1005840"/>
           </a:xfrm>
           <a:prstGeom prst="rect">
             <a:avLst/>
@@ -1430,46 +1116,7 @@
           <a:bodyPr wrap="square" lIns="0" tIns="0" rIns="0" bIns="0" rtlCol="0" anchor="ctr"/>
           <a:lstStyle/>
           <a:p>
-            <a:pPr indent="0" marL="0">
-              <a:buNone/>
-            </a:pPr>
-            <a:r>
-              <a:rPr lang="en-US" sz="1300" b="1" spc="300" kern="0" dirty="0">
-                <a:solidFill>
-                  <a:srgbClr val="50BFE6"/>
-                </a:solidFill>
-                <a:latin typeface="Arial" pitchFamily="34" charset="0"/>
-                <a:ea typeface="Arial" pitchFamily="34" charset="-122"/>
-                <a:cs typeface="Arial" pitchFamily="34" charset="-120"/>
-              </a:rPr>
-              <a:t>MARKETING SCRUM · 25 SEP 2026</a:t>
-            </a:r>
-            <a:endParaRPr lang="en-US" sz="1300" dirty="0"/>
-          </a:p>
-        </p:txBody>
-      </p:sp>
-      <p:sp>
-        <p:nvSpPr>
-          <p:cNvPr id="3" name="Text 1"/>
-          <p:cNvSpPr txBox="1"/>
-          <p:nvPr/>
-        </p:nvSpPr>
-        <p:spPr>
-          <a:xfrm>
-            <a:off x="548640" y="2011680"/>
-            <a:ext cx="10058400" cy="1005840"/>
-          </a:xfrm>
-          <a:prstGeom prst="rect">
-            <a:avLst/>
-          </a:prstGeom>
-          <a:noFill/>
-          <a:ln/>
-        </p:spPr>
-        <p:txBody>
-          <a:bodyPr wrap="square" lIns="0" tIns="0" rIns="0" bIns="0" rtlCol="0" anchor="ctr"/>
-          <a:lstStyle/>
-          <a:p>
-            <a:pPr indent="0" marL="0">
+            <a:pPr marL="0" indent="0">
               <a:buNone/>
             </a:pPr>
             <a:r>
@@ -1489,14 +1136,14 @@
       </p:sp>
       <p:sp>
         <p:nvSpPr>
-          <p:cNvPr id="4" name="Text 2"/>
+          <p:cNvPr id="5" name="Text 3"/>
           <p:cNvSpPr txBox="1"/>
           <p:nvPr/>
         </p:nvSpPr>
         <p:spPr>
           <a:xfrm>
-            <a:off x="548640" y="3063240"/>
-            <a:ext cx="10058400" cy="548640"/>
+            <a:off x="548640" y="2950029"/>
+            <a:ext cx="7315200" cy="457200"/>
           </a:xfrm>
           <a:prstGeom prst="rect">
             <a:avLst/>
@@ -1508,46 +1155,7 @@
           <a:bodyPr wrap="square" lIns="0" tIns="0" rIns="0" bIns="0" rtlCol="0" anchor="ctr"/>
           <a:lstStyle/>
           <a:p>
-            <a:pPr indent="0" marL="0">
-              <a:buNone/>
-            </a:pPr>
-            <a:r>
-              <a:rPr lang="en-US" sz="2200" dirty="0">
-                <a:solidFill>
-                  <a:srgbClr val="FFFFFF"/>
-                </a:solidFill>
-                <a:latin typeface="Arial" pitchFamily="34" charset="0"/>
-                <a:ea typeface="Arial" pitchFamily="34" charset="-122"/>
-                <a:cs typeface="Arial" pitchFamily="34" charset="-120"/>
-              </a:rPr>
-              <a:t>What we delivered · Where we stand · What's next</a:t>
-            </a:r>
-            <a:endParaRPr lang="en-US" sz="2200" dirty="0"/>
-          </a:p>
-        </p:txBody>
-      </p:sp>
-      <p:sp>
-        <p:nvSpPr>
-          <p:cNvPr id="5" name="Text 3"/>
-          <p:cNvSpPr txBox="1"/>
-          <p:nvPr/>
-        </p:nvSpPr>
-        <p:spPr>
-          <a:xfrm>
-            <a:off x="548640" y="3931920"/>
-            <a:ext cx="7315200" cy="457200"/>
-          </a:xfrm>
-          <a:prstGeom prst="rect">
-            <a:avLst/>
-          </a:prstGeom>
-          <a:noFill/>
-          <a:ln/>
-        </p:spPr>
-        <p:txBody>
-          <a:bodyPr wrap="square" lIns="0" tIns="0" rIns="0" bIns="0" rtlCol="0" anchor="ctr"/>
-          <a:lstStyle/>
-          <a:p>
-            <a:pPr indent="0" marL="0">
+            <a:pPr marL="0" indent="0">
               <a:buNone/>
             </a:pPr>
             <a:r>
@@ -1581,6 +1189,7 @@
         <a:solidFill>
           <a:srgbClr val="F4F6FB"/>
         </a:solidFill>
+        <a:effectLst/>
       </p:bgPr>
     </p:bg>
     <p:spTree>
@@ -1618,7 +1227,7 @@
           <a:bodyPr wrap="square" lIns="0" tIns="0" rIns="0" bIns="0" rtlCol="0" anchor="ctr"/>
           <a:lstStyle/>
           <a:p>
-            <a:pPr indent="0" marL="0">
+            <a:pPr marL="0" indent="0">
               <a:buNone/>
             </a:pPr>
             <a:r>
@@ -1630,1165 +1239,766 @@
                 <a:ea typeface="Arial" pitchFamily="34" charset="-122"/>
                 <a:cs typeface="Arial" pitchFamily="34" charset="-120"/>
               </a:rPr>
-              <a:t>What marketing delivered this year</a:t>
+              <a:t>What’s Changing</a:t>
             </a:r>
             <a:endParaRPr lang="en-US" sz="2800" dirty="0"/>
           </a:p>
         </p:txBody>
       </p:sp>
-      <p:sp>
-        <p:nvSpPr>
-          <p:cNvPr id="3" name="Shape 1"/>
-          <p:cNvSpPr/>
-          <p:nvPr/>
-        </p:nvSpPr>
-        <p:spPr>
-          <a:xfrm>
-            <a:off x="548640" y="1188720"/>
-            <a:ext cx="2567178" cy="1463040"/>
-          </a:xfrm>
-          <a:prstGeom prst="roundRect">
-            <a:avLst>
-              <a:gd name="adj" fmla="val 5000"/>
-            </a:avLst>
-          </a:prstGeom>
-          <a:solidFill>
-            <a:srgbClr val="FFFFFF"/>
-          </a:solidFill>
-          <a:ln w="9525">
+      <p:grpSp>
+        <p:nvGrpSpPr>
+          <p:cNvPr id="31" name="Group 30">
+            <a:extLst>
+              <a:ext uri="{FF2B5EF4-FFF2-40B4-BE49-F238E27FC236}">
+                <a16:creationId xmlns:a16="http://schemas.microsoft.com/office/drawing/2014/main" id="{AFF3317C-BE24-43ED-9E89-E424FDB702C6}"/>
+              </a:ext>
+            </a:extLst>
+          </p:cNvPr>
+          <p:cNvGrpSpPr/>
+          <p:nvPr/>
+        </p:nvGrpSpPr>
+        <p:grpSpPr>
+          <a:xfrm>
+            <a:off x="548640" y="1521817"/>
+            <a:ext cx="11091672" cy="3429000"/>
+            <a:chOff x="548640" y="2880360"/>
+            <a:chExt cx="11091672" cy="3429000"/>
+          </a:xfrm>
+        </p:grpSpPr>
+        <p:sp>
+          <p:nvSpPr>
+            <p:cNvPr id="15" name="Shape 13"/>
+            <p:cNvSpPr/>
+            <p:nvPr/>
+          </p:nvSpPr>
+          <p:spPr>
+            <a:xfrm>
+              <a:off x="548640" y="2880360"/>
+              <a:ext cx="2567178" cy="3429000"/>
+            </a:xfrm>
+            <a:prstGeom prst="roundRect">
+              <a:avLst>
+                <a:gd name="adj" fmla="val 2850"/>
+              </a:avLst>
+            </a:prstGeom>
             <a:solidFill>
-              <a:srgbClr val="E6E6E6"/>
+              <a:srgbClr val="FFFFFF"/>
             </a:solidFill>
-            <a:prstDash val="solid"/>
-          </a:ln>
-        </p:spPr>
-      </p:sp>
-      <p:sp>
-        <p:nvSpPr>
-          <p:cNvPr id="4" name="Text 2"/>
-          <p:cNvSpPr txBox="1"/>
-          <p:nvPr/>
-        </p:nvSpPr>
-        <p:spPr>
-          <a:xfrm>
-            <a:off x="777240" y="1325880"/>
-            <a:ext cx="2109978" cy="566928"/>
-          </a:xfrm>
-          <a:prstGeom prst="rect">
-            <a:avLst/>
-          </a:prstGeom>
-          <a:noFill/>
-          <a:ln/>
-        </p:spPr>
-        <p:txBody>
-          <a:bodyPr wrap="square" lIns="0" tIns="0" rIns="0" bIns="0" rtlCol="0" anchor="ctr"/>
-          <a:lstStyle/>
-          <a:p>
-            <a:pPr indent="0" marL="0">
-              <a:buNone/>
-            </a:pPr>
-            <a:r>
-              <a:rPr lang="en-US" sz="3200" b="1" dirty="0">
-                <a:solidFill>
-                  <a:srgbClr val="5CC3AE"/>
-                </a:solidFill>
-                <a:latin typeface="Arial" pitchFamily="34" charset="0"/>
-                <a:ea typeface="Arial" pitchFamily="34" charset="-122"/>
-                <a:cs typeface="Arial" pitchFamily="34" charset="-120"/>
-              </a:rPr>
-              <a:t>1,500+</a:t>
-            </a:r>
-            <a:endParaRPr lang="en-US" sz="3200" dirty="0"/>
-          </a:p>
-        </p:txBody>
-      </p:sp>
-      <p:sp>
-        <p:nvSpPr>
-          <p:cNvPr id="5" name="Text 3"/>
-          <p:cNvSpPr txBox="1"/>
-          <p:nvPr/>
-        </p:nvSpPr>
-        <p:spPr>
-          <a:xfrm>
-            <a:off x="777240" y="1892808"/>
-            <a:ext cx="2109978" cy="457200"/>
-          </a:xfrm>
-          <a:prstGeom prst="rect">
-            <a:avLst/>
-          </a:prstGeom>
-          <a:noFill/>
-          <a:ln/>
-        </p:spPr>
-        <p:txBody>
-          <a:bodyPr wrap="square" lIns="0" tIns="0" rIns="0" bIns="0" rtlCol="0" anchor="t"/>
-          <a:lstStyle/>
-          <a:p>
-            <a:pPr indent="0" marL="0">
-              <a:buNone/>
-            </a:pPr>
-            <a:r>
-              <a:rPr lang="en-US" sz="1100" dirty="0">
-                <a:solidFill>
-                  <a:srgbClr val="22205D"/>
-                </a:solidFill>
-                <a:latin typeface="Arial" pitchFamily="34" charset="0"/>
-                <a:ea typeface="Arial" pitchFamily="34" charset="-122"/>
-                <a:cs typeface="Arial" pitchFamily="34" charset="-120"/>
-              </a:rPr>
-              <a:t>Mari applications through xCelerate, against a 1,000 target</a:t>
-            </a:r>
-            <a:endParaRPr lang="en-US" sz="1100" dirty="0"/>
-          </a:p>
-        </p:txBody>
-      </p:sp>
-      <p:sp>
-        <p:nvSpPr>
-          <p:cNvPr id="6" name="Shape 4"/>
-          <p:cNvSpPr/>
-          <p:nvPr/>
-        </p:nvSpPr>
-        <p:spPr>
-          <a:xfrm>
-            <a:off x="3390138" y="1188720"/>
-            <a:ext cx="2567178" cy="1463040"/>
-          </a:xfrm>
-          <a:prstGeom prst="roundRect">
-            <a:avLst>
-              <a:gd name="adj" fmla="val 5000"/>
-            </a:avLst>
-          </a:prstGeom>
-          <a:solidFill>
-            <a:srgbClr val="FFFFFF"/>
-          </a:solidFill>
-          <a:ln w="9525">
-            <a:solidFill>
-              <a:srgbClr val="E6E6E6"/>
-            </a:solidFill>
-            <a:prstDash val="solid"/>
-          </a:ln>
-        </p:spPr>
-      </p:sp>
-      <p:sp>
-        <p:nvSpPr>
-          <p:cNvPr id="7" name="Text 5"/>
-          <p:cNvSpPr txBox="1"/>
-          <p:nvPr/>
-        </p:nvSpPr>
-        <p:spPr>
-          <a:xfrm>
-            <a:off x="3618738" y="1325880"/>
-            <a:ext cx="2109978" cy="566928"/>
-          </a:xfrm>
-          <a:prstGeom prst="rect">
-            <a:avLst/>
-          </a:prstGeom>
-          <a:noFill/>
-          <a:ln/>
-        </p:spPr>
-        <p:txBody>
-          <a:bodyPr wrap="square" lIns="0" tIns="0" rIns="0" bIns="0" rtlCol="0" anchor="ctr"/>
-          <a:lstStyle/>
-          <a:p>
-            <a:pPr indent="0" marL="0">
-              <a:buNone/>
-            </a:pPr>
-            <a:r>
-              <a:rPr lang="en-US" sz="3200" b="1" dirty="0">
-                <a:solidFill>
-                  <a:srgbClr val="0061F6"/>
-                </a:solidFill>
-                <a:latin typeface="Arial" pitchFamily="34" charset="0"/>
-                <a:ea typeface="Arial" pitchFamily="34" charset="-122"/>
-                <a:cs typeface="Arial" pitchFamily="34" charset="-120"/>
-              </a:rPr>
-              <a:t>87</a:t>
-            </a:r>
-            <a:endParaRPr lang="en-US" sz="3200" dirty="0"/>
-          </a:p>
-        </p:txBody>
-      </p:sp>
-      <p:sp>
-        <p:nvSpPr>
-          <p:cNvPr id="8" name="Text 6"/>
-          <p:cNvSpPr txBox="1"/>
-          <p:nvPr/>
-        </p:nvSpPr>
-        <p:spPr>
-          <a:xfrm>
-            <a:off x="3618738" y="1892808"/>
-            <a:ext cx="2109978" cy="457200"/>
-          </a:xfrm>
-          <a:prstGeom prst="rect">
-            <a:avLst/>
-          </a:prstGeom>
-          <a:noFill/>
-          <a:ln/>
-        </p:spPr>
-        <p:txBody>
-          <a:bodyPr wrap="square" lIns="0" tIns="0" rIns="0" bIns="0" rtlCol="0" anchor="t"/>
-          <a:lstStyle/>
-          <a:p>
-            <a:pPr indent="0" marL="0">
-              <a:buNone/>
-            </a:pPr>
-            <a:r>
-              <a:rPr lang="en-US" sz="1100" dirty="0">
-                <a:solidFill>
-                  <a:srgbClr val="22205D"/>
-                </a:solidFill>
-                <a:latin typeface="Arial" pitchFamily="34" charset="0"/>
-                <a:ea typeface="Arial" pitchFamily="34" charset="-122"/>
-                <a:cs typeface="Arial" pitchFamily="34" charset="-120"/>
-              </a:rPr>
-              <a:t>CEOs reached with the NEPRA compliance campaign</a:t>
-            </a:r>
-            <a:endParaRPr lang="en-US" sz="1100" dirty="0"/>
-          </a:p>
-        </p:txBody>
-      </p:sp>
-      <p:sp>
-        <p:nvSpPr>
-          <p:cNvPr id="9" name="Shape 7"/>
-          <p:cNvSpPr/>
-          <p:nvPr/>
-        </p:nvSpPr>
-        <p:spPr>
-          <a:xfrm>
-            <a:off x="6231636" y="1188720"/>
-            <a:ext cx="2567178" cy="1463040"/>
-          </a:xfrm>
-          <a:prstGeom prst="roundRect">
-            <a:avLst>
-              <a:gd name="adj" fmla="val 5000"/>
-            </a:avLst>
-          </a:prstGeom>
-          <a:solidFill>
-            <a:srgbClr val="FFFFFF"/>
-          </a:solidFill>
-          <a:ln w="9525">
-            <a:solidFill>
-              <a:srgbClr val="E6E6E6"/>
-            </a:solidFill>
-            <a:prstDash val="solid"/>
-          </a:ln>
-        </p:spPr>
-      </p:sp>
-      <p:sp>
-        <p:nvSpPr>
-          <p:cNvPr id="10" name="Text 8"/>
-          <p:cNvSpPr txBox="1"/>
-          <p:nvPr/>
-        </p:nvSpPr>
-        <p:spPr>
-          <a:xfrm>
-            <a:off x="6460236" y="1325880"/>
-            <a:ext cx="2109978" cy="566928"/>
-          </a:xfrm>
-          <a:prstGeom prst="rect">
-            <a:avLst/>
-          </a:prstGeom>
-          <a:noFill/>
-          <a:ln/>
-        </p:spPr>
-        <p:txBody>
-          <a:bodyPr wrap="square" lIns="0" tIns="0" rIns="0" bIns="0" rtlCol="0" anchor="ctr"/>
-          <a:lstStyle/>
-          <a:p>
-            <a:pPr indent="0" marL="0">
-              <a:buNone/>
-            </a:pPr>
-            <a:r>
-              <a:rPr lang="en-US" sz="3200" b="1" dirty="0">
-                <a:solidFill>
-                  <a:srgbClr val="0061F6"/>
-                </a:solidFill>
-                <a:latin typeface="Arial" pitchFamily="34" charset="0"/>
-                <a:ea typeface="Arial" pitchFamily="34" charset="-122"/>
-                <a:cs typeface="Arial" pitchFamily="34" charset="-120"/>
-              </a:rPr>
-              <a:t>3</a:t>
-            </a:r>
-            <a:endParaRPr lang="en-US" sz="3200" dirty="0"/>
-          </a:p>
-        </p:txBody>
-      </p:sp>
-      <p:sp>
-        <p:nvSpPr>
-          <p:cNvPr id="11" name="Text 9"/>
-          <p:cNvSpPr txBox="1"/>
-          <p:nvPr/>
-        </p:nvSpPr>
-        <p:spPr>
-          <a:xfrm>
-            <a:off x="6460236" y="1892808"/>
-            <a:ext cx="2109978" cy="457200"/>
-          </a:xfrm>
-          <a:prstGeom prst="rect">
-            <a:avLst/>
-          </a:prstGeom>
-          <a:noFill/>
-          <a:ln/>
-        </p:spPr>
-        <p:txBody>
-          <a:bodyPr wrap="square" lIns="0" tIns="0" rIns="0" bIns="0" rtlCol="0" anchor="t"/>
-          <a:lstStyle/>
-          <a:p>
-            <a:pPr indent="0" marL="0">
-              <a:buNone/>
-            </a:pPr>
-            <a:r>
-              <a:rPr lang="en-US" sz="1100" dirty="0">
-                <a:solidFill>
-                  <a:srgbClr val="22205D"/>
-                </a:solidFill>
-                <a:latin typeface="Arial" pitchFamily="34" charset="0"/>
-                <a:ea typeface="Arial" pitchFamily="34" charset="-122"/>
-                <a:cs typeface="Arial" pitchFamily="34" charset="-120"/>
-              </a:rPr>
-              <a:t>New case studies for sales: HBL, MAF, Wefi</a:t>
-            </a:r>
-            <a:endParaRPr lang="en-US" sz="1100" dirty="0"/>
-          </a:p>
-        </p:txBody>
-      </p:sp>
-      <p:sp>
-        <p:nvSpPr>
-          <p:cNvPr id="12" name="Shape 10"/>
-          <p:cNvSpPr/>
-          <p:nvPr/>
-        </p:nvSpPr>
-        <p:spPr>
-          <a:xfrm>
-            <a:off x="9073134" y="1188720"/>
-            <a:ext cx="2567178" cy="1463040"/>
-          </a:xfrm>
-          <a:prstGeom prst="roundRect">
-            <a:avLst>
-              <a:gd name="adj" fmla="val 5000"/>
-            </a:avLst>
-          </a:prstGeom>
-          <a:solidFill>
-            <a:srgbClr val="FFFFFF"/>
-          </a:solidFill>
-          <a:ln w="9525">
-            <a:solidFill>
-              <a:srgbClr val="E6E6E6"/>
-            </a:solidFill>
-            <a:prstDash val="solid"/>
-          </a:ln>
-        </p:spPr>
-      </p:sp>
-      <p:sp>
-        <p:nvSpPr>
-          <p:cNvPr id="13" name="Text 11"/>
-          <p:cNvSpPr txBox="1"/>
-          <p:nvPr/>
-        </p:nvSpPr>
-        <p:spPr>
-          <a:xfrm>
-            <a:off x="9301734" y="1325880"/>
-            <a:ext cx="2109978" cy="566928"/>
-          </a:xfrm>
-          <a:prstGeom prst="rect">
-            <a:avLst/>
-          </a:prstGeom>
-          <a:noFill/>
-          <a:ln/>
-        </p:spPr>
-        <p:txBody>
-          <a:bodyPr wrap="square" lIns="0" tIns="0" rIns="0" bIns="0" rtlCol="0" anchor="ctr"/>
-          <a:lstStyle/>
-          <a:p>
-            <a:pPr indent="0" marL="0">
-              <a:buNone/>
-            </a:pPr>
-            <a:r>
-              <a:rPr lang="en-US" sz="3200" b="1" dirty="0">
-                <a:solidFill>
-                  <a:srgbClr val="0098D8"/>
-                </a:solidFill>
-                <a:latin typeface="Arial" pitchFamily="34" charset="0"/>
-                <a:ea typeface="Arial" pitchFamily="34" charset="-122"/>
-                <a:cs typeface="Arial" pitchFamily="34" charset="-120"/>
-              </a:rPr>
-              <a:t>2</a:t>
-            </a:r>
-            <a:endParaRPr lang="en-US" sz="3200" dirty="0"/>
-          </a:p>
-        </p:txBody>
-      </p:sp>
-      <p:sp>
-        <p:nvSpPr>
-          <p:cNvPr id="14" name="Text 12"/>
-          <p:cNvSpPr txBox="1"/>
-          <p:nvPr/>
-        </p:nvSpPr>
-        <p:spPr>
-          <a:xfrm>
-            <a:off x="9301734" y="1892808"/>
-            <a:ext cx="2109978" cy="457200"/>
-          </a:xfrm>
-          <a:prstGeom prst="rect">
-            <a:avLst/>
-          </a:prstGeom>
-          <a:noFill/>
-          <a:ln/>
-        </p:spPr>
-        <p:txBody>
-          <a:bodyPr wrap="square" lIns="0" tIns="0" rIns="0" bIns="0" rtlCol="0" anchor="t"/>
-          <a:lstStyle/>
-          <a:p>
-            <a:pPr indent="0" marL="0">
-              <a:buNone/>
-            </a:pPr>
-            <a:r>
-              <a:rPr lang="en-US" sz="1100" dirty="0">
-                <a:solidFill>
-                  <a:srgbClr val="22205D"/>
-                </a:solidFill>
-                <a:latin typeface="Arial" pitchFamily="34" charset="0"/>
-                <a:ea typeface="Arial" pitchFamily="34" charset="-122"/>
-                <a:cs typeface="Arial" pitchFamily="34" charset="-120"/>
-              </a:rPr>
-              <a:t>Events delivered: Geshidocon and Mari Cohort I graduation</a:t>
-            </a:r>
-            <a:endParaRPr lang="en-US" sz="1100" dirty="0"/>
-          </a:p>
-        </p:txBody>
-      </p:sp>
-      <p:sp>
-        <p:nvSpPr>
-          <p:cNvPr id="15" name="Shape 13"/>
-          <p:cNvSpPr/>
-          <p:nvPr/>
-        </p:nvSpPr>
-        <p:spPr>
-          <a:xfrm>
-            <a:off x="548640" y="2880360"/>
-            <a:ext cx="2567178" cy="3429000"/>
-          </a:xfrm>
-          <a:prstGeom prst="roundRect">
-            <a:avLst>
-              <a:gd name="adj" fmla="val 2850"/>
-            </a:avLst>
-          </a:prstGeom>
-          <a:solidFill>
-            <a:srgbClr val="FFFFFF"/>
-          </a:solidFill>
-          <a:ln w="9525">
-            <a:solidFill>
-              <a:srgbClr val="E6E6E6"/>
-            </a:solidFill>
-            <a:prstDash val="solid"/>
-          </a:ln>
-        </p:spPr>
-      </p:sp>
-      <p:sp>
-        <p:nvSpPr>
-          <p:cNvPr id="16" name="Shape 14"/>
-          <p:cNvSpPr/>
-          <p:nvPr/>
-        </p:nvSpPr>
-        <p:spPr>
-          <a:xfrm>
-            <a:off x="777240" y="3081528"/>
-            <a:ext cx="2109978" cy="347472"/>
-          </a:xfrm>
-          <a:prstGeom prst="roundRect">
-            <a:avLst>
-              <a:gd name="adj" fmla="val 18421"/>
-            </a:avLst>
-          </a:prstGeom>
-          <a:solidFill>
-            <a:srgbClr val="22205D"/>
-          </a:solidFill>
-          <a:ln w="12700">
+            <a:ln w="9525">
+              <a:solidFill>
+                <a:srgbClr val="E6E6E6"/>
+              </a:solidFill>
+              <a:prstDash val="solid"/>
+            </a:ln>
+          </p:spPr>
+        </p:sp>
+        <p:sp>
+          <p:nvSpPr>
+            <p:cNvPr id="16" name="Shape 14"/>
+            <p:cNvSpPr/>
+            <p:nvPr/>
+          </p:nvSpPr>
+          <p:spPr>
+            <a:xfrm>
+              <a:off x="777240" y="3081528"/>
+              <a:ext cx="2109978" cy="347472"/>
+            </a:xfrm>
+            <a:prstGeom prst="roundRect">
+              <a:avLst>
+                <a:gd name="adj" fmla="val 18421"/>
+              </a:avLst>
+            </a:prstGeom>
             <a:solidFill>
               <a:srgbClr val="22205D"/>
             </a:solidFill>
-            <a:prstDash val="solid"/>
-          </a:ln>
-        </p:spPr>
-      </p:sp>
-      <p:sp>
-        <p:nvSpPr>
-          <p:cNvPr id="17" name="Text 15"/>
-          <p:cNvSpPr txBox="1"/>
-          <p:nvPr/>
-        </p:nvSpPr>
-        <p:spPr>
-          <a:xfrm>
-            <a:off x="777240" y="3081528"/>
-            <a:ext cx="2109978" cy="347472"/>
-          </a:xfrm>
-          <a:prstGeom prst="rect">
-            <a:avLst/>
-          </a:prstGeom>
-          <a:noFill/>
-          <a:ln/>
-        </p:spPr>
-        <p:txBody>
-          <a:bodyPr wrap="square" lIns="0" tIns="0" rIns="0" bIns="0" rtlCol="0" anchor="ctr"/>
-          <a:lstStyle/>
-          <a:p>
-            <a:pPr algn="ctr" indent="0" marL="0">
-              <a:buNone/>
-            </a:pPr>
-            <a:r>
-              <a:rPr lang="en-US" sz="1100" b="1" dirty="0">
-                <a:solidFill>
-                  <a:srgbClr val="FFFFFF"/>
-                </a:solidFill>
-                <a:latin typeface="Arial" pitchFamily="34" charset="0"/>
-                <a:ea typeface="Arial" pitchFamily="34" charset="-122"/>
-                <a:cs typeface="Arial" pitchFamily="34" charset="-120"/>
-              </a:rPr>
-              <a:t>Services</a:t>
-            </a:r>
-            <a:endParaRPr lang="en-US" sz="1100" dirty="0"/>
-          </a:p>
-        </p:txBody>
-      </p:sp>
-      <p:sp>
-        <p:nvSpPr>
-          <p:cNvPr id="18" name="Text 16"/>
-          <p:cNvSpPr txBox="1"/>
-          <p:nvPr/>
-        </p:nvSpPr>
-        <p:spPr>
-          <a:xfrm>
-            <a:off x="777240" y="3611880"/>
-            <a:ext cx="2155698" cy="2560320"/>
-          </a:xfrm>
-          <a:prstGeom prst="rect">
-            <a:avLst/>
-          </a:prstGeom>
-          <a:noFill/>
-          <a:ln/>
-        </p:spPr>
-        <p:txBody>
-          <a:bodyPr wrap="square" lIns="0" tIns="0" rIns="0" bIns="0" rtlCol="0" anchor="t"/>
-          <a:lstStyle/>
-          <a:p>
-            <a:pPr marL="342900" indent="-342900">
-              <a:spcAft>
-                <a:spcPts val="800"/>
-              </a:spcAft>
-              <a:buSzPct val="100000"/>
-              <a:buChar char="•"/>
-            </a:pPr>
-            <a:r>
-              <a:rPr lang="en-US" sz="1250" dirty="0">
-                <a:solidFill>
-                  <a:srgbClr val="22205D"/>
-                </a:solidFill>
-                <a:latin typeface="Arial" pitchFamily="34" charset="0"/>
-                <a:ea typeface="Arial" pitchFamily="34" charset="-122"/>
-                <a:cs typeface="Arial" pitchFamily="34" charset="-120"/>
-              </a:rPr>
-              <a:t>Repositioned from "AI and digital engineering" to data and AI working together</a:t>
-            </a:r>
-            <a:endParaRPr lang="en-US" sz="1250" dirty="0"/>
-          </a:p>
-          <a:p>
-            <a:pPr marL="342900" indent="-342900">
-              <a:spcAft>
-                <a:spcPts val="800"/>
-              </a:spcAft>
-              <a:buSzPct val="100000"/>
-              <a:buChar char="•"/>
-            </a:pPr>
-            <a:r>
-              <a:rPr lang="en-US" sz="1250" dirty="0">
-                <a:solidFill>
-                  <a:srgbClr val="22205D"/>
-                </a:solidFill>
-                <a:latin typeface="Arial" pitchFamily="34" charset="0"/>
-                <a:ea typeface="Arial" pitchFamily="34" charset="-122"/>
-                <a:cs typeface="Arial" pitchFamily="34" charset="-120"/>
-              </a:rPr>
-              <a:t>AI Security push: NEPRA landing page and website banner</a:t>
-            </a:r>
-            <a:endParaRPr lang="en-US" sz="1250" dirty="0"/>
-          </a:p>
-          <a:p>
-            <a:pPr marL="342900" indent="-342900">
-              <a:spcAft>
-                <a:spcPts val="800"/>
-              </a:spcAft>
-              <a:buSzPct val="100000"/>
-              <a:buChar char="•"/>
-            </a:pPr>
-            <a:r>
-              <a:rPr lang="en-US" sz="1250" dirty="0">
-                <a:solidFill>
-                  <a:srgbClr val="22205D"/>
-                </a:solidFill>
-                <a:latin typeface="Arial" pitchFamily="34" charset="0"/>
-                <a:ea typeface="Arial" pitchFamily="34" charset="-122"/>
-                <a:cs typeface="Arial" pitchFamily="34" charset="-120"/>
-              </a:rPr>
-              <a:t>NEPRA case study: ACT Wind</a:t>
-            </a:r>
-            <a:endParaRPr lang="en-US" sz="1250" dirty="0"/>
-          </a:p>
-        </p:txBody>
-      </p:sp>
-      <p:sp>
-        <p:nvSpPr>
-          <p:cNvPr id="19" name="Shape 17"/>
-          <p:cNvSpPr/>
-          <p:nvPr/>
-        </p:nvSpPr>
-        <p:spPr>
-          <a:xfrm>
-            <a:off x="3390138" y="2880360"/>
-            <a:ext cx="2567178" cy="3429000"/>
-          </a:xfrm>
-          <a:prstGeom prst="roundRect">
-            <a:avLst>
-              <a:gd name="adj" fmla="val 2850"/>
-            </a:avLst>
-          </a:prstGeom>
-          <a:solidFill>
-            <a:srgbClr val="FFFFFF"/>
-          </a:solidFill>
-          <a:ln w="9525">
+            <a:ln w="12700">
+              <a:solidFill>
+                <a:srgbClr val="22205D"/>
+              </a:solidFill>
+              <a:prstDash val="solid"/>
+            </a:ln>
+          </p:spPr>
+        </p:sp>
+        <p:sp>
+          <p:nvSpPr>
+            <p:cNvPr id="17" name="Text 15"/>
+            <p:cNvSpPr txBox="1"/>
+            <p:nvPr/>
+          </p:nvSpPr>
+          <p:spPr>
+            <a:xfrm>
+              <a:off x="777240" y="3081528"/>
+              <a:ext cx="2109978" cy="347472"/>
+            </a:xfrm>
+            <a:prstGeom prst="rect">
+              <a:avLst/>
+            </a:prstGeom>
+            <a:noFill/>
+            <a:ln/>
+          </p:spPr>
+          <p:txBody>
+            <a:bodyPr wrap="square" lIns="0" tIns="0" rIns="0" bIns="0" rtlCol="0" anchor="ctr"/>
+            <a:lstStyle/>
+            <a:p>
+              <a:pPr marL="0" indent="0" algn="ctr">
+                <a:buNone/>
+              </a:pPr>
+              <a:r>
+                <a:rPr lang="en-US" sz="1100" b="1" dirty="0">
+                  <a:solidFill>
+                    <a:srgbClr val="FFFFFF"/>
+                  </a:solidFill>
+                  <a:latin typeface="Arial" pitchFamily="34" charset="0"/>
+                  <a:ea typeface="Arial" pitchFamily="34" charset="-122"/>
+                  <a:cs typeface="Arial" pitchFamily="34" charset="-120"/>
+                </a:rPr>
+                <a:t>Services</a:t>
+              </a:r>
+              <a:endParaRPr lang="en-US" sz="1100" dirty="0"/>
+            </a:p>
+          </p:txBody>
+        </p:sp>
+        <p:sp>
+          <p:nvSpPr>
+            <p:cNvPr id="18" name="Text 16"/>
+            <p:cNvSpPr txBox="1"/>
+            <p:nvPr/>
+          </p:nvSpPr>
+          <p:spPr>
+            <a:xfrm>
+              <a:off x="777240" y="3611880"/>
+              <a:ext cx="2155698" cy="2560320"/>
+            </a:xfrm>
+            <a:prstGeom prst="rect">
+              <a:avLst/>
+            </a:prstGeom>
+            <a:noFill/>
+            <a:ln/>
+          </p:spPr>
+          <p:txBody>
+            <a:bodyPr wrap="square" lIns="0" tIns="0" rIns="0" bIns="0" rtlCol="0" anchor="t"/>
+            <a:lstStyle/>
+            <a:p>
+              <a:pPr marL="342900" indent="-342900">
+                <a:spcAft>
+                  <a:spcPts val="800"/>
+                </a:spcAft>
+                <a:buSzPct val="100000"/>
+                <a:buChar char="•"/>
+              </a:pPr>
+              <a:r>
+                <a:rPr lang="en-US" sz="1250" dirty="0">
+                  <a:solidFill>
+                    <a:srgbClr val="22205D"/>
+                  </a:solidFill>
+                  <a:latin typeface="Arial" pitchFamily="34" charset="0"/>
+                  <a:ea typeface="Arial" pitchFamily="34" charset="-122"/>
+                  <a:cs typeface="Arial" pitchFamily="34" charset="-120"/>
+                </a:rPr>
+                <a:t>Repositioned from "AI and digital engineering" to Data &amp; AI working together</a:t>
+              </a:r>
+              <a:endParaRPr lang="en-US" sz="1250" dirty="0"/>
+            </a:p>
+            <a:p>
+              <a:pPr marL="342900" indent="-342900">
+                <a:spcAft>
+                  <a:spcPts val="800"/>
+                </a:spcAft>
+                <a:buSzPct val="100000"/>
+                <a:buChar char="•"/>
+              </a:pPr>
+              <a:r>
+                <a:rPr lang="en-US" sz="1250" dirty="0">
+                  <a:solidFill>
+                    <a:srgbClr val="22205D"/>
+                  </a:solidFill>
+                  <a:latin typeface="Arial" pitchFamily="34" charset="0"/>
+                  <a:ea typeface="Arial" pitchFamily="34" charset="-122"/>
+                  <a:cs typeface="Arial" pitchFamily="34" charset="-120"/>
+                </a:rPr>
+                <a:t>AI Security push: NEPRA landing page and website banner</a:t>
+              </a:r>
+              <a:endParaRPr lang="en-US" sz="1250" dirty="0"/>
+            </a:p>
+            <a:p>
+              <a:pPr marL="342900" indent="-342900">
+                <a:spcAft>
+                  <a:spcPts val="800"/>
+                </a:spcAft>
+                <a:buSzPct val="100000"/>
+                <a:buChar char="•"/>
+              </a:pPr>
+              <a:r>
+                <a:rPr lang="en-US" sz="1250" dirty="0">
+                  <a:solidFill>
+                    <a:srgbClr val="22205D"/>
+                  </a:solidFill>
+                  <a:latin typeface="Arial" pitchFamily="34" charset="0"/>
+                  <a:ea typeface="Arial" pitchFamily="34" charset="-122"/>
+                  <a:cs typeface="Arial" pitchFamily="34" charset="-120"/>
+                </a:rPr>
+                <a:t>NEPRA case study: ACT Wind</a:t>
+              </a:r>
+              <a:endParaRPr lang="en-US" sz="1250" dirty="0"/>
+            </a:p>
+          </p:txBody>
+        </p:sp>
+        <p:sp>
+          <p:nvSpPr>
+            <p:cNvPr id="19" name="Shape 17"/>
+            <p:cNvSpPr/>
+            <p:nvPr/>
+          </p:nvSpPr>
+          <p:spPr>
+            <a:xfrm>
+              <a:off x="3390138" y="2880360"/>
+              <a:ext cx="2567178" cy="3429000"/>
+            </a:xfrm>
+            <a:prstGeom prst="roundRect">
+              <a:avLst>
+                <a:gd name="adj" fmla="val 2850"/>
+              </a:avLst>
+            </a:prstGeom>
             <a:solidFill>
-              <a:srgbClr val="E6E6E6"/>
+              <a:srgbClr val="FFFFFF"/>
             </a:solidFill>
-            <a:prstDash val="solid"/>
-          </a:ln>
-        </p:spPr>
-      </p:sp>
-      <p:sp>
-        <p:nvSpPr>
-          <p:cNvPr id="20" name="Shape 18"/>
-          <p:cNvSpPr/>
-          <p:nvPr/>
-        </p:nvSpPr>
-        <p:spPr>
-          <a:xfrm>
-            <a:off x="3618738" y="3081528"/>
-            <a:ext cx="2109978" cy="347472"/>
-          </a:xfrm>
-          <a:prstGeom prst="roundRect">
-            <a:avLst>
-              <a:gd name="adj" fmla="val 18421"/>
-            </a:avLst>
-          </a:prstGeom>
-          <a:solidFill>
-            <a:srgbClr val="0061F6"/>
-          </a:solidFill>
-          <a:ln w="12700">
+            <a:ln w="9525">
+              <a:solidFill>
+                <a:srgbClr val="E6E6E6"/>
+              </a:solidFill>
+              <a:prstDash val="solid"/>
+            </a:ln>
+          </p:spPr>
+        </p:sp>
+        <p:sp>
+          <p:nvSpPr>
+            <p:cNvPr id="20" name="Shape 18"/>
+            <p:cNvSpPr/>
+            <p:nvPr/>
+          </p:nvSpPr>
+          <p:spPr>
+            <a:xfrm>
+              <a:off x="3618738" y="3081528"/>
+              <a:ext cx="2109978" cy="347472"/>
+            </a:xfrm>
+            <a:prstGeom prst="roundRect">
+              <a:avLst>
+                <a:gd name="adj" fmla="val 18421"/>
+              </a:avLst>
+            </a:prstGeom>
             <a:solidFill>
               <a:srgbClr val="0061F6"/>
             </a:solidFill>
-            <a:prstDash val="solid"/>
-          </a:ln>
-        </p:spPr>
-      </p:sp>
-      <p:sp>
-        <p:nvSpPr>
-          <p:cNvPr id="21" name="Text 19"/>
-          <p:cNvSpPr txBox="1"/>
-          <p:nvPr/>
-        </p:nvSpPr>
-        <p:spPr>
-          <a:xfrm>
-            <a:off x="3618738" y="3081528"/>
-            <a:ext cx="2109978" cy="347472"/>
-          </a:xfrm>
-          <a:prstGeom prst="rect">
-            <a:avLst/>
-          </a:prstGeom>
-          <a:noFill/>
-          <a:ln/>
-        </p:spPr>
-        <p:txBody>
-          <a:bodyPr wrap="square" lIns="0" tIns="0" rIns="0" bIns="0" rtlCol="0" anchor="ctr"/>
-          <a:lstStyle/>
-          <a:p>
-            <a:pPr algn="ctr" indent="0" marL="0">
-              <a:buNone/>
-            </a:pPr>
-            <a:r>
-              <a:rPr lang="en-US" sz="1100" b="1" dirty="0">
-                <a:solidFill>
-                  <a:srgbClr val="FFFFFF"/>
-                </a:solidFill>
-                <a:latin typeface="Arial" pitchFamily="34" charset="0"/>
-                <a:ea typeface="Arial" pitchFamily="34" charset="-122"/>
-                <a:cs typeface="Arial" pitchFamily="34" charset="-120"/>
-              </a:rPr>
-              <a:t>Sales deck</a:t>
-            </a:r>
-            <a:endParaRPr lang="en-US" sz="1100" dirty="0"/>
-          </a:p>
-        </p:txBody>
-      </p:sp>
-      <p:sp>
-        <p:nvSpPr>
-          <p:cNvPr id="22" name="Text 20"/>
-          <p:cNvSpPr txBox="1"/>
-          <p:nvPr/>
-        </p:nvSpPr>
-        <p:spPr>
-          <a:xfrm>
-            <a:off x="3618738" y="3611880"/>
-            <a:ext cx="2155698" cy="2560320"/>
-          </a:xfrm>
-          <a:prstGeom prst="rect">
-            <a:avLst/>
-          </a:prstGeom>
-          <a:noFill/>
-          <a:ln/>
-        </p:spPr>
-        <p:txBody>
-          <a:bodyPr wrap="square" lIns="0" tIns="0" rIns="0" bIns="0" rtlCol="0" anchor="t"/>
-          <a:lstStyle/>
-          <a:p>
-            <a:pPr marL="342900" indent="-342900">
-              <a:spcAft>
-                <a:spcPts val="800"/>
-              </a:spcAft>
-              <a:buSzPct val="100000"/>
-              <a:buChar char="•"/>
-            </a:pPr>
-            <a:r>
-              <a:rPr lang="en-US" sz="1250" dirty="0">
-                <a:solidFill>
-                  <a:srgbClr val="22205D"/>
-                </a:solidFill>
-                <a:latin typeface="Arial" pitchFamily="34" charset="0"/>
-                <a:ea typeface="Arial" pitchFamily="34" charset="-122"/>
-                <a:cs typeface="Arial" pitchFamily="34" charset="-120"/>
-              </a:rPr>
-              <a:t>New company intro</a:t>
-            </a:r>
-            <a:endParaRPr lang="en-US" sz="1250" dirty="0"/>
-          </a:p>
-          <a:p>
-            <a:pPr marL="342900" indent="-342900">
-              <a:spcAft>
-                <a:spcPts val="800"/>
-              </a:spcAft>
-              <a:buSzPct val="100000"/>
-              <a:buChar char="•"/>
-            </a:pPr>
-            <a:r>
-              <a:rPr lang="en-US" sz="1250" dirty="0">
-                <a:solidFill>
-                  <a:srgbClr val="22205D"/>
-                </a:solidFill>
-                <a:latin typeface="Arial" pitchFamily="34" charset="0"/>
-                <a:ea typeface="Arial" pitchFamily="34" charset="-122"/>
-                <a:cs typeface="Arial" pitchFamily="34" charset="-120"/>
-              </a:rPr>
-              <a:t>Leadership team</a:t>
-            </a:r>
-            <a:endParaRPr lang="en-US" sz="1250" dirty="0"/>
-          </a:p>
-          <a:p>
-            <a:pPr marL="342900" indent="-342900">
-              <a:spcAft>
-                <a:spcPts val="800"/>
-              </a:spcAft>
-              <a:buSzPct val="100000"/>
-              <a:buChar char="•"/>
-            </a:pPr>
-            <a:r>
-              <a:rPr lang="en-US" sz="1250" dirty="0">
-                <a:solidFill>
-                  <a:srgbClr val="22205D"/>
-                </a:solidFill>
-                <a:latin typeface="Arial" pitchFamily="34" charset="0"/>
-                <a:ea typeface="Arial" pitchFamily="34" charset="-122"/>
-                <a:cs typeface="Arial" pitchFamily="34" charset="-120"/>
-              </a:rPr>
-              <a:t>3 new case studies</a:t>
-            </a:r>
-            <a:endParaRPr lang="en-US" sz="1250" dirty="0"/>
-          </a:p>
-          <a:p>
-            <a:pPr marL="342900" indent="-342900">
-              <a:spcAft>
-                <a:spcPts val="800"/>
-              </a:spcAft>
-              <a:buSzPct val="100000"/>
-              <a:buChar char="•"/>
-            </a:pPr>
-            <a:r>
-              <a:rPr lang="en-US" sz="1250" dirty="0">
-                <a:solidFill>
-                  <a:srgbClr val="22205D"/>
-                </a:solidFill>
-                <a:latin typeface="Arial" pitchFamily="34" charset="0"/>
-                <a:ea typeface="Arial" pitchFamily="34" charset="-122"/>
-                <a:cs typeface="Arial" pitchFamily="34" charset="-120"/>
-              </a:rPr>
-              <a:t>Our agentic AI process</a:t>
-            </a:r>
-            <a:endParaRPr lang="en-US" sz="1250" dirty="0"/>
-          </a:p>
-        </p:txBody>
-      </p:sp>
-      <p:sp>
-        <p:nvSpPr>
-          <p:cNvPr id="23" name="Shape 21"/>
-          <p:cNvSpPr/>
-          <p:nvPr/>
-        </p:nvSpPr>
-        <p:spPr>
-          <a:xfrm>
-            <a:off x="6231636" y="2880360"/>
-            <a:ext cx="2567178" cy="3429000"/>
-          </a:xfrm>
-          <a:prstGeom prst="roundRect">
-            <a:avLst>
-              <a:gd name="adj" fmla="val 2850"/>
-            </a:avLst>
-          </a:prstGeom>
-          <a:solidFill>
-            <a:srgbClr val="FFFFFF"/>
-          </a:solidFill>
-          <a:ln w="9525">
+            <a:ln w="12700">
+              <a:solidFill>
+                <a:srgbClr val="0061F6"/>
+              </a:solidFill>
+              <a:prstDash val="solid"/>
+            </a:ln>
+          </p:spPr>
+        </p:sp>
+        <p:sp>
+          <p:nvSpPr>
+            <p:cNvPr id="21" name="Text 19"/>
+            <p:cNvSpPr txBox="1"/>
+            <p:nvPr/>
+          </p:nvSpPr>
+          <p:spPr>
+            <a:xfrm>
+              <a:off x="3618738" y="3081528"/>
+              <a:ext cx="2109978" cy="347472"/>
+            </a:xfrm>
+            <a:prstGeom prst="rect">
+              <a:avLst/>
+            </a:prstGeom>
+            <a:noFill/>
+            <a:ln/>
+          </p:spPr>
+          <p:txBody>
+            <a:bodyPr wrap="square" lIns="0" tIns="0" rIns="0" bIns="0" rtlCol="0" anchor="ctr"/>
+            <a:lstStyle/>
+            <a:p>
+              <a:pPr marL="0" indent="0" algn="ctr">
+                <a:buNone/>
+              </a:pPr>
+              <a:r>
+                <a:rPr lang="en-US" sz="1100" b="1" dirty="0">
+                  <a:solidFill>
+                    <a:srgbClr val="FFFFFF"/>
+                  </a:solidFill>
+                  <a:latin typeface="Arial" pitchFamily="34" charset="0"/>
+                  <a:ea typeface="Arial" pitchFamily="34" charset="-122"/>
+                  <a:cs typeface="Arial" pitchFamily="34" charset="-120"/>
+                </a:rPr>
+                <a:t>Sales deck</a:t>
+              </a:r>
+              <a:endParaRPr lang="en-US" sz="1100" dirty="0"/>
+            </a:p>
+          </p:txBody>
+        </p:sp>
+        <p:sp>
+          <p:nvSpPr>
+            <p:cNvPr id="22" name="Text 20"/>
+            <p:cNvSpPr txBox="1"/>
+            <p:nvPr/>
+          </p:nvSpPr>
+          <p:spPr>
+            <a:xfrm>
+              <a:off x="3618738" y="3611880"/>
+              <a:ext cx="2155698" cy="2560320"/>
+            </a:xfrm>
+            <a:prstGeom prst="rect">
+              <a:avLst/>
+            </a:prstGeom>
+            <a:noFill/>
+            <a:ln/>
+          </p:spPr>
+          <p:txBody>
+            <a:bodyPr wrap="square" lIns="0" tIns="0" rIns="0" bIns="0" rtlCol="0" anchor="t"/>
+            <a:lstStyle/>
+            <a:p>
+              <a:pPr marL="342900" indent="-342900">
+                <a:spcAft>
+                  <a:spcPts val="800"/>
+                </a:spcAft>
+                <a:buSzPct val="100000"/>
+                <a:buChar char="•"/>
+              </a:pPr>
+              <a:r>
+                <a:rPr lang="en-US" sz="1250" dirty="0">
+                  <a:solidFill>
+                    <a:srgbClr val="22205D"/>
+                  </a:solidFill>
+                  <a:latin typeface="Arial" pitchFamily="34" charset="0"/>
+                  <a:ea typeface="Arial" pitchFamily="34" charset="-122"/>
+                  <a:cs typeface="Arial" pitchFamily="34" charset="-120"/>
+                </a:rPr>
+                <a:t>New company intro</a:t>
+              </a:r>
+              <a:endParaRPr lang="en-US" sz="1250" dirty="0"/>
+            </a:p>
+            <a:p>
+              <a:pPr marL="342900" indent="-342900">
+                <a:spcAft>
+                  <a:spcPts val="800"/>
+                </a:spcAft>
+                <a:buSzPct val="100000"/>
+                <a:buChar char="•"/>
+              </a:pPr>
+              <a:r>
+                <a:rPr lang="en-US" sz="1250" dirty="0">
+                  <a:solidFill>
+                    <a:srgbClr val="22205D"/>
+                  </a:solidFill>
+                  <a:latin typeface="Arial" pitchFamily="34" charset="0"/>
+                  <a:ea typeface="Arial" pitchFamily="34" charset="-122"/>
+                  <a:cs typeface="Arial" pitchFamily="34" charset="-120"/>
+                </a:rPr>
+                <a:t>Leadership team</a:t>
+              </a:r>
+              <a:endParaRPr lang="en-US" sz="1250" dirty="0"/>
+            </a:p>
+            <a:p>
+              <a:pPr marL="342900" indent="-342900">
+                <a:spcAft>
+                  <a:spcPts val="800"/>
+                </a:spcAft>
+                <a:buSzPct val="100000"/>
+                <a:buChar char="•"/>
+              </a:pPr>
+              <a:r>
+                <a:rPr lang="en-US" sz="1250" dirty="0">
+                  <a:solidFill>
+                    <a:srgbClr val="22205D"/>
+                  </a:solidFill>
+                  <a:latin typeface="Arial" pitchFamily="34" charset="0"/>
+                  <a:ea typeface="Arial" pitchFamily="34" charset="-122"/>
+                  <a:cs typeface="Arial" pitchFamily="34" charset="-120"/>
+                </a:rPr>
+                <a:t>3 new case studies</a:t>
+              </a:r>
+              <a:endParaRPr lang="en-US" sz="1250" dirty="0"/>
+            </a:p>
+            <a:p>
+              <a:pPr marL="342900" indent="-342900">
+                <a:spcAft>
+                  <a:spcPts val="800"/>
+                </a:spcAft>
+                <a:buSzPct val="100000"/>
+                <a:buChar char="•"/>
+              </a:pPr>
+              <a:r>
+                <a:rPr lang="en-US" sz="1250" dirty="0">
+                  <a:solidFill>
+                    <a:srgbClr val="22205D"/>
+                  </a:solidFill>
+                  <a:latin typeface="Arial" pitchFamily="34" charset="0"/>
+                  <a:ea typeface="Arial" pitchFamily="34" charset="-122"/>
+                  <a:cs typeface="Arial" pitchFamily="34" charset="-120"/>
+                </a:rPr>
+                <a:t>Our agentic AI process</a:t>
+              </a:r>
+              <a:endParaRPr lang="en-US" sz="1250" dirty="0"/>
+            </a:p>
+          </p:txBody>
+        </p:sp>
+        <p:sp>
+          <p:nvSpPr>
+            <p:cNvPr id="23" name="Shape 21"/>
+            <p:cNvSpPr/>
+            <p:nvPr/>
+          </p:nvSpPr>
+          <p:spPr>
+            <a:xfrm>
+              <a:off x="6231636" y="2880360"/>
+              <a:ext cx="2567178" cy="3429000"/>
+            </a:xfrm>
+            <a:prstGeom prst="roundRect">
+              <a:avLst>
+                <a:gd name="adj" fmla="val 2850"/>
+              </a:avLst>
+            </a:prstGeom>
             <a:solidFill>
-              <a:srgbClr val="E6E6E6"/>
+              <a:srgbClr val="FFFFFF"/>
             </a:solidFill>
-            <a:prstDash val="solid"/>
-          </a:ln>
-        </p:spPr>
-      </p:sp>
-      <p:sp>
-        <p:nvSpPr>
-          <p:cNvPr id="24" name="Shape 22"/>
-          <p:cNvSpPr/>
-          <p:nvPr/>
-        </p:nvSpPr>
-        <p:spPr>
-          <a:xfrm>
-            <a:off x="6460236" y="3081528"/>
-            <a:ext cx="2109978" cy="347472"/>
-          </a:xfrm>
-          <a:prstGeom prst="roundRect">
-            <a:avLst>
-              <a:gd name="adj" fmla="val 18421"/>
-            </a:avLst>
-          </a:prstGeom>
-          <a:solidFill>
-            <a:srgbClr val="0098D8"/>
-          </a:solidFill>
-          <a:ln w="12700">
+            <a:ln w="9525">
+              <a:solidFill>
+                <a:srgbClr val="E6E6E6"/>
+              </a:solidFill>
+              <a:prstDash val="solid"/>
+            </a:ln>
+          </p:spPr>
+        </p:sp>
+        <p:sp>
+          <p:nvSpPr>
+            <p:cNvPr id="24" name="Shape 22"/>
+            <p:cNvSpPr/>
+            <p:nvPr/>
+          </p:nvSpPr>
+          <p:spPr>
+            <a:xfrm>
+              <a:off x="6460236" y="3081528"/>
+              <a:ext cx="2109978" cy="347472"/>
+            </a:xfrm>
+            <a:prstGeom prst="roundRect">
+              <a:avLst>
+                <a:gd name="adj" fmla="val 18421"/>
+              </a:avLst>
+            </a:prstGeom>
             <a:solidFill>
               <a:srgbClr val="0098D8"/>
             </a:solidFill>
-            <a:prstDash val="solid"/>
-          </a:ln>
-        </p:spPr>
-      </p:sp>
-      <p:sp>
-        <p:nvSpPr>
-          <p:cNvPr id="25" name="Text 23"/>
-          <p:cNvSpPr txBox="1"/>
-          <p:nvPr/>
-        </p:nvSpPr>
-        <p:spPr>
-          <a:xfrm>
-            <a:off x="6460236" y="3081528"/>
-            <a:ext cx="2109978" cy="347472"/>
-          </a:xfrm>
-          <a:prstGeom prst="rect">
-            <a:avLst/>
-          </a:prstGeom>
-          <a:noFill/>
-          <a:ln/>
-        </p:spPr>
-        <p:txBody>
-          <a:bodyPr wrap="square" lIns="0" tIns="0" rIns="0" bIns="0" rtlCol="0" anchor="ctr"/>
-          <a:lstStyle/>
-          <a:p>
-            <a:pPr algn="ctr" indent="0" marL="0">
-              <a:buNone/>
-            </a:pPr>
-            <a:r>
-              <a:rPr lang="en-US" sz="1100" b="1" dirty="0">
-                <a:solidFill>
-                  <a:srgbClr val="FFFFFF"/>
-                </a:solidFill>
-                <a:latin typeface="Arial" pitchFamily="34" charset="0"/>
-                <a:ea typeface="Arial" pitchFamily="34" charset="-122"/>
-                <a:cs typeface="Arial" pitchFamily="34" charset="-120"/>
-              </a:rPr>
-              <a:t>xCelerate &amp; events</a:t>
-            </a:r>
-            <a:endParaRPr lang="en-US" sz="1100" dirty="0"/>
-          </a:p>
-        </p:txBody>
-      </p:sp>
-      <p:sp>
-        <p:nvSpPr>
-          <p:cNvPr id="26" name="Text 24"/>
-          <p:cNvSpPr txBox="1"/>
-          <p:nvPr/>
-        </p:nvSpPr>
-        <p:spPr>
-          <a:xfrm>
-            <a:off x="6460236" y="3611880"/>
-            <a:ext cx="2155698" cy="2560320"/>
-          </a:xfrm>
-          <a:prstGeom prst="rect">
-            <a:avLst/>
-          </a:prstGeom>
-          <a:noFill/>
-          <a:ln/>
-        </p:spPr>
-        <p:txBody>
-          <a:bodyPr wrap="square" lIns="0" tIns="0" rIns="0" bIns="0" rtlCol="0" anchor="t"/>
-          <a:lstStyle/>
-          <a:p>
-            <a:pPr marL="342900" indent="-342900">
-              <a:spcAft>
-                <a:spcPts val="800"/>
-              </a:spcAft>
-              <a:buSzPct val="100000"/>
-              <a:buChar char="•"/>
-            </a:pPr>
-            <a:r>
-              <a:rPr lang="en-US" sz="1250" dirty="0">
-                <a:solidFill>
-                  <a:srgbClr val="22205D"/>
-                </a:solidFill>
-                <a:latin typeface="Arial" pitchFamily="34" charset="0"/>
-                <a:ea typeface="Arial" pitchFamily="34" charset="-122"/>
-                <a:cs typeface="Arial" pitchFamily="34" charset="-120"/>
-              </a:rPr>
-              <a:t>Mari campaign: 1,500+ applications</a:t>
-            </a:r>
-            <a:endParaRPr lang="en-US" sz="1250" dirty="0"/>
-          </a:p>
-          <a:p>
-            <a:pPr marL="342900" indent="-342900">
-              <a:spcAft>
-                <a:spcPts val="800"/>
-              </a:spcAft>
-              <a:buSzPct val="100000"/>
-              <a:buChar char="•"/>
-            </a:pPr>
-            <a:r>
-              <a:rPr lang="en-US" sz="1250" dirty="0">
-                <a:solidFill>
-                  <a:srgbClr val="22205D"/>
-                </a:solidFill>
-                <a:latin typeface="Arial" pitchFamily="34" charset="0"/>
-                <a:ea typeface="Arial" pitchFamily="34" charset="-122"/>
-                <a:cs typeface="Arial" pitchFamily="34" charset="-120"/>
-              </a:rPr>
-              <a:t>Mari Cohort I graduation</a:t>
-            </a:r>
-            <a:endParaRPr lang="en-US" sz="1250" dirty="0"/>
-          </a:p>
-          <a:p>
-            <a:pPr marL="342900" indent="-342900">
-              <a:spcAft>
-                <a:spcPts val="800"/>
-              </a:spcAft>
-              <a:buSzPct val="100000"/>
-              <a:buChar char="•"/>
-            </a:pPr>
-            <a:r>
-              <a:rPr lang="en-US" sz="1250" dirty="0">
-                <a:solidFill>
-                  <a:srgbClr val="22205D"/>
-                </a:solidFill>
-                <a:latin typeface="Arial" pitchFamily="34" charset="0"/>
-                <a:ea typeface="Arial" pitchFamily="34" charset="-122"/>
-                <a:cs typeface="Arial" pitchFamily="34" charset="-120"/>
-              </a:rPr>
-              <a:t>Geshidocon</a:t>
-            </a:r>
-            <a:endParaRPr lang="en-US" sz="1250" dirty="0"/>
-          </a:p>
-        </p:txBody>
-      </p:sp>
-      <p:sp>
-        <p:nvSpPr>
-          <p:cNvPr id="27" name="Shape 25"/>
-          <p:cNvSpPr/>
-          <p:nvPr/>
-        </p:nvSpPr>
-        <p:spPr>
-          <a:xfrm>
-            <a:off x="9073134" y="2880360"/>
-            <a:ext cx="2567178" cy="3429000"/>
-          </a:xfrm>
-          <a:prstGeom prst="roundRect">
-            <a:avLst>
-              <a:gd name="adj" fmla="val 2850"/>
-            </a:avLst>
-          </a:prstGeom>
-          <a:solidFill>
-            <a:srgbClr val="FFFFFF"/>
-          </a:solidFill>
-          <a:ln w="9525">
+            <a:ln w="12700">
+              <a:solidFill>
+                <a:srgbClr val="0098D8"/>
+              </a:solidFill>
+              <a:prstDash val="solid"/>
+            </a:ln>
+          </p:spPr>
+        </p:sp>
+        <p:sp>
+          <p:nvSpPr>
+            <p:cNvPr id="25" name="Text 23"/>
+            <p:cNvSpPr txBox="1"/>
+            <p:nvPr/>
+          </p:nvSpPr>
+          <p:spPr>
+            <a:xfrm>
+              <a:off x="6460236" y="3081528"/>
+              <a:ext cx="2109978" cy="347472"/>
+            </a:xfrm>
+            <a:prstGeom prst="rect">
+              <a:avLst/>
+            </a:prstGeom>
+            <a:noFill/>
+            <a:ln/>
+          </p:spPr>
+          <p:txBody>
+            <a:bodyPr wrap="square" lIns="0" tIns="0" rIns="0" bIns="0" rtlCol="0" anchor="ctr"/>
+            <a:lstStyle/>
+            <a:p>
+              <a:pPr marL="0" indent="0" algn="ctr">
+                <a:buNone/>
+              </a:pPr>
+              <a:r>
+                <a:rPr lang="en-US" sz="1100" b="1" dirty="0">
+                  <a:solidFill>
+                    <a:srgbClr val="FFFFFF"/>
+                  </a:solidFill>
+                  <a:latin typeface="Arial" pitchFamily="34" charset="0"/>
+                  <a:ea typeface="Arial" pitchFamily="34" charset="-122"/>
+                  <a:cs typeface="Arial" pitchFamily="34" charset="-120"/>
+                </a:rPr>
+                <a:t>xCelerate &amp; events</a:t>
+              </a:r>
+              <a:endParaRPr lang="en-US" sz="1100" dirty="0"/>
+            </a:p>
+          </p:txBody>
+        </p:sp>
+        <p:sp>
+          <p:nvSpPr>
+            <p:cNvPr id="26" name="Text 24"/>
+            <p:cNvSpPr txBox="1"/>
+            <p:nvPr/>
+          </p:nvSpPr>
+          <p:spPr>
+            <a:xfrm>
+              <a:off x="6460236" y="3611880"/>
+              <a:ext cx="2155698" cy="2560320"/>
+            </a:xfrm>
+            <a:prstGeom prst="rect">
+              <a:avLst/>
+            </a:prstGeom>
+            <a:noFill/>
+            <a:ln/>
+          </p:spPr>
+          <p:txBody>
+            <a:bodyPr wrap="square" lIns="0" tIns="0" rIns="0" bIns="0" rtlCol="0" anchor="t"/>
+            <a:lstStyle/>
+            <a:p>
+              <a:pPr marL="342900" indent="-342900">
+                <a:spcAft>
+                  <a:spcPts val="800"/>
+                </a:spcAft>
+                <a:buSzPct val="100000"/>
+                <a:buChar char="•"/>
+              </a:pPr>
+              <a:r>
+                <a:rPr lang="en-US" sz="1250" dirty="0">
+                  <a:solidFill>
+                    <a:srgbClr val="22205D"/>
+                  </a:solidFill>
+                  <a:latin typeface="Arial" pitchFamily="34" charset="0"/>
+                  <a:ea typeface="Arial" pitchFamily="34" charset="-122"/>
+                  <a:cs typeface="Arial" pitchFamily="34" charset="-120"/>
+                </a:rPr>
+                <a:t>Mari campaign: 1,500+ applications</a:t>
+              </a:r>
+              <a:endParaRPr lang="en-US" sz="1250" dirty="0"/>
+            </a:p>
+            <a:p>
+              <a:pPr marL="342900" indent="-342900">
+                <a:spcAft>
+                  <a:spcPts val="800"/>
+                </a:spcAft>
+                <a:buSzPct val="100000"/>
+                <a:buChar char="•"/>
+              </a:pPr>
+              <a:r>
+                <a:rPr lang="en-US" sz="1250" dirty="0">
+                  <a:solidFill>
+                    <a:srgbClr val="22205D"/>
+                  </a:solidFill>
+                  <a:latin typeface="Arial" pitchFamily="34" charset="0"/>
+                  <a:ea typeface="Arial" pitchFamily="34" charset="-122"/>
+                  <a:cs typeface="Arial" pitchFamily="34" charset="-120"/>
+                </a:rPr>
+                <a:t>Mari Cohort I graduation</a:t>
+              </a:r>
+              <a:endParaRPr lang="en-US" sz="1250" dirty="0"/>
+            </a:p>
+            <a:p>
+              <a:pPr marL="342900" indent="-342900">
+                <a:spcAft>
+                  <a:spcPts val="800"/>
+                </a:spcAft>
+                <a:buSzPct val="100000"/>
+                <a:buChar char="•"/>
+              </a:pPr>
+              <a:r>
+                <a:rPr lang="en-US" sz="1250" dirty="0">
+                  <a:solidFill>
+                    <a:srgbClr val="22205D"/>
+                  </a:solidFill>
+                  <a:latin typeface="Arial" pitchFamily="34" charset="0"/>
+                  <a:ea typeface="Arial" pitchFamily="34" charset="-122"/>
+                  <a:cs typeface="Arial" pitchFamily="34" charset="-120"/>
+                </a:rPr>
+                <a:t>Geshidocon</a:t>
+              </a:r>
+              <a:endParaRPr lang="en-US" sz="1250" dirty="0"/>
+            </a:p>
+          </p:txBody>
+        </p:sp>
+        <p:sp>
+          <p:nvSpPr>
+            <p:cNvPr id="27" name="Shape 25"/>
+            <p:cNvSpPr/>
+            <p:nvPr/>
+          </p:nvSpPr>
+          <p:spPr>
+            <a:xfrm>
+              <a:off x="9073134" y="2880360"/>
+              <a:ext cx="2567178" cy="3429000"/>
+            </a:xfrm>
+            <a:prstGeom prst="roundRect">
+              <a:avLst>
+                <a:gd name="adj" fmla="val 2850"/>
+              </a:avLst>
+            </a:prstGeom>
             <a:solidFill>
-              <a:srgbClr val="E6E6E6"/>
+              <a:srgbClr val="FFFFFF"/>
             </a:solidFill>
-            <a:prstDash val="solid"/>
-          </a:ln>
-        </p:spPr>
-      </p:sp>
-      <p:sp>
-        <p:nvSpPr>
-          <p:cNvPr id="28" name="Shape 26"/>
-          <p:cNvSpPr/>
-          <p:nvPr/>
-        </p:nvSpPr>
-        <p:spPr>
-          <a:xfrm>
-            <a:off x="9301734" y="3081528"/>
-            <a:ext cx="2109978" cy="347472"/>
-          </a:xfrm>
-          <a:prstGeom prst="roundRect">
-            <a:avLst>
-              <a:gd name="adj" fmla="val 18421"/>
-            </a:avLst>
-          </a:prstGeom>
-          <a:solidFill>
-            <a:srgbClr val="5CC3AE"/>
-          </a:solidFill>
-          <a:ln w="12700">
+            <a:ln w="9525">
+              <a:solidFill>
+                <a:srgbClr val="E6E6E6"/>
+              </a:solidFill>
+              <a:prstDash val="solid"/>
+            </a:ln>
+          </p:spPr>
+        </p:sp>
+        <p:sp>
+          <p:nvSpPr>
+            <p:cNvPr id="28" name="Shape 26"/>
+            <p:cNvSpPr/>
+            <p:nvPr/>
+          </p:nvSpPr>
+          <p:spPr>
+            <a:xfrm>
+              <a:off x="9301734" y="3081528"/>
+              <a:ext cx="2109978" cy="347472"/>
+            </a:xfrm>
+            <a:prstGeom prst="roundRect">
+              <a:avLst>
+                <a:gd name="adj" fmla="val 18421"/>
+              </a:avLst>
+            </a:prstGeom>
             <a:solidFill>
               <a:srgbClr val="5CC3AE"/>
             </a:solidFill>
-            <a:prstDash val="solid"/>
-          </a:ln>
-        </p:spPr>
-      </p:sp>
-      <p:sp>
-        <p:nvSpPr>
-          <p:cNvPr id="29" name="Text 27"/>
-          <p:cNvSpPr txBox="1"/>
-          <p:nvPr/>
-        </p:nvSpPr>
-        <p:spPr>
-          <a:xfrm>
-            <a:off x="9301734" y="3081528"/>
-            <a:ext cx="2109978" cy="347472"/>
-          </a:xfrm>
-          <a:prstGeom prst="rect">
-            <a:avLst/>
-          </a:prstGeom>
-          <a:noFill/>
-          <a:ln/>
-        </p:spPr>
-        <p:txBody>
-          <a:bodyPr wrap="square" lIns="0" tIns="0" rIns="0" bIns="0" rtlCol="0" anchor="ctr"/>
-          <a:lstStyle/>
-          <a:p>
-            <a:pPr algn="ctr" indent="0" marL="0">
-              <a:buNone/>
-            </a:pPr>
-            <a:r>
-              <a:rPr lang="en-US" sz="1100" b="1" dirty="0">
-                <a:solidFill>
-                  <a:srgbClr val="22205D"/>
-                </a:solidFill>
-                <a:latin typeface="Arial" pitchFamily="34" charset="0"/>
-                <a:ea typeface="Arial" pitchFamily="34" charset="-122"/>
-                <a:cs typeface="Arial" pitchFamily="34" charset="-120"/>
-              </a:rPr>
-              <a:t>People &amp; brand</a:t>
-            </a:r>
-            <a:endParaRPr lang="en-US" sz="1100" dirty="0"/>
-          </a:p>
-        </p:txBody>
-      </p:sp>
-      <p:sp>
-        <p:nvSpPr>
-          <p:cNvPr id="30" name="Text 28"/>
-          <p:cNvSpPr txBox="1"/>
-          <p:nvPr/>
-        </p:nvSpPr>
-        <p:spPr>
-          <a:xfrm>
-            <a:off x="9301734" y="3611880"/>
-            <a:ext cx="2155698" cy="2560320"/>
-          </a:xfrm>
-          <a:prstGeom prst="rect">
-            <a:avLst/>
-          </a:prstGeom>
-          <a:noFill/>
-          <a:ln/>
-        </p:spPr>
-        <p:txBody>
-          <a:bodyPr wrap="square" lIns="0" tIns="0" rIns="0" bIns="0" rtlCol="0" anchor="t"/>
-          <a:lstStyle/>
-          <a:p>
-            <a:pPr marL="342900" indent="-342900">
-              <a:spcAft>
-                <a:spcPts val="800"/>
-              </a:spcAft>
-              <a:buSzPct val="100000"/>
-              <a:buChar char="•"/>
-            </a:pPr>
-            <a:r>
-              <a:rPr lang="en-US" sz="1250" dirty="0">
-                <a:solidFill>
-                  <a:srgbClr val="22205D"/>
-                </a:solidFill>
-                <a:latin typeface="Arial" pitchFamily="34" charset="0"/>
-                <a:ea typeface="Arial" pitchFamily="34" charset="-122"/>
-                <a:cs typeface="Arial" pitchFamily="34" charset="-120"/>
-              </a:rPr>
-              <a:t>HR brand video, ready for approval</a:t>
-            </a:r>
-            <a:endParaRPr lang="en-US" sz="1250" dirty="0"/>
-          </a:p>
-          <a:p>
-            <a:pPr marL="342900" indent="-342900">
-              <a:spcAft>
-                <a:spcPts val="800"/>
-              </a:spcAft>
-              <a:buSzPct val="100000"/>
-              <a:buChar char="•"/>
-            </a:pPr>
-            <a:r>
-              <a:rPr lang="en-US" sz="1250" dirty="0">
-                <a:solidFill>
-                  <a:srgbClr val="22205D"/>
-                </a:solidFill>
-                <a:latin typeface="Arial" pitchFamily="34" charset="0"/>
-                <a:ea typeface="Arial" pitchFamily="34" charset="-122"/>
-                <a:cs typeface="Arial" pitchFamily="34" charset="-120"/>
-              </a:rPr>
-              <a:t>Full application form on the careers page (for HR)</a:t>
-            </a:r>
-            <a:endParaRPr lang="en-US" sz="1250" dirty="0"/>
-          </a:p>
-          <a:p>
-            <a:pPr marL="342900" indent="-342900">
-              <a:spcAft>
-                <a:spcPts val="800"/>
-              </a:spcAft>
-              <a:buSzPct val="100000"/>
-              <a:buChar char="•"/>
-            </a:pPr>
-            <a:r>
-              <a:rPr lang="en-US" sz="1250" dirty="0">
-                <a:solidFill>
-                  <a:srgbClr val="22205D"/>
-                </a:solidFill>
-                <a:latin typeface="Arial" pitchFamily="34" charset="0"/>
-                <a:ea typeface="Arial" pitchFamily="34" charset="-122"/>
-                <a:cs typeface="Arial" pitchFamily="34" charset="-120"/>
-              </a:rPr>
-              <a:t>New client testimonials</a:t>
-            </a:r>
-            <a:endParaRPr lang="en-US" sz="1250" dirty="0"/>
-          </a:p>
-        </p:txBody>
-      </p:sp>
+            <a:ln w="12700">
+              <a:solidFill>
+                <a:srgbClr val="5CC3AE"/>
+              </a:solidFill>
+              <a:prstDash val="solid"/>
+            </a:ln>
+          </p:spPr>
+        </p:sp>
+        <p:sp>
+          <p:nvSpPr>
+            <p:cNvPr id="29" name="Text 27"/>
+            <p:cNvSpPr txBox="1"/>
+            <p:nvPr/>
+          </p:nvSpPr>
+          <p:spPr>
+            <a:xfrm>
+              <a:off x="9301734" y="3081528"/>
+              <a:ext cx="2109978" cy="347472"/>
+            </a:xfrm>
+            <a:prstGeom prst="rect">
+              <a:avLst/>
+            </a:prstGeom>
+            <a:noFill/>
+            <a:ln/>
+          </p:spPr>
+          <p:txBody>
+            <a:bodyPr wrap="square" lIns="0" tIns="0" rIns="0" bIns="0" rtlCol="0" anchor="ctr"/>
+            <a:lstStyle/>
+            <a:p>
+              <a:pPr marL="0" indent="0" algn="ctr">
+                <a:buNone/>
+              </a:pPr>
+              <a:r>
+                <a:rPr lang="en-US" sz="1100" b="1" dirty="0">
+                  <a:solidFill>
+                    <a:srgbClr val="22205D"/>
+                  </a:solidFill>
+                  <a:latin typeface="Arial" pitchFamily="34" charset="0"/>
+                  <a:ea typeface="Arial" pitchFamily="34" charset="-122"/>
+                  <a:cs typeface="Arial" pitchFamily="34" charset="-120"/>
+                </a:rPr>
+                <a:t>People &amp; brand</a:t>
+              </a:r>
+              <a:endParaRPr lang="en-US" sz="1100" dirty="0"/>
+            </a:p>
+          </p:txBody>
+        </p:sp>
+        <p:sp>
+          <p:nvSpPr>
+            <p:cNvPr id="30" name="Text 28"/>
+            <p:cNvSpPr txBox="1"/>
+            <p:nvPr/>
+          </p:nvSpPr>
+          <p:spPr>
+            <a:xfrm>
+              <a:off x="9301734" y="3611880"/>
+              <a:ext cx="2155698" cy="2560320"/>
+            </a:xfrm>
+            <a:prstGeom prst="rect">
+              <a:avLst/>
+            </a:prstGeom>
+            <a:noFill/>
+            <a:ln/>
+          </p:spPr>
+          <p:txBody>
+            <a:bodyPr wrap="square" lIns="0" tIns="0" rIns="0" bIns="0" rtlCol="0" anchor="t"/>
+            <a:lstStyle/>
+            <a:p>
+              <a:pPr marL="342900" indent="-342900">
+                <a:spcAft>
+                  <a:spcPts val="800"/>
+                </a:spcAft>
+                <a:buSzPct val="100000"/>
+                <a:buChar char="•"/>
+              </a:pPr>
+              <a:r>
+                <a:rPr lang="en-US" sz="1250" dirty="0">
+                  <a:solidFill>
+                    <a:srgbClr val="22205D"/>
+                  </a:solidFill>
+                  <a:latin typeface="Arial" pitchFamily="34" charset="0"/>
+                  <a:ea typeface="Arial" pitchFamily="34" charset="-122"/>
+                  <a:cs typeface="Arial" pitchFamily="34" charset="-120"/>
+                </a:rPr>
+                <a:t>HR brand video, ready for approval</a:t>
+              </a:r>
+              <a:endParaRPr lang="en-US" sz="1250" dirty="0"/>
+            </a:p>
+            <a:p>
+              <a:pPr marL="342900" indent="-342900">
+                <a:spcAft>
+                  <a:spcPts val="800"/>
+                </a:spcAft>
+                <a:buSzPct val="100000"/>
+                <a:buChar char="•"/>
+              </a:pPr>
+              <a:r>
+                <a:rPr lang="en-US" sz="1250" dirty="0">
+                  <a:solidFill>
+                    <a:srgbClr val="22205D"/>
+                  </a:solidFill>
+                  <a:latin typeface="Arial" pitchFamily="34" charset="0"/>
+                  <a:ea typeface="Arial" pitchFamily="34" charset="-122"/>
+                  <a:cs typeface="Arial" pitchFamily="34" charset="-120"/>
+                </a:rPr>
+                <a:t>Full application form on the careers page (for HR)</a:t>
+              </a:r>
+              <a:endParaRPr lang="en-US" sz="1250" dirty="0"/>
+            </a:p>
+            <a:p>
+              <a:pPr marL="342900" indent="-342900">
+                <a:spcAft>
+                  <a:spcPts val="800"/>
+                </a:spcAft>
+                <a:buSzPct val="100000"/>
+                <a:buChar char="•"/>
+              </a:pPr>
+              <a:r>
+                <a:rPr lang="en-US" sz="1250" dirty="0">
+                  <a:solidFill>
+                    <a:srgbClr val="22205D"/>
+                  </a:solidFill>
+                  <a:latin typeface="Arial" pitchFamily="34" charset="0"/>
+                  <a:ea typeface="Arial" pitchFamily="34" charset="-122"/>
+                  <a:cs typeface="Arial" pitchFamily="34" charset="-120"/>
+                </a:rPr>
+                <a:t>New client testimonials</a:t>
+              </a:r>
+              <a:endParaRPr lang="en-US" sz="1250" dirty="0"/>
+            </a:p>
+          </p:txBody>
+        </p:sp>
+      </p:grpSp>
     </p:spTree>
   </p:cSld>
   <p:clrMapOvr>
@@ -2805,6 +2015,7 @@
         <a:solidFill>
           <a:srgbClr val="FFFFFF"/>
         </a:solidFill>
+        <a:effectLst/>
       </p:bgPr>
     </p:bg>
     <p:spTree>
@@ -2842,7 +2053,7 @@
           <a:bodyPr wrap="square" lIns="0" tIns="0" rIns="0" bIns="0" rtlCol="0" anchor="ctr"/>
           <a:lstStyle/>
           <a:p>
-            <a:pPr indent="0" marL="0">
+            <a:pPr marL="0" indent="0">
               <a:buNone/>
             </a:pPr>
             <a:r>
@@ -2908,7 +2119,7 @@
           <a:bodyPr wrap="square" lIns="0" tIns="0" rIns="0" bIns="0" rtlCol="0" anchor="ctr"/>
           <a:lstStyle/>
           <a:p>
-            <a:pPr indent="0" marL="0">
+            <a:pPr marL="0" indent="0">
               <a:buNone/>
             </a:pPr>
             <a:r>
@@ -2922,9 +2133,6 @@
               </a:rPr>
               <a:t>Homepage  </a:t>
             </a:r>
-            <a:pPr indent="0" marL="0">
-              <a:buNone/>
-            </a:pPr>
             <a:r>
               <a:rPr lang="en-US" sz="1400" dirty="0">
                 <a:solidFill>
@@ -2988,7 +2196,7 @@
           <a:bodyPr wrap="square" lIns="0" tIns="0" rIns="0" bIns="0" rtlCol="0" anchor="ctr"/>
           <a:lstStyle/>
           <a:p>
-            <a:pPr indent="0" marL="0">
+            <a:pPr marL="0" indent="0">
               <a:buNone/>
             </a:pPr>
             <a:r>
@@ -3054,7 +2262,7 @@
           <a:bodyPr wrap="square" lIns="0" tIns="0" rIns="0" bIns="0" rtlCol="0" anchor="ctr"/>
           <a:lstStyle/>
           <a:p>
-            <a:pPr algn="ctr" indent="0" marL="0">
+            <a:pPr marL="0" indent="0" algn="ctr">
               <a:buNone/>
             </a:pPr>
             <a:r>
@@ -3093,7 +2301,7 @@
           <a:bodyPr wrap="square" lIns="0" tIns="0" rIns="0" bIns="0" rtlCol="0" anchor="t"/>
           <a:lstStyle/>
           <a:p>
-            <a:pPr indent="0" marL="0">
+            <a:pPr marL="0" indent="0">
               <a:buNone/>
             </a:pPr>
             <a:r>
@@ -3105,7 +2313,7 @@
                 <a:ea typeface="Arial" pitchFamily="34" charset="-122"/>
                 <a:cs typeface="Arial" pitchFamily="34" charset="-120"/>
               </a:rPr>
-              <a:t>4 service groups: AI Consulting, Applied AI, AI Security, Digital Transformation</a:t>
+              <a:t>4 service groups: Data &amp; AI Consulting, Applied Data &amp; AI Solutions, AI Security, Digital Transformation</a:t>
             </a:r>
             <a:endParaRPr lang="en-US" sz="1100" dirty="0"/>
           </a:p>
@@ -3159,7 +2367,7 @@
           <a:bodyPr wrap="square" lIns="0" tIns="0" rIns="0" bIns="0" rtlCol="0" anchor="ctr"/>
           <a:lstStyle/>
           <a:p>
-            <a:pPr indent="0" marL="0">
+            <a:pPr marL="0" indent="0">
               <a:buNone/>
             </a:pPr>
             <a:r>
@@ -3225,7 +2433,7 @@
           <a:bodyPr wrap="square" lIns="0" tIns="0" rIns="0" bIns="0" rtlCol="0" anchor="ctr"/>
           <a:lstStyle/>
           <a:p>
-            <a:pPr algn="ctr" indent="0" marL="0">
+            <a:pPr marL="0" indent="0" algn="ctr">
               <a:buNone/>
             </a:pPr>
             <a:r>
@@ -3264,7 +2472,7 @@
           <a:bodyPr wrap="square" lIns="0" tIns="0" rIns="0" bIns="0" rtlCol="0" anchor="t"/>
           <a:lstStyle/>
           <a:p>
-            <a:pPr indent="0" marL="0">
+            <a:pPr marL="0" indent="0">
               <a:buNone/>
             </a:pPr>
             <a:r>
@@ -3276,7 +2484,7 @@
                 <a:ea typeface="Arial" pitchFamily="34" charset="-122"/>
                 <a:cs typeface="Arial" pitchFamily="34" charset="-120"/>
               </a:rPr>
-              <a:t>6 industries, including the new Mining page</a:t>
+              <a:t>Mining page replacing the Manufacturing industry page</a:t>
             </a:r>
             <a:endParaRPr lang="en-US" sz="1100" dirty="0"/>
           </a:p>
@@ -3330,7 +2538,7 @@
           <a:bodyPr wrap="square" lIns="0" tIns="0" rIns="0" bIns="0" rtlCol="0" anchor="ctr"/>
           <a:lstStyle/>
           <a:p>
-            <a:pPr indent="0" marL="0">
+            <a:pPr marL="0" indent="0">
               <a:buNone/>
             </a:pPr>
             <a:r>
@@ -3396,7 +2604,7 @@
           <a:bodyPr wrap="square" lIns="0" tIns="0" rIns="0" bIns="0" rtlCol="0" anchor="ctr"/>
           <a:lstStyle/>
           <a:p>
-            <a:pPr algn="ctr" indent="0" marL="0">
+            <a:pPr marL="0" indent="0" algn="ctr">
               <a:buNone/>
             </a:pPr>
             <a:r>
@@ -3435,7 +2643,7 @@
           <a:bodyPr wrap="square" lIns="0" tIns="0" rIns="0" bIns="0" rtlCol="0" anchor="t"/>
           <a:lstStyle/>
           <a:p>
-            <a:pPr indent="0" marL="0">
+            <a:pPr marL="0" indent="0">
               <a:buNone/>
             </a:pPr>
             <a:r>
@@ -3449,6 +2657,71 @@
               </a:rPr>
               <a:t>Updated case study cards</a:t>
             </a:r>
+            <a:br>
+              <a:rPr lang="en-US" sz="1100" dirty="0">
+                <a:solidFill>
+                  <a:srgbClr val="22205D"/>
+                </a:solidFill>
+                <a:latin typeface="Arial" pitchFamily="34" charset="0"/>
+                <a:ea typeface="Arial" pitchFamily="34" charset="-122"/>
+                <a:cs typeface="Arial" pitchFamily="34" charset="-120"/>
+              </a:rPr>
+            </a:br>
+            <a:r>
+              <a:rPr lang="en-US" sz="1100" dirty="0">
+                <a:solidFill>
+                  <a:srgbClr val="22205D"/>
+                </a:solidFill>
+                <a:latin typeface="Arial" pitchFamily="34" charset="0"/>
+                <a:ea typeface="Arial" pitchFamily="34" charset="-122"/>
+                <a:cs typeface="Arial" pitchFamily="34" charset="-120"/>
+              </a:rPr>
+              <a:t>(</a:t>
+            </a:r>
+            <a:r>
+              <a:rPr lang="en-US" sz="1100" dirty="0" err="1">
+                <a:solidFill>
+                  <a:srgbClr val="22205D"/>
+                </a:solidFill>
+                <a:latin typeface="Arial" pitchFamily="34" charset="0"/>
+                <a:ea typeface="Arial" pitchFamily="34" charset="-122"/>
+                <a:cs typeface="Arial" pitchFamily="34" charset="-120"/>
+              </a:rPr>
+              <a:t>Majidul</a:t>
+            </a:r>
+            <a:r>
+              <a:rPr lang="en-US" sz="1100" dirty="0">
+                <a:solidFill>
+                  <a:srgbClr val="22205D"/>
+                </a:solidFill>
+                <a:latin typeface="Arial" pitchFamily="34" charset="0"/>
+                <a:ea typeface="Arial" pitchFamily="34" charset="-122"/>
+                <a:cs typeface="Arial" pitchFamily="34" charset="-120"/>
+              </a:rPr>
+              <a:t>, Futtaim, </a:t>
+            </a:r>
+            <a:r>
+              <a:rPr lang="en-US" sz="1100" dirty="0" err="1">
+                <a:solidFill>
+                  <a:srgbClr val="22205D"/>
+                </a:solidFill>
+                <a:latin typeface="Arial" pitchFamily="34" charset="0"/>
+                <a:ea typeface="Arial" pitchFamily="34" charset="-122"/>
+                <a:cs typeface="Arial" pitchFamily="34" charset="-120"/>
+              </a:rPr>
+              <a:t>Wefi</a:t>
+            </a:r>
+            <a:r>
+              <a:rPr lang="en-US" sz="1100" dirty="0">
+                <a:solidFill>
+                  <a:srgbClr val="22205D"/>
+                </a:solidFill>
+                <a:latin typeface="Arial" pitchFamily="34" charset="0"/>
+                <a:ea typeface="Arial" pitchFamily="34" charset="-122"/>
+                <a:cs typeface="Arial" pitchFamily="34" charset="-120"/>
+              </a:rPr>
+              <a:t> tech and HBL Asset Management, Huda Beauty)</a:t>
+            </a:r>
             <a:endParaRPr lang="en-US" sz="1100" dirty="0"/>
           </a:p>
         </p:txBody>
@@ -3501,7 +2774,7 @@
           <a:bodyPr wrap="square" lIns="0" tIns="0" rIns="0" bIns="0" rtlCol="0" anchor="ctr"/>
           <a:lstStyle/>
           <a:p>
-            <a:pPr indent="0" marL="0">
+            <a:pPr marL="0" indent="0">
               <a:buNone/>
             </a:pPr>
             <a:r>
@@ -3567,7 +2840,7 @@
           <a:bodyPr wrap="square" lIns="0" tIns="0" rIns="0" bIns="0" rtlCol="0" anchor="ctr"/>
           <a:lstStyle/>
           <a:p>
-            <a:pPr algn="ctr" indent="0" marL="0">
+            <a:pPr marL="0" indent="0" algn="ctr">
               <a:buNone/>
             </a:pPr>
             <a:r>
@@ -3606,7 +2879,7 @@
           <a:bodyPr wrap="square" lIns="0" tIns="0" rIns="0" bIns="0" rtlCol="0" anchor="t"/>
           <a:lstStyle/>
           <a:p>
-            <a:pPr indent="0" marL="0">
+            <a:pPr marL="0" indent="0">
               <a:buNone/>
             </a:pPr>
             <a:r>
@@ -3672,7 +2945,7 @@
           <a:bodyPr wrap="square" lIns="0" tIns="0" rIns="0" bIns="0" rtlCol="0" anchor="ctr"/>
           <a:lstStyle/>
           <a:p>
-            <a:pPr indent="0" marL="0">
+            <a:pPr marL="0" indent="0">
               <a:buNone/>
             </a:pPr>
             <a:r>
@@ -3738,7 +3011,7 @@
           <a:bodyPr wrap="square" lIns="0" tIns="0" rIns="0" bIns="0" rtlCol="0" anchor="ctr"/>
           <a:lstStyle/>
           <a:p>
-            <a:pPr algn="ctr" indent="0" marL="0">
+            <a:pPr marL="0" indent="0" algn="ctr">
               <a:buNone/>
             </a:pPr>
             <a:r>
@@ -3777,7 +3050,7 @@
           <a:bodyPr wrap="square" lIns="0" tIns="0" rIns="0" bIns="0" rtlCol="0" anchor="t"/>
           <a:lstStyle/>
           <a:p>
-            <a:pPr indent="0" marL="0">
+            <a:pPr marL="0" indent="0">
               <a:buNone/>
             </a:pPr>
             <a:r>
@@ -3797,355 +3070,13 @@
       </p:sp>
       <p:sp>
         <p:nvSpPr>
-          <p:cNvPr id="30" name="Shape 28"/>
-          <p:cNvSpPr/>
-          <p:nvPr/>
-        </p:nvSpPr>
-        <p:spPr>
-          <a:xfrm>
-            <a:off x="4937760" y="3291840"/>
-            <a:ext cx="2011680" cy="1325880"/>
-          </a:xfrm>
-          <a:prstGeom prst="roundRect">
-            <a:avLst>
-              <a:gd name="adj" fmla="val 5517"/>
-            </a:avLst>
-          </a:prstGeom>
-          <a:solidFill>
-            <a:srgbClr val="EAF7F4"/>
-          </a:solidFill>
-          <a:ln w="9525">
-            <a:solidFill>
-              <a:srgbClr val="E6E6E6"/>
-            </a:solidFill>
-            <a:prstDash val="solid"/>
-          </a:ln>
-        </p:spPr>
-      </p:sp>
-      <p:sp>
-        <p:nvSpPr>
-          <p:cNvPr id="31" name="Text 29"/>
-          <p:cNvSpPr txBox="1"/>
-          <p:nvPr/>
-        </p:nvSpPr>
-        <p:spPr>
-          <a:xfrm>
-            <a:off x="5074920" y="3383280"/>
-            <a:ext cx="1188720" cy="320040"/>
-          </a:xfrm>
-          <a:prstGeom prst="rect">
-            <a:avLst/>
-          </a:prstGeom>
-          <a:noFill/>
-          <a:ln/>
-        </p:spPr>
-        <p:txBody>
-          <a:bodyPr wrap="square" lIns="0" tIns="0" rIns="0" bIns="0" rtlCol="0" anchor="ctr"/>
-          <a:lstStyle/>
-          <a:p>
-            <a:pPr indent="0" marL="0">
-              <a:buNone/>
-            </a:pPr>
-            <a:r>
-              <a:rPr lang="en-US" sz="1300" b="1" dirty="0">
-                <a:solidFill>
-                  <a:srgbClr val="22205D"/>
-                </a:solidFill>
-                <a:latin typeface="Arial" pitchFamily="34" charset="0"/>
-                <a:ea typeface="Arial" pitchFamily="34" charset="-122"/>
-                <a:cs typeface="Arial" pitchFamily="34" charset="-120"/>
-              </a:rPr>
-              <a:t>Careers</a:t>
-            </a:r>
-            <a:endParaRPr lang="en-US" sz="1300" dirty="0"/>
-          </a:p>
-        </p:txBody>
-      </p:sp>
-      <p:sp>
-        <p:nvSpPr>
-          <p:cNvPr id="32" name="Shape 30"/>
-          <p:cNvSpPr/>
-          <p:nvPr/>
-        </p:nvSpPr>
-        <p:spPr>
-          <a:xfrm>
-            <a:off x="6291072" y="3401568"/>
-            <a:ext cx="530352" cy="256032"/>
-          </a:xfrm>
-          <a:prstGeom prst="roundRect">
-            <a:avLst>
-              <a:gd name="adj" fmla="val 25000"/>
-            </a:avLst>
-          </a:prstGeom>
-          <a:solidFill>
-            <a:srgbClr val="5CC3AE"/>
-          </a:solidFill>
-          <a:ln w="12700">
-            <a:solidFill>
-              <a:srgbClr val="5CC3AE"/>
-            </a:solidFill>
-            <a:prstDash val="solid"/>
-          </a:ln>
-        </p:spPr>
-      </p:sp>
-      <p:sp>
-        <p:nvSpPr>
-          <p:cNvPr id="33" name="Text 31"/>
-          <p:cNvSpPr txBox="1"/>
-          <p:nvPr/>
-        </p:nvSpPr>
-        <p:spPr>
-          <a:xfrm>
-            <a:off x="6291072" y="3401568"/>
-            <a:ext cx="530352" cy="256032"/>
-          </a:xfrm>
-          <a:prstGeom prst="rect">
-            <a:avLst/>
-          </a:prstGeom>
-          <a:noFill/>
-          <a:ln/>
-        </p:spPr>
-        <p:txBody>
-          <a:bodyPr wrap="square" lIns="0" tIns="0" rIns="0" bIns="0" rtlCol="0" anchor="ctr"/>
-          <a:lstStyle/>
-          <a:p>
-            <a:pPr algn="ctr" indent="0" marL="0">
-              <a:buNone/>
-            </a:pPr>
-            <a:r>
-              <a:rPr lang="en-US" sz="1100" b="1" dirty="0">
-                <a:solidFill>
-                  <a:srgbClr val="22205D"/>
-                </a:solidFill>
-                <a:latin typeface="Arial" pitchFamily="34" charset="0"/>
-                <a:ea typeface="Arial" pitchFamily="34" charset="-122"/>
-                <a:cs typeface="Arial" pitchFamily="34" charset="-120"/>
-              </a:rPr>
-              <a:t>NEW</a:t>
-            </a:r>
-            <a:endParaRPr lang="en-US" sz="1100" dirty="0"/>
-          </a:p>
-        </p:txBody>
-      </p:sp>
-      <p:sp>
-        <p:nvSpPr>
-          <p:cNvPr id="34" name="Text 32"/>
-          <p:cNvSpPr txBox="1"/>
-          <p:nvPr/>
-        </p:nvSpPr>
-        <p:spPr>
-          <a:xfrm>
-            <a:off x="5074920" y="3749040"/>
-            <a:ext cx="1737360" cy="777240"/>
-          </a:xfrm>
-          <a:prstGeom prst="rect">
-            <a:avLst/>
-          </a:prstGeom>
-          <a:noFill/>
-          <a:ln/>
-        </p:spPr>
-        <p:txBody>
-          <a:bodyPr wrap="square" lIns="0" tIns="0" rIns="0" bIns="0" rtlCol="0" anchor="t"/>
-          <a:lstStyle/>
-          <a:p>
-            <a:pPr indent="0" marL="0">
-              <a:buNone/>
-            </a:pPr>
-            <a:r>
-              <a:rPr lang="en-US" sz="1100" dirty="0">
-                <a:solidFill>
-                  <a:srgbClr val="22205D"/>
-                </a:solidFill>
-                <a:latin typeface="Arial" pitchFamily="34" charset="0"/>
-                <a:ea typeface="Arial" pitchFamily="34" charset="-122"/>
-                <a:cs typeface="Arial" pitchFamily="34" charset="-120"/>
-              </a:rPr>
-              <a:t>Full application form for HR</a:t>
-            </a:r>
-            <a:endParaRPr lang="en-US" sz="1100" dirty="0"/>
-          </a:p>
-        </p:txBody>
-      </p:sp>
-      <p:sp>
-        <p:nvSpPr>
-          <p:cNvPr id="35" name="Shape 33"/>
-          <p:cNvSpPr/>
-          <p:nvPr/>
-        </p:nvSpPr>
-        <p:spPr>
-          <a:xfrm>
-            <a:off x="548640" y="4773168"/>
-            <a:ext cx="2011680" cy="1325880"/>
-          </a:xfrm>
-          <a:prstGeom prst="roundRect">
-            <a:avLst>
-              <a:gd name="adj" fmla="val 5517"/>
-            </a:avLst>
-          </a:prstGeom>
-          <a:solidFill>
-            <a:srgbClr val="EAF7F4"/>
-          </a:solidFill>
-          <a:ln w="9525">
-            <a:solidFill>
-              <a:srgbClr val="E6E6E6"/>
-            </a:solidFill>
-            <a:prstDash val="solid"/>
-          </a:ln>
-        </p:spPr>
-      </p:sp>
-      <p:sp>
-        <p:nvSpPr>
-          <p:cNvPr id="36" name="Text 34"/>
-          <p:cNvSpPr txBox="1"/>
-          <p:nvPr/>
-        </p:nvSpPr>
-        <p:spPr>
-          <a:xfrm>
-            <a:off x="685800" y="4864608"/>
-            <a:ext cx="1188720" cy="320040"/>
-          </a:xfrm>
-          <a:prstGeom prst="rect">
-            <a:avLst/>
-          </a:prstGeom>
-          <a:noFill/>
-          <a:ln/>
-        </p:spPr>
-        <p:txBody>
-          <a:bodyPr wrap="square" lIns="0" tIns="0" rIns="0" bIns="0" rtlCol="0" anchor="ctr"/>
-          <a:lstStyle/>
-          <a:p>
-            <a:pPr indent="0" marL="0">
-              <a:buNone/>
-            </a:pPr>
-            <a:r>
-              <a:rPr lang="en-US" sz="1300" b="1" dirty="0">
-                <a:solidFill>
-                  <a:srgbClr val="22205D"/>
-                </a:solidFill>
-                <a:latin typeface="Arial" pitchFamily="34" charset="0"/>
-                <a:ea typeface="Arial" pitchFamily="34" charset="-122"/>
-                <a:cs typeface="Arial" pitchFamily="34" charset="-120"/>
-              </a:rPr>
-              <a:t>Testimonials</a:t>
-            </a:r>
-            <a:endParaRPr lang="en-US" sz="1300" dirty="0"/>
-          </a:p>
-        </p:txBody>
-      </p:sp>
-      <p:sp>
-        <p:nvSpPr>
-          <p:cNvPr id="37" name="Shape 35"/>
-          <p:cNvSpPr/>
-          <p:nvPr/>
-        </p:nvSpPr>
-        <p:spPr>
-          <a:xfrm>
-            <a:off x="1901952" y="4882896"/>
-            <a:ext cx="530352" cy="256032"/>
-          </a:xfrm>
-          <a:prstGeom prst="roundRect">
-            <a:avLst>
-              <a:gd name="adj" fmla="val 25000"/>
-            </a:avLst>
-          </a:prstGeom>
-          <a:solidFill>
-            <a:srgbClr val="5CC3AE"/>
-          </a:solidFill>
-          <a:ln w="12700">
-            <a:solidFill>
-              <a:srgbClr val="5CC3AE"/>
-            </a:solidFill>
-            <a:prstDash val="solid"/>
-          </a:ln>
-        </p:spPr>
-      </p:sp>
-      <p:sp>
-        <p:nvSpPr>
-          <p:cNvPr id="38" name="Text 36"/>
-          <p:cNvSpPr txBox="1"/>
-          <p:nvPr/>
-        </p:nvSpPr>
-        <p:spPr>
-          <a:xfrm>
-            <a:off x="1901952" y="4882896"/>
-            <a:ext cx="530352" cy="256032"/>
-          </a:xfrm>
-          <a:prstGeom prst="rect">
-            <a:avLst/>
-          </a:prstGeom>
-          <a:noFill/>
-          <a:ln/>
-        </p:spPr>
-        <p:txBody>
-          <a:bodyPr wrap="square" lIns="0" tIns="0" rIns="0" bIns="0" rtlCol="0" anchor="ctr"/>
-          <a:lstStyle/>
-          <a:p>
-            <a:pPr algn="ctr" indent="0" marL="0">
-              <a:buNone/>
-            </a:pPr>
-            <a:r>
-              <a:rPr lang="en-US" sz="1100" b="1" dirty="0">
-                <a:solidFill>
-                  <a:srgbClr val="22205D"/>
-                </a:solidFill>
-                <a:latin typeface="Arial" pitchFamily="34" charset="0"/>
-                <a:ea typeface="Arial" pitchFamily="34" charset="-122"/>
-                <a:cs typeface="Arial" pitchFamily="34" charset="-120"/>
-              </a:rPr>
-              <a:t>NEW</a:t>
-            </a:r>
-            <a:endParaRPr lang="en-US" sz="1100" dirty="0"/>
-          </a:p>
-        </p:txBody>
-      </p:sp>
-      <p:sp>
-        <p:nvSpPr>
-          <p:cNvPr id="39" name="Text 37"/>
-          <p:cNvSpPr txBox="1"/>
-          <p:nvPr/>
-        </p:nvSpPr>
-        <p:spPr>
-          <a:xfrm>
-            <a:off x="685800" y="5230368"/>
-            <a:ext cx="1737360" cy="777240"/>
-          </a:xfrm>
-          <a:prstGeom prst="rect">
-            <a:avLst/>
-          </a:prstGeom>
-          <a:noFill/>
-          <a:ln/>
-        </p:spPr>
-        <p:txBody>
-          <a:bodyPr wrap="square" lIns="0" tIns="0" rIns="0" bIns="0" rtlCol="0" anchor="t"/>
-          <a:lstStyle/>
-          <a:p>
-            <a:pPr indent="0" marL="0">
-              <a:buNone/>
-            </a:pPr>
-            <a:r>
-              <a:rPr lang="en-US" sz="1100" dirty="0">
-                <a:solidFill>
-                  <a:srgbClr val="22205D"/>
-                </a:solidFill>
-                <a:latin typeface="Arial" pitchFamily="34" charset="0"/>
-                <a:ea typeface="Arial" pitchFamily="34" charset="-122"/>
-                <a:cs typeface="Arial" pitchFamily="34" charset="-120"/>
-              </a:rPr>
-              <a:t>New client testimonials</a:t>
-            </a:r>
-            <a:endParaRPr lang="en-US" sz="1100" dirty="0"/>
-          </a:p>
-        </p:txBody>
-      </p:sp>
-      <p:sp>
-        <p:nvSpPr>
           <p:cNvPr id="40" name="Shape 38"/>
           <p:cNvSpPr/>
           <p:nvPr/>
         </p:nvSpPr>
         <p:spPr>
           <a:xfrm>
-            <a:off x="2743200" y="4773168"/>
+            <a:off x="4960838" y="3294453"/>
             <a:ext cx="2011680" cy="1325880"/>
           </a:xfrm>
           <a:prstGeom prst="roundRect">
@@ -4172,7 +3103,7 @@
         </p:nvSpPr>
         <p:spPr>
           <a:xfrm>
-            <a:off x="2880360" y="4864608"/>
+            <a:off x="5097998" y="3385893"/>
             <a:ext cx="1737360" cy="320040"/>
           </a:xfrm>
           <a:prstGeom prst="rect">
@@ -4185,7 +3116,7 @@
           <a:bodyPr wrap="square" lIns="0" tIns="0" rIns="0" bIns="0" rtlCol="0" anchor="ctr"/>
           <a:lstStyle/>
           <a:p>
-            <a:pPr indent="0" marL="0">
+            <a:pPr marL="0" indent="0">
               <a:buNone/>
             </a:pPr>
             <a:r>
@@ -4211,7 +3142,7 @@
         </p:nvSpPr>
         <p:spPr>
           <a:xfrm>
-            <a:off x="2880360" y="5230368"/>
+            <a:off x="5097998" y="3751653"/>
             <a:ext cx="1737360" cy="777240"/>
           </a:xfrm>
           <a:prstGeom prst="rect">
@@ -4224,7 +3155,7 @@
           <a:bodyPr wrap="square" lIns="0" tIns="0" rIns="0" bIns="0" rtlCol="0" anchor="t"/>
           <a:lstStyle/>
           <a:p>
-            <a:pPr indent="0" marL="0">
+            <a:pPr marL="0" indent="0">
               <a:buNone/>
             </a:pPr>
             <a:r>
@@ -4242,567 +3173,435 @@
           </a:p>
         </p:txBody>
       </p:sp>
-      <p:sp>
-        <p:nvSpPr>
-          <p:cNvPr id="43" name="Shape 41"/>
-          <p:cNvSpPr/>
-          <p:nvPr/>
-        </p:nvSpPr>
-        <p:spPr>
-          <a:xfrm>
-            <a:off x="4937760" y="4773168"/>
-            <a:ext cx="2011680" cy="1325880"/>
-          </a:xfrm>
-          <a:prstGeom prst="roundRect">
-            <a:avLst>
-              <a:gd name="adj" fmla="val 5517"/>
-            </a:avLst>
-          </a:prstGeom>
-          <a:solidFill>
-            <a:srgbClr val="F4F6FB"/>
-          </a:solidFill>
-          <a:ln w="9525">
+      <p:grpSp>
+        <p:nvGrpSpPr>
+          <p:cNvPr id="58" name="Group 57">
+            <a:extLst>
+              <a:ext uri="{FF2B5EF4-FFF2-40B4-BE49-F238E27FC236}">
+                <a16:creationId xmlns:a16="http://schemas.microsoft.com/office/drawing/2014/main" id="{A38B9D20-7BE8-44F6-9513-7AB38A82AF65}"/>
+              </a:ext>
+            </a:extLst>
+          </p:cNvPr>
+          <p:cNvGrpSpPr/>
+          <p:nvPr/>
+        </p:nvGrpSpPr>
+        <p:grpSpPr>
+          <a:xfrm>
+            <a:off x="7150461" y="914400"/>
+            <a:ext cx="4370832" cy="3995928"/>
+            <a:chOff x="7269480" y="1143000"/>
+            <a:chExt cx="4370832" cy="3995928"/>
+          </a:xfrm>
+        </p:grpSpPr>
+        <p:sp>
+          <p:nvSpPr>
+            <p:cNvPr id="46" name="Shape 44"/>
+            <p:cNvSpPr/>
+            <p:nvPr/>
+          </p:nvSpPr>
+          <p:spPr>
+            <a:xfrm>
+              <a:off x="7269480" y="1143000"/>
+              <a:ext cx="4370832" cy="3995928"/>
+            </a:xfrm>
+            <a:prstGeom prst="roundRect">
+              <a:avLst>
+                <a:gd name="adj" fmla="val 1674"/>
+              </a:avLst>
+            </a:prstGeom>
             <a:solidFill>
-              <a:srgbClr val="E6E6E6"/>
+              <a:srgbClr val="F4F6FB"/>
             </a:solidFill>
-            <a:prstDash val="solid"/>
-          </a:ln>
-        </p:spPr>
-      </p:sp>
-      <p:sp>
-        <p:nvSpPr>
-          <p:cNvPr id="44" name="Text 42"/>
-          <p:cNvSpPr txBox="1"/>
-          <p:nvPr/>
-        </p:nvSpPr>
-        <p:spPr>
-          <a:xfrm>
-            <a:off x="5074920" y="4864608"/>
-            <a:ext cx="1737360" cy="320040"/>
+            <a:ln w="9525">
+              <a:solidFill>
+                <a:srgbClr val="E6E6E6"/>
+              </a:solidFill>
+              <a:prstDash val="solid"/>
+            </a:ln>
+          </p:spPr>
+        </p:sp>
+        <p:sp>
+          <p:nvSpPr>
+            <p:cNvPr id="47" name="Text 45"/>
+            <p:cNvSpPr txBox="1"/>
+            <p:nvPr/>
+          </p:nvSpPr>
+          <p:spPr>
+            <a:xfrm>
+              <a:off x="7498080" y="1261872"/>
+              <a:ext cx="3913632" cy="365760"/>
+            </a:xfrm>
+            <a:prstGeom prst="rect">
+              <a:avLst/>
+            </a:prstGeom>
+            <a:noFill/>
+            <a:ln/>
+          </p:spPr>
+          <p:txBody>
+            <a:bodyPr wrap="square" lIns="0" tIns="0" rIns="0" bIns="0" rtlCol="0" anchor="ctr"/>
+            <a:lstStyle/>
+            <a:p>
+              <a:pPr marL="0" indent="0">
+                <a:buNone/>
+              </a:pPr>
+              <a:r>
+                <a:rPr lang="en-US" sz="1500" b="1" dirty="0">
+                  <a:solidFill>
+                    <a:srgbClr val="0061F6"/>
+                  </a:solidFill>
+                  <a:latin typeface="Arial" pitchFamily="34" charset="0"/>
+                  <a:ea typeface="Arial" pitchFamily="34" charset="-122"/>
+                  <a:cs typeface="Arial" pitchFamily="34" charset="-120"/>
+                </a:rPr>
+                <a:t>Search and AI: last 3 months</a:t>
+              </a:r>
+              <a:endParaRPr lang="en-US" sz="1500" dirty="0"/>
+            </a:p>
+          </p:txBody>
+        </p:sp>
+        <p:sp>
+          <p:nvSpPr>
+            <p:cNvPr id="48" name="Text 46"/>
+            <p:cNvSpPr txBox="1"/>
+            <p:nvPr/>
+          </p:nvSpPr>
+          <p:spPr>
+            <a:xfrm>
+              <a:off x="7498080" y="1737360"/>
+              <a:ext cx="1143000" cy="457200"/>
+            </a:xfrm>
+            <a:prstGeom prst="rect">
+              <a:avLst/>
+            </a:prstGeom>
+            <a:noFill/>
+            <a:ln/>
+          </p:spPr>
+          <p:txBody>
+            <a:bodyPr wrap="square" lIns="0" tIns="0" rIns="0" bIns="0" rtlCol="0" anchor="ctr"/>
+            <a:lstStyle/>
+            <a:p>
+              <a:pPr marL="0" indent="0">
+                <a:buNone/>
+              </a:pPr>
+              <a:r>
+                <a:rPr lang="en-US" sz="2200" b="1" dirty="0">
+                  <a:solidFill>
+                    <a:srgbClr val="22205D"/>
+                  </a:solidFill>
+                  <a:latin typeface="Arial" pitchFamily="34" charset="0"/>
+                  <a:ea typeface="Arial" pitchFamily="34" charset="-122"/>
+                  <a:cs typeface="Arial" pitchFamily="34" charset="-120"/>
+                </a:rPr>
+                <a:t>+30%</a:t>
+              </a:r>
+              <a:endParaRPr lang="en-US" sz="2200" dirty="0"/>
+            </a:p>
+          </p:txBody>
+        </p:sp>
+        <p:sp>
+          <p:nvSpPr>
+            <p:cNvPr id="49" name="Text 47"/>
+            <p:cNvSpPr txBox="1"/>
+            <p:nvPr/>
+          </p:nvSpPr>
+          <p:spPr>
+            <a:xfrm>
+              <a:off x="8686800" y="1755648"/>
+              <a:ext cx="2724912" cy="777240"/>
+            </a:xfrm>
+            <a:prstGeom prst="rect">
+              <a:avLst/>
+            </a:prstGeom>
+            <a:noFill/>
+            <a:ln/>
+          </p:spPr>
+          <p:txBody>
+            <a:bodyPr wrap="square" lIns="0" tIns="0" rIns="0" bIns="0" rtlCol="0" anchor="t"/>
+            <a:lstStyle/>
+            <a:p>
+              <a:pPr marL="0" indent="0">
+                <a:buNone/>
+              </a:pPr>
+              <a:r>
+                <a:rPr lang="en-US" sz="1100" dirty="0">
+                  <a:solidFill>
+                    <a:srgbClr val="22205D"/>
+                  </a:solidFill>
+                  <a:latin typeface="Arial" pitchFamily="34" charset="0"/>
+                  <a:ea typeface="Arial" pitchFamily="34" charset="-122"/>
+                  <a:cs typeface="Arial" pitchFamily="34" charset="-120"/>
+                </a:rPr>
+                <a:t>Google clicks vs the previous 3 months (1.9K vs 1.46K)</a:t>
+              </a:r>
+              <a:endParaRPr lang="en-US" sz="1100" dirty="0"/>
+            </a:p>
+          </p:txBody>
+        </p:sp>
+        <p:sp>
+          <p:nvSpPr>
+            <p:cNvPr id="50" name="Text 48"/>
+            <p:cNvSpPr txBox="1"/>
+            <p:nvPr/>
+          </p:nvSpPr>
+          <p:spPr>
+            <a:xfrm>
+              <a:off x="7498080" y="2606040"/>
+              <a:ext cx="1143000" cy="457200"/>
+            </a:xfrm>
+            <a:prstGeom prst="rect">
+              <a:avLst/>
+            </a:prstGeom>
+            <a:noFill/>
+            <a:ln/>
+          </p:spPr>
+          <p:txBody>
+            <a:bodyPr wrap="square" lIns="0" tIns="0" rIns="0" bIns="0" rtlCol="0" anchor="ctr"/>
+            <a:lstStyle/>
+            <a:p>
+              <a:pPr marL="0" indent="0">
+                <a:buNone/>
+              </a:pPr>
+              <a:r>
+                <a:rPr lang="en-US" sz="2200" b="1" dirty="0">
+                  <a:solidFill>
+                    <a:srgbClr val="22205D"/>
+                  </a:solidFill>
+                  <a:latin typeface="Arial" pitchFamily="34" charset="0"/>
+                  <a:ea typeface="Arial" pitchFamily="34" charset="-122"/>
+                  <a:cs typeface="Arial" pitchFamily="34" charset="-120"/>
+                </a:rPr>
+                <a:t>2.5×</a:t>
+              </a:r>
+              <a:endParaRPr lang="en-US" sz="2200" dirty="0"/>
+            </a:p>
+          </p:txBody>
+        </p:sp>
+        <p:sp>
+          <p:nvSpPr>
+            <p:cNvPr id="51" name="Text 49"/>
+            <p:cNvSpPr txBox="1"/>
+            <p:nvPr/>
+          </p:nvSpPr>
+          <p:spPr>
+            <a:xfrm>
+              <a:off x="8686800" y="2624328"/>
+              <a:ext cx="2724912" cy="777240"/>
+            </a:xfrm>
+            <a:prstGeom prst="rect">
+              <a:avLst/>
+            </a:prstGeom>
+            <a:noFill/>
+            <a:ln/>
+          </p:spPr>
+          <p:txBody>
+            <a:bodyPr wrap="square" lIns="0" tIns="0" rIns="0" bIns="0" rtlCol="0" anchor="t"/>
+            <a:lstStyle/>
+            <a:p>
+              <a:pPr marL="0" indent="0">
+                <a:buNone/>
+              </a:pPr>
+              <a:r>
+                <a:rPr lang="en-US" sz="1100" dirty="0">
+                  <a:solidFill>
+                    <a:srgbClr val="22205D"/>
+                  </a:solidFill>
+                  <a:latin typeface="Arial" pitchFamily="34" charset="0"/>
+                  <a:ea typeface="Arial" pitchFamily="34" charset="-122"/>
+                  <a:cs typeface="Arial" pitchFamily="34" charset="-120"/>
+                </a:rPr>
+                <a:t>Click-through rate from Google (7.8% vs 3.1%)</a:t>
+              </a:r>
+              <a:endParaRPr lang="en-US" sz="1100" dirty="0"/>
+            </a:p>
+          </p:txBody>
+        </p:sp>
+        <p:sp>
+          <p:nvSpPr>
+            <p:cNvPr id="52" name="Text 50"/>
+            <p:cNvSpPr txBox="1"/>
+            <p:nvPr/>
+          </p:nvSpPr>
+          <p:spPr>
+            <a:xfrm>
+              <a:off x="7498080" y="3474720"/>
+              <a:ext cx="1143000" cy="457200"/>
+            </a:xfrm>
+            <a:prstGeom prst="rect">
+              <a:avLst/>
+            </a:prstGeom>
+            <a:noFill/>
+            <a:ln/>
+          </p:spPr>
+          <p:txBody>
+            <a:bodyPr wrap="square" lIns="0" tIns="0" rIns="0" bIns="0" rtlCol="0" anchor="ctr"/>
+            <a:lstStyle/>
+            <a:p>
+              <a:pPr marL="0" indent="0">
+                <a:buNone/>
+              </a:pPr>
+              <a:r>
+                <a:rPr lang="en-US" sz="2200" b="1" dirty="0">
+                  <a:solidFill>
+                    <a:srgbClr val="22205D"/>
+                  </a:solidFill>
+                  <a:latin typeface="Arial" pitchFamily="34" charset="0"/>
+                  <a:ea typeface="Arial" pitchFamily="34" charset="-122"/>
+                  <a:cs typeface="Arial" pitchFamily="34" charset="-120"/>
+                </a:rPr>
+                <a:t>3</a:t>
+              </a:r>
+              <a:endParaRPr lang="en-US" sz="2200" dirty="0"/>
+            </a:p>
+          </p:txBody>
+        </p:sp>
+        <p:sp>
+          <p:nvSpPr>
+            <p:cNvPr id="53" name="Text 51"/>
+            <p:cNvSpPr txBox="1"/>
+            <p:nvPr/>
+          </p:nvSpPr>
+          <p:spPr>
+            <a:xfrm>
+              <a:off x="8686800" y="3493008"/>
+              <a:ext cx="2724912" cy="777240"/>
+            </a:xfrm>
+            <a:prstGeom prst="rect">
+              <a:avLst/>
+            </a:prstGeom>
+            <a:noFill/>
+            <a:ln/>
+          </p:spPr>
+          <p:txBody>
+            <a:bodyPr wrap="square" lIns="0" tIns="0" rIns="0" bIns="0" rtlCol="0" anchor="t"/>
+            <a:lstStyle/>
+            <a:p>
+              <a:pPr marL="0" indent="0">
+                <a:buNone/>
+              </a:pPr>
+              <a:r>
+                <a:rPr lang="en-US" sz="1100" dirty="0">
+                  <a:solidFill>
+                    <a:srgbClr val="22205D"/>
+                  </a:solidFill>
+                  <a:latin typeface="Arial" pitchFamily="34" charset="0"/>
+                  <a:ea typeface="Arial" pitchFamily="34" charset="-122"/>
+                  <a:cs typeface="Arial" pitchFamily="34" charset="-120"/>
+                </a:rPr>
+                <a:t>AI assistants sending visitors: ChatGPT, Perplexity, Gemini</a:t>
+              </a:r>
+              <a:endParaRPr lang="en-US" sz="1100" dirty="0"/>
+            </a:p>
+          </p:txBody>
+        </p:sp>
+        <p:sp>
+          <p:nvSpPr>
+            <p:cNvPr id="54" name="Text 52"/>
+            <p:cNvSpPr txBox="1"/>
+            <p:nvPr/>
+          </p:nvSpPr>
+          <p:spPr>
+            <a:xfrm>
+              <a:off x="7498080" y="4343400"/>
+              <a:ext cx="1143000" cy="457200"/>
+            </a:xfrm>
+            <a:prstGeom prst="rect">
+              <a:avLst/>
+            </a:prstGeom>
+            <a:noFill/>
+            <a:ln/>
+          </p:spPr>
+          <p:txBody>
+            <a:bodyPr wrap="square" lIns="0" tIns="0" rIns="0" bIns="0" rtlCol="0" anchor="ctr"/>
+            <a:lstStyle/>
+            <a:p>
+              <a:pPr marL="0" indent="0">
+                <a:buNone/>
+              </a:pPr>
+              <a:r>
+                <a:rPr lang="en-US" sz="2200" b="1" dirty="0">
+                  <a:solidFill>
+                    <a:srgbClr val="22205D"/>
+                  </a:solidFill>
+                  <a:latin typeface="Arial" pitchFamily="34" charset="0"/>
+                  <a:ea typeface="Arial" pitchFamily="34" charset="-122"/>
+                  <a:cs typeface="Arial" pitchFamily="34" charset="-120"/>
+                </a:rPr>
+                <a:t>Top 5</a:t>
+              </a:r>
+              <a:endParaRPr lang="en-US" sz="2200" dirty="0"/>
+            </a:p>
+          </p:txBody>
+        </p:sp>
+        <p:sp>
+          <p:nvSpPr>
+            <p:cNvPr id="55" name="Text 53"/>
+            <p:cNvSpPr txBox="1"/>
+            <p:nvPr/>
+          </p:nvSpPr>
+          <p:spPr>
+            <a:xfrm>
+              <a:off x="8686800" y="4361688"/>
+              <a:ext cx="2724912" cy="777240"/>
+            </a:xfrm>
+            <a:prstGeom prst="rect">
+              <a:avLst/>
+            </a:prstGeom>
+            <a:noFill/>
+            <a:ln/>
+          </p:spPr>
+          <p:txBody>
+            <a:bodyPr wrap="square" lIns="0" tIns="0" rIns="0" bIns="0" rtlCol="0" anchor="t"/>
+            <a:lstStyle/>
+            <a:p>
+              <a:pPr marL="0" indent="0">
+                <a:buNone/>
+              </a:pPr>
+              <a:r>
+                <a:rPr lang="en-US" sz="1100" dirty="0">
+                  <a:solidFill>
+                    <a:srgbClr val="22205D"/>
+                  </a:solidFill>
+                  <a:latin typeface="Arial" pitchFamily="34" charset="0"/>
+                  <a:ea typeface="Arial" pitchFamily="34" charset="-122"/>
+                  <a:cs typeface="Arial" pitchFamily="34" charset="-120"/>
+                </a:rPr>
+                <a:t>Google rank for questions AI assistants ask, e.g. document processing ROI, small vs large language models, AI stuck in pilot</a:t>
+              </a:r>
+              <a:endParaRPr lang="en-US" sz="1100" dirty="0"/>
+            </a:p>
+          </p:txBody>
+        </p:sp>
+      </p:grpSp>
+      <p:pic>
+        <p:nvPicPr>
+          <p:cNvPr id="59" name="Picture 58">
+            <a:extLst>
+              <a:ext uri="{FF2B5EF4-FFF2-40B4-BE49-F238E27FC236}">
+                <a16:creationId xmlns:a16="http://schemas.microsoft.com/office/drawing/2014/main" id="{4C5230DC-B4BF-4126-BD53-B7CCE953CE77}"/>
+              </a:ext>
+            </a:extLst>
+          </p:cNvPr>
+          <p:cNvPicPr>
+            <a:picLocks noChangeAspect="1"/>
+          </p:cNvPicPr>
+          <p:nvPr/>
+        </p:nvPicPr>
+        <p:blipFill>
+          <a:blip r:embed="rId3"/>
+          <a:stretch>
+            <a:fillRect/>
+          </a:stretch>
+        </p:blipFill>
+        <p:spPr>
+          <a:xfrm>
+            <a:off x="452342" y="4088202"/>
+            <a:ext cx="4165378" cy="2769798"/>
           </a:xfrm>
           <a:prstGeom prst="rect">
             <a:avLst/>
           </a:prstGeom>
-          <a:noFill/>
-          <a:ln/>
-        </p:spPr>
-        <p:txBody>
-          <a:bodyPr wrap="square" lIns="0" tIns="0" rIns="0" bIns="0" rtlCol="0" anchor="ctr"/>
-          <a:lstStyle/>
-          <a:p>
-            <a:pPr indent="0" marL="0">
-              <a:buNone/>
-            </a:pPr>
-            <a:r>
-              <a:rPr lang="en-US" sz="1300" b="1" dirty="0">
-                <a:solidFill>
-                  <a:srgbClr val="22205D"/>
-                </a:solidFill>
-                <a:latin typeface="Arial" pitchFamily="34" charset="0"/>
-                <a:ea typeface="Arial" pitchFamily="34" charset="-122"/>
-                <a:cs typeface="Arial" pitchFamily="34" charset="-120"/>
-              </a:rPr>
-              <a:t>xLab + xCelerate</a:t>
-            </a:r>
-            <a:endParaRPr lang="en-US" sz="1300" dirty="0"/>
-          </a:p>
-        </p:txBody>
-      </p:sp>
-      <p:sp>
-        <p:nvSpPr>
-          <p:cNvPr id="45" name="Text 43"/>
-          <p:cNvSpPr txBox="1"/>
-          <p:nvPr/>
-        </p:nvSpPr>
-        <p:spPr>
-          <a:xfrm>
-            <a:off x="5074920" y="5230368"/>
-            <a:ext cx="1737360" cy="777240"/>
-          </a:xfrm>
-          <a:prstGeom prst="rect">
-            <a:avLst/>
-          </a:prstGeom>
-          <a:noFill/>
-          <a:ln/>
-        </p:spPr>
-        <p:txBody>
-          <a:bodyPr wrap="square" lIns="0" tIns="0" rIns="0" bIns="0" rtlCol="0" anchor="t"/>
-          <a:lstStyle/>
-          <a:p>
-            <a:pPr indent="0" marL="0">
-              <a:buNone/>
-            </a:pPr>
-            <a:r>
-              <a:rPr lang="en-US" sz="1100" dirty="0">
-                <a:solidFill>
-                  <a:srgbClr val="22205D"/>
-                </a:solidFill>
-                <a:latin typeface="Arial" pitchFamily="34" charset="0"/>
-                <a:ea typeface="Arial" pitchFamily="34" charset="-122"/>
-                <a:cs typeface="Arial" pitchFamily="34" charset="-120"/>
-              </a:rPr>
-              <a:t>Products and training</a:t>
-            </a:r>
-            <a:endParaRPr lang="en-US" sz="1100" dirty="0"/>
-          </a:p>
-        </p:txBody>
-      </p:sp>
-      <p:sp>
-        <p:nvSpPr>
-          <p:cNvPr id="46" name="Shape 44"/>
-          <p:cNvSpPr/>
-          <p:nvPr/>
-        </p:nvSpPr>
-        <p:spPr>
-          <a:xfrm>
-            <a:off x="7269480" y="1143000"/>
-            <a:ext cx="4370832" cy="5166360"/>
-          </a:xfrm>
-          <a:prstGeom prst="roundRect">
-            <a:avLst>
-              <a:gd name="adj" fmla="val 1674"/>
-            </a:avLst>
-          </a:prstGeom>
-          <a:solidFill>
-            <a:srgbClr val="F4F6FB"/>
-          </a:solidFill>
-          <a:ln w="9525">
-            <a:solidFill>
-              <a:srgbClr val="E6E6E6"/>
-            </a:solidFill>
-            <a:prstDash val="solid"/>
-          </a:ln>
-        </p:spPr>
-      </p:sp>
-      <p:sp>
-        <p:nvSpPr>
-          <p:cNvPr id="47" name="Text 45"/>
-          <p:cNvSpPr txBox="1"/>
-          <p:nvPr/>
-        </p:nvSpPr>
-        <p:spPr>
-          <a:xfrm>
-            <a:off x="7498080" y="1261872"/>
-            <a:ext cx="3913632" cy="365760"/>
-          </a:xfrm>
-          <a:prstGeom prst="rect">
-            <a:avLst/>
-          </a:prstGeom>
-          <a:noFill/>
-          <a:ln/>
-        </p:spPr>
-        <p:txBody>
-          <a:bodyPr wrap="square" lIns="0" tIns="0" rIns="0" bIns="0" rtlCol="0" anchor="ctr"/>
-          <a:lstStyle/>
-          <a:p>
-            <a:pPr indent="0" marL="0">
-              <a:buNone/>
-            </a:pPr>
-            <a:r>
-              <a:rPr lang="en-US" sz="1500" b="1" dirty="0">
-                <a:solidFill>
-                  <a:srgbClr val="0061F6"/>
-                </a:solidFill>
-                <a:latin typeface="Arial" pitchFamily="34" charset="0"/>
-                <a:ea typeface="Arial" pitchFamily="34" charset="-122"/>
-                <a:cs typeface="Arial" pitchFamily="34" charset="-120"/>
-              </a:rPr>
-              <a:t>Search and AI: last 3 months</a:t>
-            </a:r>
-            <a:endParaRPr lang="en-US" sz="1500" dirty="0"/>
-          </a:p>
-        </p:txBody>
-      </p:sp>
-      <p:sp>
-        <p:nvSpPr>
-          <p:cNvPr id="48" name="Text 46"/>
-          <p:cNvSpPr txBox="1"/>
-          <p:nvPr/>
-        </p:nvSpPr>
-        <p:spPr>
-          <a:xfrm>
-            <a:off x="7498080" y="1737360"/>
-            <a:ext cx="1143000" cy="457200"/>
-          </a:xfrm>
-          <a:prstGeom prst="rect">
-            <a:avLst/>
-          </a:prstGeom>
-          <a:noFill/>
-          <a:ln/>
-        </p:spPr>
-        <p:txBody>
-          <a:bodyPr wrap="square" lIns="0" tIns="0" rIns="0" bIns="0" rtlCol="0" anchor="ctr"/>
-          <a:lstStyle/>
-          <a:p>
-            <a:pPr indent="0" marL="0">
-              <a:buNone/>
-            </a:pPr>
-            <a:r>
-              <a:rPr lang="en-US" sz="2200" b="1" dirty="0">
-                <a:solidFill>
-                  <a:srgbClr val="22205D"/>
-                </a:solidFill>
-                <a:latin typeface="Arial" pitchFamily="34" charset="0"/>
-                <a:ea typeface="Arial" pitchFamily="34" charset="-122"/>
-                <a:cs typeface="Arial" pitchFamily="34" charset="-120"/>
-              </a:rPr>
-              <a:t>+30%</a:t>
-            </a:r>
-            <a:endParaRPr lang="en-US" sz="2200" dirty="0"/>
-          </a:p>
-        </p:txBody>
-      </p:sp>
-      <p:sp>
-        <p:nvSpPr>
-          <p:cNvPr id="49" name="Text 47"/>
-          <p:cNvSpPr txBox="1"/>
-          <p:nvPr/>
-        </p:nvSpPr>
-        <p:spPr>
-          <a:xfrm>
-            <a:off x="8686800" y="1755648"/>
-            <a:ext cx="2724912" cy="777240"/>
-          </a:xfrm>
-          <a:prstGeom prst="rect">
-            <a:avLst/>
-          </a:prstGeom>
-          <a:noFill/>
-          <a:ln/>
-        </p:spPr>
-        <p:txBody>
-          <a:bodyPr wrap="square" lIns="0" tIns="0" rIns="0" bIns="0" rtlCol="0" anchor="t"/>
-          <a:lstStyle/>
-          <a:p>
-            <a:pPr indent="0" marL="0">
-              <a:buNone/>
-            </a:pPr>
-            <a:r>
-              <a:rPr lang="en-US" sz="1100" dirty="0">
-                <a:solidFill>
-                  <a:srgbClr val="22205D"/>
-                </a:solidFill>
-                <a:latin typeface="Arial" pitchFamily="34" charset="0"/>
-                <a:ea typeface="Arial" pitchFamily="34" charset="-122"/>
-                <a:cs typeface="Arial" pitchFamily="34" charset="-120"/>
-              </a:rPr>
-              <a:t>Google clicks vs the previous 3 months (1.9K vs 1.46K)</a:t>
-            </a:r>
-            <a:endParaRPr lang="en-US" sz="1100" dirty="0"/>
-          </a:p>
-        </p:txBody>
-      </p:sp>
-      <p:sp>
-        <p:nvSpPr>
-          <p:cNvPr id="50" name="Text 48"/>
-          <p:cNvSpPr txBox="1"/>
-          <p:nvPr/>
-        </p:nvSpPr>
-        <p:spPr>
-          <a:xfrm>
-            <a:off x="7498080" y="2606040"/>
-            <a:ext cx="1143000" cy="457200"/>
-          </a:xfrm>
-          <a:prstGeom prst="rect">
-            <a:avLst/>
-          </a:prstGeom>
-          <a:noFill/>
-          <a:ln/>
-        </p:spPr>
-        <p:txBody>
-          <a:bodyPr wrap="square" lIns="0" tIns="0" rIns="0" bIns="0" rtlCol="0" anchor="ctr"/>
-          <a:lstStyle/>
-          <a:p>
-            <a:pPr indent="0" marL="0">
-              <a:buNone/>
-            </a:pPr>
-            <a:r>
-              <a:rPr lang="en-US" sz="2200" b="1" dirty="0">
-                <a:solidFill>
-                  <a:srgbClr val="22205D"/>
-                </a:solidFill>
-                <a:latin typeface="Arial" pitchFamily="34" charset="0"/>
-                <a:ea typeface="Arial" pitchFamily="34" charset="-122"/>
-                <a:cs typeface="Arial" pitchFamily="34" charset="-120"/>
-              </a:rPr>
-              <a:t>2.5×</a:t>
-            </a:r>
-            <a:endParaRPr lang="en-US" sz="2200" dirty="0"/>
-          </a:p>
-        </p:txBody>
-      </p:sp>
-      <p:sp>
-        <p:nvSpPr>
-          <p:cNvPr id="51" name="Text 49"/>
-          <p:cNvSpPr txBox="1"/>
-          <p:nvPr/>
-        </p:nvSpPr>
-        <p:spPr>
-          <a:xfrm>
-            <a:off x="8686800" y="2624328"/>
-            <a:ext cx="2724912" cy="777240"/>
-          </a:xfrm>
-          <a:prstGeom prst="rect">
-            <a:avLst/>
-          </a:prstGeom>
-          <a:noFill/>
-          <a:ln/>
-        </p:spPr>
-        <p:txBody>
-          <a:bodyPr wrap="square" lIns="0" tIns="0" rIns="0" bIns="0" rtlCol="0" anchor="t"/>
-          <a:lstStyle/>
-          <a:p>
-            <a:pPr indent="0" marL="0">
-              <a:buNone/>
-            </a:pPr>
-            <a:r>
-              <a:rPr lang="en-US" sz="1100" dirty="0">
-                <a:solidFill>
-                  <a:srgbClr val="22205D"/>
-                </a:solidFill>
-                <a:latin typeface="Arial" pitchFamily="34" charset="0"/>
-                <a:ea typeface="Arial" pitchFamily="34" charset="-122"/>
-                <a:cs typeface="Arial" pitchFamily="34" charset="-120"/>
-              </a:rPr>
-              <a:t>Click-through rate from Google (7.8% vs 3.1%)</a:t>
-            </a:r>
-            <a:endParaRPr lang="en-US" sz="1100" dirty="0"/>
-          </a:p>
-        </p:txBody>
-      </p:sp>
-      <p:sp>
-        <p:nvSpPr>
-          <p:cNvPr id="52" name="Text 50"/>
-          <p:cNvSpPr txBox="1"/>
-          <p:nvPr/>
-        </p:nvSpPr>
-        <p:spPr>
-          <a:xfrm>
-            <a:off x="7498080" y="3474720"/>
-            <a:ext cx="1143000" cy="457200"/>
-          </a:xfrm>
-          <a:prstGeom prst="rect">
-            <a:avLst/>
-          </a:prstGeom>
-          <a:noFill/>
-          <a:ln/>
-        </p:spPr>
-        <p:txBody>
-          <a:bodyPr wrap="square" lIns="0" tIns="0" rIns="0" bIns="0" rtlCol="0" anchor="ctr"/>
-          <a:lstStyle/>
-          <a:p>
-            <a:pPr indent="0" marL="0">
-              <a:buNone/>
-            </a:pPr>
-            <a:r>
-              <a:rPr lang="en-US" sz="2200" b="1" dirty="0">
-                <a:solidFill>
-                  <a:srgbClr val="22205D"/>
-                </a:solidFill>
-                <a:latin typeface="Arial" pitchFamily="34" charset="0"/>
-                <a:ea typeface="Arial" pitchFamily="34" charset="-122"/>
-                <a:cs typeface="Arial" pitchFamily="34" charset="-120"/>
-              </a:rPr>
-              <a:t>3</a:t>
-            </a:r>
-            <a:endParaRPr lang="en-US" sz="2200" dirty="0"/>
-          </a:p>
-        </p:txBody>
-      </p:sp>
-      <p:sp>
-        <p:nvSpPr>
-          <p:cNvPr id="53" name="Text 51"/>
-          <p:cNvSpPr txBox="1"/>
-          <p:nvPr/>
-        </p:nvSpPr>
-        <p:spPr>
-          <a:xfrm>
-            <a:off x="8686800" y="3493008"/>
-            <a:ext cx="2724912" cy="777240"/>
-          </a:xfrm>
-          <a:prstGeom prst="rect">
-            <a:avLst/>
-          </a:prstGeom>
-          <a:noFill/>
-          <a:ln/>
-        </p:spPr>
-        <p:txBody>
-          <a:bodyPr wrap="square" lIns="0" tIns="0" rIns="0" bIns="0" rtlCol="0" anchor="t"/>
-          <a:lstStyle/>
-          <a:p>
-            <a:pPr indent="0" marL="0">
-              <a:buNone/>
-            </a:pPr>
-            <a:r>
-              <a:rPr lang="en-US" sz="1100" dirty="0">
-                <a:solidFill>
-                  <a:srgbClr val="22205D"/>
-                </a:solidFill>
-                <a:latin typeface="Arial" pitchFamily="34" charset="0"/>
-                <a:ea typeface="Arial" pitchFamily="34" charset="-122"/>
-                <a:cs typeface="Arial" pitchFamily="34" charset="-120"/>
-              </a:rPr>
-              <a:t>AI assistants sending visitors: ChatGPT, Perplexity, Gemini</a:t>
-            </a:r>
-            <a:endParaRPr lang="en-US" sz="1100" dirty="0"/>
-          </a:p>
-        </p:txBody>
-      </p:sp>
-      <p:sp>
-        <p:nvSpPr>
-          <p:cNvPr id="54" name="Text 52"/>
-          <p:cNvSpPr txBox="1"/>
-          <p:nvPr/>
-        </p:nvSpPr>
-        <p:spPr>
-          <a:xfrm>
-            <a:off x="7498080" y="4343400"/>
-            <a:ext cx="1143000" cy="457200"/>
-          </a:xfrm>
-          <a:prstGeom prst="rect">
-            <a:avLst/>
-          </a:prstGeom>
-          <a:noFill/>
-          <a:ln/>
-        </p:spPr>
-        <p:txBody>
-          <a:bodyPr wrap="square" lIns="0" tIns="0" rIns="0" bIns="0" rtlCol="0" anchor="ctr"/>
-          <a:lstStyle/>
-          <a:p>
-            <a:pPr indent="0" marL="0">
-              <a:buNone/>
-            </a:pPr>
-            <a:r>
-              <a:rPr lang="en-US" sz="2200" b="1" dirty="0">
-                <a:solidFill>
-                  <a:srgbClr val="22205D"/>
-                </a:solidFill>
-                <a:latin typeface="Arial" pitchFamily="34" charset="0"/>
-                <a:ea typeface="Arial" pitchFamily="34" charset="-122"/>
-                <a:cs typeface="Arial" pitchFamily="34" charset="-120"/>
-              </a:rPr>
-              <a:t>Top 5</a:t>
-            </a:r>
-            <a:endParaRPr lang="en-US" sz="2200" dirty="0"/>
-          </a:p>
-        </p:txBody>
-      </p:sp>
-      <p:sp>
-        <p:nvSpPr>
-          <p:cNvPr id="55" name="Text 53"/>
-          <p:cNvSpPr txBox="1"/>
-          <p:nvPr/>
-        </p:nvSpPr>
-        <p:spPr>
-          <a:xfrm>
-            <a:off x="8686800" y="4361688"/>
-            <a:ext cx="2724912" cy="777240"/>
-          </a:xfrm>
-          <a:prstGeom prst="rect">
-            <a:avLst/>
-          </a:prstGeom>
-          <a:noFill/>
-          <a:ln/>
-        </p:spPr>
-        <p:txBody>
-          <a:bodyPr wrap="square" lIns="0" tIns="0" rIns="0" bIns="0" rtlCol="0" anchor="t"/>
-          <a:lstStyle/>
-          <a:p>
-            <a:pPr indent="0" marL="0">
-              <a:buNone/>
-            </a:pPr>
-            <a:r>
-              <a:rPr lang="en-US" sz="1100" dirty="0">
-                <a:solidFill>
-                  <a:srgbClr val="22205D"/>
-                </a:solidFill>
-                <a:latin typeface="Arial" pitchFamily="34" charset="0"/>
-                <a:ea typeface="Arial" pitchFamily="34" charset="-122"/>
-                <a:cs typeface="Arial" pitchFamily="34" charset="-120"/>
-              </a:rPr>
-              <a:t>Google rank for questions AI assistants ask, e.g. document processing ROI, small vs large language models, AI stuck in pilot</a:t>
-            </a:r>
-            <a:endParaRPr lang="en-US" sz="1100" dirty="0"/>
-          </a:p>
-        </p:txBody>
-      </p:sp>
-      <p:sp>
-        <p:nvSpPr>
-          <p:cNvPr id="56" name="Text 54"/>
-          <p:cNvSpPr txBox="1"/>
-          <p:nvPr/>
-        </p:nvSpPr>
-        <p:spPr>
-          <a:xfrm>
-            <a:off x="7498080" y="5230368"/>
-            <a:ext cx="3913632" cy="274320"/>
-          </a:xfrm>
-          <a:prstGeom prst="rect">
-            <a:avLst/>
-          </a:prstGeom>
-          <a:noFill/>
-          <a:ln/>
-        </p:spPr>
-        <p:txBody>
-          <a:bodyPr wrap="square" lIns="0" tIns="0" rIns="0" bIns="0" rtlCol="0" anchor="ctr"/>
-          <a:lstStyle/>
-          <a:p>
-            <a:pPr indent="0" marL="0">
-              <a:buNone/>
-            </a:pPr>
-            <a:r>
-              <a:rPr lang="en-US" sz="1200" b="1" dirty="0">
-                <a:solidFill>
-                  <a:srgbClr val="0061F6"/>
-                </a:solidFill>
-                <a:latin typeface="Arial" pitchFamily="34" charset="0"/>
-                <a:ea typeface="Arial" pitchFamily="34" charset="-122"/>
-                <a:cs typeface="Arial" pitchFamily="34" charset="-120"/>
-              </a:rPr>
-              <a:t>Next</a:t>
-            </a:r>
-            <a:endParaRPr lang="en-US" sz="1200" dirty="0"/>
-          </a:p>
-        </p:txBody>
-      </p:sp>
-      <p:sp>
-        <p:nvSpPr>
-          <p:cNvPr id="57" name="Text 55"/>
-          <p:cNvSpPr txBox="1"/>
-          <p:nvPr/>
-        </p:nvSpPr>
-        <p:spPr>
-          <a:xfrm>
-            <a:off x="7498080" y="5504688"/>
-            <a:ext cx="3913632" cy="731520"/>
-          </a:xfrm>
-          <a:prstGeom prst="rect">
-            <a:avLst/>
-          </a:prstGeom>
-          <a:noFill/>
-          <a:ln/>
-        </p:spPr>
-        <p:txBody>
-          <a:bodyPr wrap="square" lIns="0" tIns="0" rIns="0" bIns="0" rtlCol="0" anchor="t"/>
-          <a:lstStyle/>
-          <a:p>
-            <a:pPr indent="0" marL="0">
-              <a:buNone/>
-            </a:pPr>
-            <a:r>
-              <a:rPr lang="en-US" sz="1100" dirty="0">
-                <a:solidFill>
-                  <a:srgbClr val="22205D"/>
-                </a:solidFill>
-                <a:latin typeface="Arial" pitchFamily="34" charset="0"/>
-                <a:ea typeface="Arial" pitchFamily="34" charset="-122"/>
-                <a:cs typeface="Arial" pitchFamily="34" charset="-120"/>
-              </a:rPr>
-              <a:t>Both tools live by Oct 14 · service and Mining pages live · page refreshes · point all links to our main LinkedIn page</a:t>
-            </a:r>
-            <a:endParaRPr lang="en-US" sz="1100" dirty="0"/>
-          </a:p>
-        </p:txBody>
-      </p:sp>
+        </p:spPr>
+      </p:pic>
     </p:spTree>
   </p:cSld>
   <p:clrMapOvr>
@@ -4819,6 +3618,7 @@
         <a:solidFill>
           <a:srgbClr val="F4F6FB"/>
         </a:solidFill>
+        <a:effectLst/>
       </p:bgPr>
     </p:bg>
     <p:spTree>
@@ -4856,7 +3656,7 @@
           <a:bodyPr wrap="square" lIns="0" tIns="0" rIns="0" bIns="0" rtlCol="0" anchor="ctr"/>
           <a:lstStyle/>
           <a:p>
-            <a:pPr indent="0" marL="0">
+            <a:pPr marL="0" indent="0">
               <a:buNone/>
             </a:pPr>
             <a:r>
@@ -4922,7 +3722,7 @@
           <a:bodyPr wrap="square" lIns="0" tIns="0" rIns="0" bIns="0" rtlCol="0" anchor="ctr"/>
           <a:lstStyle/>
           <a:p>
-            <a:pPr indent="0" marL="0">
+            <a:pPr marL="0" indent="0">
               <a:buNone/>
             </a:pPr>
             <a:r>
@@ -4961,7 +3761,7 @@
           <a:bodyPr wrap="square" lIns="0" tIns="0" rIns="0" bIns="0" rtlCol="0" anchor="ctr"/>
           <a:lstStyle/>
           <a:p>
-            <a:pPr indent="0" marL="0">
+            <a:pPr marL="0" indent="0">
               <a:buNone/>
             </a:pPr>
             <a:r>
@@ -5000,7 +3800,7 @@
           <a:bodyPr wrap="square" lIns="0" tIns="0" rIns="0" bIns="0" rtlCol="0" anchor="t"/>
           <a:lstStyle/>
           <a:p>
-            <a:pPr indent="0" marL="0">
+            <a:pPr marL="0" indent="0">
               <a:buNone/>
             </a:pPr>
             <a:r>
@@ -5039,7 +3839,7 @@
           <a:bodyPr wrap="square" lIns="0" tIns="0" rIns="0" bIns="0" rtlCol="0" anchor="ctr"/>
           <a:lstStyle/>
           <a:p>
-            <a:pPr indent="0" marL="0">
+            <a:pPr marL="0" indent="0">
               <a:buNone/>
             </a:pPr>
             <a:r>
@@ -5078,7 +3878,7 @@
           <a:bodyPr wrap="square" lIns="0" tIns="0" rIns="0" bIns="0" rtlCol="0" anchor="t"/>
           <a:lstStyle/>
           <a:p>
-            <a:pPr indent="0" marL="0">
+            <a:pPr marL="0" indent="0">
               <a:buNone/>
             </a:pPr>
             <a:r>
@@ -5117,7 +3917,7 @@
           <a:bodyPr wrap="square" lIns="0" tIns="0" rIns="0" bIns="0" rtlCol="0" anchor="ctr"/>
           <a:lstStyle/>
           <a:p>
-            <a:pPr indent="0" marL="0">
+            <a:pPr marL="0" indent="0">
               <a:buNone/>
             </a:pPr>
             <a:r>
@@ -5156,7 +3956,7 @@
           <a:bodyPr wrap="square" lIns="0" tIns="0" rIns="0" bIns="0" rtlCol="0" anchor="t"/>
           <a:lstStyle/>
           <a:p>
-            <a:pPr indent="0" marL="0">
+            <a:pPr marL="0" indent="0">
               <a:buNone/>
             </a:pPr>
             <a:r>
@@ -5195,7 +3995,7 @@
           <a:bodyPr wrap="square" lIns="0" tIns="0" rIns="0" bIns="0" rtlCol="0" anchor="ctr"/>
           <a:lstStyle/>
           <a:p>
-            <a:pPr indent="0" marL="0">
+            <a:pPr marL="0" indent="0">
               <a:buNone/>
             </a:pPr>
             <a:r>
@@ -5234,7 +4034,7 @@
           <a:bodyPr wrap="square" lIns="0" tIns="0" rIns="0" bIns="0" rtlCol="0" anchor="ctr"/>
           <a:lstStyle/>
           <a:p>
-            <a:pPr indent="0" marL="0">
+            <a:pPr marL="0" indent="0">
               <a:buNone/>
             </a:pPr>
             <a:r>
@@ -5298,7 +4098,7 @@
           <a:bodyPr wrap="square" lIns="0" tIns="0" rIns="0" bIns="0" rtlCol="0" anchor="ctr"/>
           <a:lstStyle/>
           <a:p>
-            <a:pPr indent="0" marL="0">
+            <a:pPr marL="0" indent="0">
               <a:buNone/>
             </a:pPr>
             <a:r>
@@ -5337,7 +4137,7 @@
           <a:bodyPr wrap="square" lIns="0" tIns="0" rIns="0" bIns="0" rtlCol="0" anchor="ctr"/>
           <a:lstStyle/>
           <a:p>
-            <a:pPr indent="0" marL="0">
+            <a:pPr marL="0" indent="0">
               <a:buNone/>
             </a:pPr>
             <a:r>
@@ -5401,7 +4201,7 @@
           <a:bodyPr wrap="square" lIns="0" tIns="0" rIns="0" bIns="0" rtlCol="0" anchor="ctr"/>
           <a:lstStyle/>
           <a:p>
-            <a:pPr indent="0" marL="0">
+            <a:pPr marL="0" indent="0">
               <a:buNone/>
             </a:pPr>
             <a:r>
@@ -5440,7 +4240,7 @@
           <a:bodyPr wrap="square" lIns="0" tIns="0" rIns="0" bIns="0" rtlCol="0" anchor="ctr"/>
           <a:lstStyle/>
           <a:p>
-            <a:pPr indent="0" marL="0">
+            <a:pPr marL="0" indent="0">
               <a:buNone/>
             </a:pPr>
             <a:r>
@@ -5504,7 +4304,7 @@
           <a:bodyPr wrap="square" lIns="0" tIns="0" rIns="0" bIns="0" rtlCol="0" anchor="ctr"/>
           <a:lstStyle/>
           <a:p>
-            <a:pPr indent="0" marL="0">
+            <a:pPr marL="0" indent="0">
               <a:buNone/>
             </a:pPr>
             <a:r>
@@ -5543,7 +4343,7 @@
           <a:bodyPr wrap="square" lIns="0" tIns="0" rIns="0" bIns="0" rtlCol="0" anchor="ctr"/>
           <a:lstStyle/>
           <a:p>
-            <a:pPr indent="0" marL="0">
+            <a:pPr marL="0" indent="0">
               <a:buNone/>
             </a:pPr>
             <a:r>
@@ -5569,7 +4369,7 @@
         </p:nvSpPr>
         <p:spPr>
           <a:xfrm>
-            <a:off x="822960" y="5120640"/>
+            <a:off x="822960" y="5367528"/>
             <a:ext cx="5486400" cy="822960"/>
           </a:xfrm>
           <a:prstGeom prst="rect">
@@ -5582,7 +4382,7 @@
           <a:bodyPr wrap="square" lIns="0" tIns="0" rIns="0" bIns="0" rtlCol="0" anchor="t"/>
           <a:lstStyle/>
           <a:p>
-            <a:pPr indent="0" marL="0">
+            <a:pPr marL="0" indent="0">
               <a:buNone/>
             </a:pPr>
             <a:r>
@@ -5594,7 +4394,7 @@
                 <a:ea typeface="Arial" pitchFamily="34" charset="-122"/>
                 <a:cs typeface="Arial" pitchFamily="34" charset="-120"/>
               </a:rPr>
-              <a:t>Going forward: real faces, case studies and more motion content, 3 posts a week</a:t>
+              <a:t>Going forward: real faces, case studies and more motion content</a:t>
             </a:r>
             <a:endParaRPr lang="en-US" sz="1300" dirty="0"/>
           </a:p>
@@ -5648,7 +4448,7 @@
           <a:bodyPr wrap="square" lIns="0" tIns="0" rIns="0" bIns="0" rtlCol="0" anchor="ctr"/>
           <a:lstStyle/>
           <a:p>
-            <a:pPr indent="0" marL="0">
+            <a:pPr marL="0" indent="0">
               <a:buNone/>
             </a:pPr>
             <a:r>
@@ -5724,7 +4524,7 @@
                 <a:ea typeface="Arial" pitchFamily="34" charset="-122"/>
                 <a:cs typeface="Arial" pitchFamily="34" charset="-120"/>
               </a:rPr>
-              <a:t>So our audience skews local and career-focused: 6 in 10 LinkedIn followers are in Pakistan, and Careers is our 3rd most visited page</a:t>
+              <a:t>So our audience skews local and career-focused: 6 in 10 LinkedIn followers are in Pakistan, and Careers is one of our most visited page</a:t>
             </a:r>
             <a:endParaRPr lang="en-US" sz="1200" dirty="0"/>
           </a:p>
@@ -5799,7 +4599,7 @@
           <a:bodyPr wrap="square" lIns="0" tIns="0" rIns="0" bIns="0" rtlCol="0" anchor="ctr"/>
           <a:lstStyle/>
           <a:p>
-            <a:pPr indent="0" marL="0">
+            <a:pPr marL="0" indent="0">
               <a:buNone/>
             </a:pPr>
             <a:r>
@@ -5838,7 +4638,7 @@
           <a:bodyPr wrap="square" lIns="0" tIns="0" rIns="0" bIns="0" rtlCol="0" anchor="ctr"/>
           <a:lstStyle/>
           <a:p>
-            <a:pPr indent="0" marL="0">
+            <a:pPr marL="0" indent="0">
               <a:buNone/>
             </a:pPr>
             <a:r>
@@ -5877,7 +4677,7 @@
           <a:bodyPr wrap="square" lIns="0" tIns="0" rIns="0" bIns="0" rtlCol="0" anchor="ctr"/>
           <a:lstStyle/>
           <a:p>
-            <a:pPr indent="0" marL="0">
+            <a:pPr marL="0" indent="0">
               <a:buNone/>
             </a:pPr>
             <a:r>
@@ -5990,12 +4790,13 @@
 
 <file path=ppt/slides/slide5.xml><?xml version="1.0" encoding="utf-8"?>
 <p:sld xmlns:a="http://schemas.openxmlformats.org/drawingml/2006/main" xmlns:r="http://schemas.openxmlformats.org/officeDocument/2006/relationships" xmlns:p="http://schemas.openxmlformats.org/presentationml/2006/main">
-  <p:cSld name="Slide 5">
+  <p:cSld name="Slide 6">
     <p:bg>
       <p:bgPr>
         <a:solidFill>
-          <a:srgbClr val="FFFFFF"/>
+          <a:srgbClr val="F4F6FB"/>
         </a:solidFill>
+        <a:effectLst/>
       </p:bgPr>
     </p:bg>
     <p:spTree>
@@ -6033,1317 +4834,7 @@
           <a:bodyPr wrap="square" lIns="0" tIns="0" rIns="0" bIns="0" rtlCol="0" anchor="ctr"/>
           <a:lstStyle/>
           <a:p>
-            <a:pPr indent="0" marL="0">
-              <a:buNone/>
-            </a:pPr>
-            <a:r>
-              <a:rPr lang="en-US" sz="2800" b="1" dirty="0">
-                <a:solidFill>
-                  <a:srgbClr val="22205D"/>
-                </a:solidFill>
-                <a:latin typeface="Arial" pitchFamily="34" charset="0"/>
-                <a:ea typeface="Arial" pitchFamily="34" charset="-122"/>
-                <a:cs typeface="Arial" pitchFamily="34" charset="-120"/>
-              </a:rPr>
-              <a:t>The plan: Q2 and Q3</a:t>
-            </a:r>
-            <a:endParaRPr lang="en-US" sz="2800" dirty="0"/>
-          </a:p>
-        </p:txBody>
-      </p:sp>
-      <p:sp>
-        <p:nvSpPr>
-          <p:cNvPr id="3" name="Shape 1"/>
-          <p:cNvSpPr/>
-          <p:nvPr/>
-        </p:nvSpPr>
-        <p:spPr>
-          <a:xfrm>
-            <a:off x="548640" y="1143000"/>
-            <a:ext cx="5385816" cy="4526280"/>
-          </a:xfrm>
-          <a:prstGeom prst="roundRect">
-            <a:avLst>
-              <a:gd name="adj" fmla="val 1616"/>
-            </a:avLst>
-          </a:prstGeom>
-          <a:solidFill>
-            <a:srgbClr val="F4F6FB"/>
-          </a:solidFill>
-          <a:ln w="9525">
-            <a:solidFill>
-              <a:srgbClr val="E6E6E6"/>
-            </a:solidFill>
-            <a:prstDash val="solid"/>
-          </a:ln>
-        </p:spPr>
-      </p:sp>
-      <p:sp>
-        <p:nvSpPr>
-          <p:cNvPr id="4" name="Shape 2"/>
-          <p:cNvSpPr/>
-          <p:nvPr/>
-        </p:nvSpPr>
-        <p:spPr>
-          <a:xfrm>
-            <a:off x="822960" y="1371600"/>
-            <a:ext cx="1737360" cy="365760"/>
-          </a:xfrm>
-          <a:prstGeom prst="roundRect">
-            <a:avLst>
-              <a:gd name="adj" fmla="val 17500"/>
-            </a:avLst>
-          </a:prstGeom>
-          <a:solidFill>
-            <a:srgbClr val="22205D"/>
-          </a:solidFill>
-          <a:ln w="12700">
-            <a:solidFill>
-              <a:srgbClr val="22205D"/>
-            </a:solidFill>
-            <a:prstDash val="solid"/>
-          </a:ln>
-        </p:spPr>
-      </p:sp>
-      <p:sp>
-        <p:nvSpPr>
-          <p:cNvPr id="5" name="Text 3"/>
-          <p:cNvSpPr txBox="1"/>
-          <p:nvPr/>
-        </p:nvSpPr>
-        <p:spPr>
-          <a:xfrm>
-            <a:off x="822960" y="1371600"/>
-            <a:ext cx="1737360" cy="365760"/>
-          </a:xfrm>
-          <a:prstGeom prst="rect">
-            <a:avLst/>
-          </a:prstGeom>
-          <a:noFill/>
-          <a:ln/>
-        </p:spPr>
-        <p:txBody>
-          <a:bodyPr wrap="square" lIns="0" tIns="0" rIns="0" bIns="0" rtlCol="0" anchor="ctr"/>
-          <a:lstStyle/>
-          <a:p>
-            <a:pPr algn="ctr" indent="0" marL="0">
-              <a:buNone/>
-            </a:pPr>
-            <a:r>
-              <a:rPr lang="en-US" sz="1100" b="1" dirty="0">
-                <a:solidFill>
-                  <a:srgbClr val="FFFFFF"/>
-                </a:solidFill>
-                <a:latin typeface="Arial" pitchFamily="34" charset="0"/>
-                <a:ea typeface="Arial" pitchFamily="34" charset="-122"/>
-                <a:cs typeface="Arial" pitchFamily="34" charset="-120"/>
-              </a:rPr>
-              <a:t>Q2 · Oct–Dec</a:t>
-            </a:r>
-            <a:endParaRPr lang="en-US" sz="1100" dirty="0"/>
-          </a:p>
-        </p:txBody>
-      </p:sp>
-      <p:sp>
-        <p:nvSpPr>
-          <p:cNvPr id="6" name="Text 4"/>
-          <p:cNvSpPr txBox="1"/>
-          <p:nvPr/>
-        </p:nvSpPr>
-        <p:spPr>
-          <a:xfrm>
-            <a:off x="2743200" y="1371600"/>
-            <a:ext cx="2916936" cy="365760"/>
-          </a:xfrm>
-          <a:prstGeom prst="rect">
-            <a:avLst/>
-          </a:prstGeom>
-          <a:noFill/>
-          <a:ln/>
-        </p:spPr>
-        <p:txBody>
-          <a:bodyPr wrap="square" lIns="0" tIns="0" rIns="0" bIns="0" rtlCol="0" anchor="ctr"/>
-          <a:lstStyle/>
-          <a:p>
-            <a:pPr indent="0" marL="0">
-              <a:buNone/>
-            </a:pPr>
-            <a:r>
-              <a:rPr lang="en-US" sz="1700" b="1" dirty="0">
-                <a:solidFill>
-                  <a:srgbClr val="22205D"/>
-                </a:solidFill>
-                <a:latin typeface="Arial" pitchFamily="34" charset="0"/>
-                <a:ea typeface="Arial" pitchFamily="34" charset="-122"/>
-                <a:cs typeface="Arial" pitchFamily="34" charset="-120"/>
-              </a:rPr>
-              <a:t>Launch and support</a:t>
-            </a:r>
-            <a:endParaRPr lang="en-US" sz="1700" dirty="0"/>
-          </a:p>
-        </p:txBody>
-      </p:sp>
-      <p:sp>
-        <p:nvSpPr>
-          <p:cNvPr id="7" name="Text 5"/>
-          <p:cNvSpPr txBox="1"/>
-          <p:nvPr/>
-        </p:nvSpPr>
-        <p:spPr>
-          <a:xfrm>
-            <a:off x="822960" y="1965960"/>
-            <a:ext cx="1097280" cy="502920"/>
-          </a:xfrm>
-          <a:prstGeom prst="rect">
-            <a:avLst/>
-          </a:prstGeom>
-          <a:noFill/>
-          <a:ln/>
-        </p:spPr>
-        <p:txBody>
-          <a:bodyPr wrap="square" lIns="0" tIns="0" rIns="0" bIns="0" rtlCol="0" anchor="ctr"/>
-          <a:lstStyle/>
-          <a:p>
-            <a:pPr indent="0" marL="0">
-              <a:buNone/>
-            </a:pPr>
-            <a:r>
-              <a:rPr lang="en-US" sz="1100" b="1" dirty="0">
-                <a:solidFill>
-                  <a:srgbClr val="0098D8"/>
-                </a:solidFill>
-                <a:latin typeface="Arial" pitchFamily="34" charset="0"/>
-                <a:ea typeface="Arial" pitchFamily="34" charset="-122"/>
-                <a:cs typeface="Arial" pitchFamily="34" charset="-120"/>
-              </a:rPr>
-              <a:t>By Oct 14</a:t>
-            </a:r>
-            <a:endParaRPr lang="en-US" sz="1100" dirty="0"/>
-          </a:p>
-        </p:txBody>
-      </p:sp>
-      <p:sp>
-        <p:nvSpPr>
-          <p:cNvPr id="8" name="Text 6"/>
-          <p:cNvSpPr txBox="1"/>
-          <p:nvPr/>
-        </p:nvSpPr>
-        <p:spPr>
-          <a:xfrm>
-            <a:off x="1965960" y="1965960"/>
-            <a:ext cx="3694176" cy="502920"/>
-          </a:xfrm>
-          <a:prstGeom prst="rect">
-            <a:avLst/>
-          </a:prstGeom>
-          <a:noFill/>
-          <a:ln/>
-        </p:spPr>
-        <p:txBody>
-          <a:bodyPr wrap="square" lIns="0" tIns="0" rIns="0" bIns="0" rtlCol="0" anchor="ctr"/>
-          <a:lstStyle/>
-          <a:p>
-            <a:pPr indent="0" marL="0">
-              <a:buNone/>
-            </a:pPr>
-            <a:r>
-              <a:rPr lang="en-US" sz="1250" dirty="0">
-                <a:solidFill>
-                  <a:srgbClr val="22205D"/>
-                </a:solidFill>
-                <a:latin typeface="Arial" pitchFamily="34" charset="0"/>
-                <a:ea typeface="Arial" pitchFamily="34" charset="-122"/>
-                <a:cs typeface="Arial" pitchFamily="34" charset="-120"/>
-              </a:rPr>
-              <a:t>Both tools live: AI Security and Data &amp; AI Readiness</a:t>
-            </a:r>
-            <a:endParaRPr lang="en-US" sz="1250" dirty="0"/>
-          </a:p>
-        </p:txBody>
-      </p:sp>
-      <p:sp>
-        <p:nvSpPr>
-          <p:cNvPr id="9" name="Text 7"/>
-          <p:cNvSpPr txBox="1"/>
-          <p:nvPr/>
-        </p:nvSpPr>
-        <p:spPr>
-          <a:xfrm>
-            <a:off x="822960" y="2560320"/>
-            <a:ext cx="1097280" cy="502920"/>
-          </a:xfrm>
-          <a:prstGeom prst="rect">
-            <a:avLst/>
-          </a:prstGeom>
-          <a:noFill/>
-          <a:ln/>
-        </p:spPr>
-        <p:txBody>
-          <a:bodyPr wrap="square" lIns="0" tIns="0" rIns="0" bIns="0" rtlCol="0" anchor="ctr"/>
-          <a:lstStyle/>
-          <a:p>
-            <a:pPr indent="0" marL="0">
-              <a:buNone/>
-            </a:pPr>
-            <a:r>
-              <a:rPr lang="en-US" sz="1100" b="1" dirty="0">
-                <a:solidFill>
-                  <a:srgbClr val="0098D8"/>
-                </a:solidFill>
-                <a:latin typeface="Arial" pitchFamily="34" charset="0"/>
-                <a:ea typeface="Arial" pitchFamily="34" charset="-122"/>
-                <a:cs typeface="Arial" pitchFamily="34" charset="-120"/>
-              </a:rPr>
-              <a:t>Oct</a:t>
-            </a:r>
-            <a:endParaRPr lang="en-US" sz="1100" dirty="0"/>
-          </a:p>
-        </p:txBody>
-      </p:sp>
-      <p:sp>
-        <p:nvSpPr>
-          <p:cNvPr id="10" name="Text 8"/>
-          <p:cNvSpPr txBox="1"/>
-          <p:nvPr/>
-        </p:nvSpPr>
-        <p:spPr>
-          <a:xfrm>
-            <a:off x="1965960" y="2560320"/>
-            <a:ext cx="3694176" cy="502920"/>
-          </a:xfrm>
-          <a:prstGeom prst="rect">
-            <a:avLst/>
-          </a:prstGeom>
-          <a:noFill/>
-          <a:ln/>
-        </p:spPr>
-        <p:txBody>
-          <a:bodyPr wrap="square" lIns="0" tIns="0" rIns="0" bIns="0" rtlCol="0" anchor="ctr"/>
-          <a:lstStyle/>
-          <a:p>
-            <a:pPr indent="0" marL="0">
-              <a:buNone/>
-            </a:pPr>
-            <a:r>
-              <a:rPr lang="en-US" sz="1250" dirty="0">
-                <a:solidFill>
-                  <a:srgbClr val="22205D"/>
-                </a:solidFill>
-                <a:latin typeface="Arial" pitchFamily="34" charset="0"/>
-                <a:ea typeface="Arial" pitchFamily="34" charset="-122"/>
-                <a:cs typeface="Arial" pitchFamily="34" charset="-120"/>
-              </a:rPr>
-              <a:t>HR brand video out. Services ads start (if approved)</a:t>
-            </a:r>
-            <a:endParaRPr lang="en-US" sz="1250" dirty="0"/>
-          </a:p>
-        </p:txBody>
-      </p:sp>
-      <p:sp>
-        <p:nvSpPr>
-          <p:cNvPr id="11" name="Text 9"/>
-          <p:cNvSpPr txBox="1"/>
-          <p:nvPr/>
-        </p:nvSpPr>
-        <p:spPr>
-          <a:xfrm>
-            <a:off x="822960" y="3154680"/>
-            <a:ext cx="1097280" cy="502920"/>
-          </a:xfrm>
-          <a:prstGeom prst="rect">
-            <a:avLst/>
-          </a:prstGeom>
-          <a:noFill/>
-          <a:ln/>
-        </p:spPr>
-        <p:txBody>
-          <a:bodyPr wrap="square" lIns="0" tIns="0" rIns="0" bIns="0" rtlCol="0" anchor="ctr"/>
-          <a:lstStyle/>
-          <a:p>
-            <a:pPr indent="0" marL="0">
-              <a:buNone/>
-            </a:pPr>
-            <a:r>
-              <a:rPr lang="en-US" sz="1100" b="1" dirty="0">
-                <a:solidFill>
-                  <a:srgbClr val="0098D8"/>
-                </a:solidFill>
-                <a:latin typeface="Arial" pitchFamily="34" charset="0"/>
-                <a:ea typeface="Arial" pitchFamily="34" charset="-122"/>
-                <a:cs typeface="Arial" pitchFamily="34" charset="-120"/>
-              </a:rPr>
-              <a:t>Oct–Dec</a:t>
-            </a:r>
-            <a:endParaRPr lang="en-US" sz="1100" dirty="0"/>
-          </a:p>
-        </p:txBody>
-      </p:sp>
-      <p:sp>
-        <p:nvSpPr>
-          <p:cNvPr id="12" name="Text 10"/>
-          <p:cNvSpPr txBox="1"/>
-          <p:nvPr/>
-        </p:nvSpPr>
-        <p:spPr>
-          <a:xfrm>
-            <a:off x="1965960" y="3154680"/>
-            <a:ext cx="3694176" cy="502920"/>
-          </a:xfrm>
-          <a:prstGeom prst="rect">
-            <a:avLst/>
-          </a:prstGeom>
-          <a:noFill/>
-          <a:ln/>
-        </p:spPr>
-        <p:txBody>
-          <a:bodyPr wrap="square" lIns="0" tIns="0" rIns="0" bIns="0" rtlCol="0" anchor="ctr"/>
-          <a:lstStyle/>
-          <a:p>
-            <a:pPr indent="0" marL="0">
-              <a:buNone/>
-            </a:pPr>
-            <a:r>
-              <a:rPr lang="en-US" sz="1250" dirty="0">
-                <a:solidFill>
-                  <a:srgbClr val="22205D"/>
-                </a:solidFill>
-                <a:latin typeface="Arial" pitchFamily="34" charset="0"/>
-                <a:ea typeface="Arial" pitchFamily="34" charset="-122"/>
-                <a:cs typeface="Arial" pitchFamily="34" charset="-120"/>
-              </a:rPr>
-              <a:t>Alternate weeks: update existing pages / publish new content</a:t>
-            </a:r>
-            <a:endParaRPr lang="en-US" sz="1250" dirty="0"/>
-          </a:p>
-        </p:txBody>
-      </p:sp>
-      <p:sp>
-        <p:nvSpPr>
-          <p:cNvPr id="13" name="Text 11"/>
-          <p:cNvSpPr txBox="1"/>
-          <p:nvPr/>
-        </p:nvSpPr>
-        <p:spPr>
-          <a:xfrm>
-            <a:off x="822960" y="3749040"/>
-            <a:ext cx="1097280" cy="502920"/>
-          </a:xfrm>
-          <a:prstGeom prst="rect">
-            <a:avLst/>
-          </a:prstGeom>
-          <a:noFill/>
-          <a:ln/>
-        </p:spPr>
-        <p:txBody>
-          <a:bodyPr wrap="square" lIns="0" tIns="0" rIns="0" bIns="0" rtlCol="0" anchor="ctr"/>
-          <a:lstStyle/>
-          <a:p>
-            <a:pPr indent="0" marL="0">
-              <a:buNone/>
-            </a:pPr>
-            <a:r>
-              <a:rPr lang="en-US" sz="1100" b="1" dirty="0">
-                <a:solidFill>
-                  <a:srgbClr val="0098D8"/>
-                </a:solidFill>
-                <a:latin typeface="Arial" pitchFamily="34" charset="0"/>
-                <a:ea typeface="Arial" pitchFamily="34" charset="-122"/>
-                <a:cs typeface="Arial" pitchFamily="34" charset="-120"/>
-              </a:rPr>
-              <a:t>Nov</a:t>
-            </a:r>
-            <a:endParaRPr lang="en-US" sz="1100" dirty="0"/>
-          </a:p>
-        </p:txBody>
-      </p:sp>
-      <p:sp>
-        <p:nvSpPr>
-          <p:cNvPr id="14" name="Text 12"/>
-          <p:cNvSpPr txBox="1"/>
-          <p:nvPr/>
-        </p:nvSpPr>
-        <p:spPr>
-          <a:xfrm>
-            <a:off x="1965960" y="3749040"/>
-            <a:ext cx="3694176" cy="502920"/>
-          </a:xfrm>
-          <a:prstGeom prst="rect">
-            <a:avLst/>
-          </a:prstGeom>
-          <a:noFill/>
-          <a:ln/>
-        </p:spPr>
-        <p:txBody>
-          <a:bodyPr wrap="square" lIns="0" tIns="0" rIns="0" bIns="0" rtlCol="0" anchor="ctr"/>
-          <a:lstStyle/>
-          <a:p>
-            <a:pPr indent="0" marL="0">
-              <a:buNone/>
-            </a:pPr>
-            <a:r>
-              <a:rPr lang="en-US" sz="1250" dirty="0">
-                <a:solidFill>
-                  <a:srgbClr val="22205D"/>
-                </a:solidFill>
-                <a:latin typeface="Arial" pitchFamily="34" charset="0"/>
-                <a:ea typeface="Arial" pitchFamily="34" charset="-122"/>
-                <a:cs typeface="Arial" pitchFamily="34" charset="-120"/>
-              </a:rPr>
-              <a:t>Service group pages and Mining page live</a:t>
-            </a:r>
-            <a:endParaRPr lang="en-US" sz="1250" dirty="0"/>
-          </a:p>
-        </p:txBody>
-      </p:sp>
-      <p:sp>
-        <p:nvSpPr>
-          <p:cNvPr id="15" name="Text 13"/>
-          <p:cNvSpPr txBox="1"/>
-          <p:nvPr/>
-        </p:nvSpPr>
-        <p:spPr>
-          <a:xfrm>
-            <a:off x="822960" y="4343400"/>
-            <a:ext cx="1097280" cy="502920"/>
-          </a:xfrm>
-          <a:prstGeom prst="rect">
-            <a:avLst/>
-          </a:prstGeom>
-          <a:noFill/>
-          <a:ln/>
-        </p:spPr>
-        <p:txBody>
-          <a:bodyPr wrap="square" lIns="0" tIns="0" rIns="0" bIns="0" rtlCol="0" anchor="ctr"/>
-          <a:lstStyle/>
-          <a:p>
-            <a:pPr indent="0" marL="0">
-              <a:buNone/>
-            </a:pPr>
-            <a:r>
-              <a:rPr lang="en-US" sz="1100" b="1" dirty="0">
-                <a:solidFill>
-                  <a:srgbClr val="0098D8"/>
-                </a:solidFill>
-                <a:latin typeface="Arial" pitchFamily="34" charset="0"/>
-                <a:ea typeface="Arial" pitchFamily="34" charset="-122"/>
-                <a:cs typeface="Arial" pitchFamily="34" charset="-120"/>
-              </a:rPr>
-              <a:t>As needed</a:t>
-            </a:r>
-            <a:endParaRPr lang="en-US" sz="1100" dirty="0"/>
-          </a:p>
-        </p:txBody>
-      </p:sp>
-      <p:sp>
-        <p:nvSpPr>
-          <p:cNvPr id="16" name="Text 14"/>
-          <p:cNvSpPr txBox="1"/>
-          <p:nvPr/>
-        </p:nvSpPr>
-        <p:spPr>
-          <a:xfrm>
-            <a:off x="1965960" y="4343400"/>
-            <a:ext cx="3694176" cy="502920"/>
-          </a:xfrm>
-          <a:prstGeom prst="rect">
-            <a:avLst/>
-          </a:prstGeom>
-          <a:noFill/>
-          <a:ln/>
-        </p:spPr>
-        <p:txBody>
-          <a:bodyPr wrap="square" lIns="0" tIns="0" rIns="0" bIns="0" rtlCol="0" anchor="ctr"/>
-          <a:lstStyle/>
-          <a:p>
-            <a:pPr indent="0" marL="0">
-              <a:buNone/>
-            </a:pPr>
-            <a:r>
-              <a:rPr lang="en-US" sz="1250" dirty="0">
-                <a:solidFill>
-                  <a:srgbClr val="22205D"/>
-                </a:solidFill>
-                <a:latin typeface="Arial" pitchFamily="34" charset="0"/>
-                <a:ea typeface="Arial" pitchFamily="34" charset="-122"/>
-                <a:cs typeface="Arial" pitchFamily="34" charset="-120"/>
-              </a:rPr>
-              <a:t>Event collateral for sales: deck, one-pagers, case studies</a:t>
-            </a:r>
-            <a:endParaRPr lang="en-US" sz="1250" dirty="0"/>
-          </a:p>
-        </p:txBody>
-      </p:sp>
-      <p:sp>
-        <p:nvSpPr>
-          <p:cNvPr id="17" name="Text 15"/>
-          <p:cNvSpPr txBox="1"/>
-          <p:nvPr/>
-        </p:nvSpPr>
-        <p:spPr>
-          <a:xfrm>
-            <a:off x="822960" y="4937760"/>
-            <a:ext cx="1097280" cy="502920"/>
-          </a:xfrm>
-          <a:prstGeom prst="rect">
-            <a:avLst/>
-          </a:prstGeom>
-          <a:noFill/>
-          <a:ln/>
-        </p:spPr>
-        <p:txBody>
-          <a:bodyPr wrap="square" lIns="0" tIns="0" rIns="0" bIns="0" rtlCol="0" anchor="ctr"/>
-          <a:lstStyle/>
-          <a:p>
-            <a:pPr indent="0" marL="0">
-              <a:buNone/>
-            </a:pPr>
-            <a:r>
-              <a:rPr lang="en-US" sz="1100" b="1" dirty="0">
-                <a:solidFill>
-                  <a:srgbClr val="0098D8"/>
-                </a:solidFill>
-                <a:latin typeface="Arial" pitchFamily="34" charset="0"/>
-                <a:ea typeface="Arial" pitchFamily="34" charset="-122"/>
-                <a:cs typeface="Arial" pitchFamily="34" charset="-120"/>
-              </a:rPr>
-              <a:t>If needed</a:t>
-            </a:r>
-            <a:endParaRPr lang="en-US" sz="1100" dirty="0"/>
-          </a:p>
-        </p:txBody>
-      </p:sp>
-      <p:sp>
-        <p:nvSpPr>
-          <p:cNvPr id="18" name="Text 16"/>
-          <p:cNvSpPr txBox="1"/>
-          <p:nvPr/>
-        </p:nvSpPr>
-        <p:spPr>
-          <a:xfrm>
-            <a:off x="1965960" y="4937760"/>
-            <a:ext cx="3694176" cy="502920"/>
-          </a:xfrm>
-          <a:prstGeom prst="rect">
-            <a:avLst/>
-          </a:prstGeom>
-          <a:noFill/>
-          <a:ln/>
-        </p:spPr>
-        <p:txBody>
-          <a:bodyPr wrap="square" lIns="0" tIns="0" rIns="0" bIns="0" rtlCol="0" anchor="ctr"/>
-          <a:lstStyle/>
-          <a:p>
-            <a:pPr indent="0" marL="0">
-              <a:buNone/>
-            </a:pPr>
-            <a:r>
-              <a:rPr lang="en-US" sz="1250" dirty="0">
-                <a:solidFill>
-                  <a:srgbClr val="22205D"/>
-                </a:solidFill>
-                <a:latin typeface="Arial" pitchFamily="34" charset="0"/>
-                <a:ea typeface="Arial" pitchFamily="34" charset="-122"/>
-                <a:cs typeface="Arial" pitchFamily="34" charset="-120"/>
-              </a:rPr>
-              <a:t>Mobbin for Rafay if his client projects reach 4–5</a:t>
-            </a:r>
-            <a:endParaRPr lang="en-US" sz="1250" dirty="0"/>
-          </a:p>
-        </p:txBody>
-      </p:sp>
-      <p:sp>
-        <p:nvSpPr>
-          <p:cNvPr id="19" name="Shape 17"/>
-          <p:cNvSpPr/>
-          <p:nvPr/>
-        </p:nvSpPr>
-        <p:spPr>
-          <a:xfrm>
-            <a:off x="6254496" y="1143000"/>
-            <a:ext cx="5385816" cy="4526280"/>
-          </a:xfrm>
-          <a:prstGeom prst="roundRect">
-            <a:avLst>
-              <a:gd name="adj" fmla="val 1616"/>
-            </a:avLst>
-          </a:prstGeom>
-          <a:solidFill>
-            <a:srgbClr val="F4F6FB"/>
-          </a:solidFill>
-          <a:ln w="9525">
-            <a:solidFill>
-              <a:srgbClr val="E6E6E6"/>
-            </a:solidFill>
-            <a:prstDash val="solid"/>
-          </a:ln>
-        </p:spPr>
-      </p:sp>
-      <p:sp>
-        <p:nvSpPr>
-          <p:cNvPr id="20" name="Shape 18"/>
-          <p:cNvSpPr/>
-          <p:nvPr/>
-        </p:nvSpPr>
-        <p:spPr>
-          <a:xfrm>
-            <a:off x="6528816" y="1371600"/>
-            <a:ext cx="1737360" cy="365760"/>
-          </a:xfrm>
-          <a:prstGeom prst="roundRect">
-            <a:avLst>
-              <a:gd name="adj" fmla="val 17500"/>
-            </a:avLst>
-          </a:prstGeom>
-          <a:solidFill>
-            <a:srgbClr val="0061F6"/>
-          </a:solidFill>
-          <a:ln w="12700">
-            <a:solidFill>
-              <a:srgbClr val="0061F6"/>
-            </a:solidFill>
-            <a:prstDash val="solid"/>
-          </a:ln>
-        </p:spPr>
-      </p:sp>
-      <p:sp>
-        <p:nvSpPr>
-          <p:cNvPr id="21" name="Text 19"/>
-          <p:cNvSpPr txBox="1"/>
-          <p:nvPr/>
-        </p:nvSpPr>
-        <p:spPr>
-          <a:xfrm>
-            <a:off x="6528816" y="1371600"/>
-            <a:ext cx="1737360" cy="365760"/>
-          </a:xfrm>
-          <a:prstGeom prst="rect">
-            <a:avLst/>
-          </a:prstGeom>
-          <a:noFill/>
-          <a:ln/>
-        </p:spPr>
-        <p:txBody>
-          <a:bodyPr wrap="square" lIns="0" tIns="0" rIns="0" bIns="0" rtlCol="0" anchor="ctr"/>
-          <a:lstStyle/>
-          <a:p>
-            <a:pPr algn="ctr" indent="0" marL="0">
-              <a:buNone/>
-            </a:pPr>
-            <a:r>
-              <a:rPr lang="en-US" sz="1100" b="1" dirty="0">
-                <a:solidFill>
-                  <a:srgbClr val="FFFFFF"/>
-                </a:solidFill>
-                <a:latin typeface="Arial" pitchFamily="34" charset="0"/>
-                <a:ea typeface="Arial" pitchFamily="34" charset="-122"/>
-                <a:cs typeface="Arial" pitchFamily="34" charset="-120"/>
-              </a:rPr>
-              <a:t>Q3 · Jan–Mar</a:t>
-            </a:r>
-            <a:endParaRPr lang="en-US" sz="1100" dirty="0"/>
-          </a:p>
-        </p:txBody>
-      </p:sp>
-      <p:sp>
-        <p:nvSpPr>
-          <p:cNvPr id="22" name="Text 20"/>
-          <p:cNvSpPr txBox="1"/>
-          <p:nvPr/>
-        </p:nvSpPr>
-        <p:spPr>
-          <a:xfrm>
-            <a:off x="8449056" y="1371600"/>
-            <a:ext cx="2916936" cy="365760"/>
-          </a:xfrm>
-          <a:prstGeom prst="rect">
-            <a:avLst/>
-          </a:prstGeom>
-          <a:noFill/>
-          <a:ln/>
-        </p:spPr>
-        <p:txBody>
-          <a:bodyPr wrap="square" lIns="0" tIns="0" rIns="0" bIns="0" rtlCol="0" anchor="ctr"/>
-          <a:lstStyle/>
-          <a:p>
-            <a:pPr indent="0" marL="0">
-              <a:buNone/>
-            </a:pPr>
-            <a:r>
-              <a:rPr lang="en-US" sz="1700" b="1" dirty="0">
-                <a:solidFill>
-                  <a:srgbClr val="0061F6"/>
-                </a:solidFill>
-                <a:latin typeface="Arial" pitchFamily="34" charset="0"/>
-                <a:ea typeface="Arial" pitchFamily="34" charset="-122"/>
-                <a:cs typeface="Arial" pitchFamily="34" charset="-120"/>
-              </a:rPr>
-              <a:t>Evaluate and decide</a:t>
-            </a:r>
-            <a:endParaRPr lang="en-US" sz="1700" dirty="0"/>
-          </a:p>
-        </p:txBody>
-      </p:sp>
-      <p:sp>
-        <p:nvSpPr>
-          <p:cNvPr id="23" name="Text 21"/>
-          <p:cNvSpPr txBox="1"/>
-          <p:nvPr/>
-        </p:nvSpPr>
-        <p:spPr>
-          <a:xfrm>
-            <a:off x="6528816" y="1965960"/>
-            <a:ext cx="1097280" cy="502920"/>
-          </a:xfrm>
-          <a:prstGeom prst="rect">
-            <a:avLst/>
-          </a:prstGeom>
-          <a:noFill/>
-          <a:ln/>
-        </p:spPr>
-        <p:txBody>
-          <a:bodyPr wrap="square" lIns="0" tIns="0" rIns="0" bIns="0" rtlCol="0" anchor="ctr"/>
-          <a:lstStyle/>
-          <a:p>
-            <a:pPr indent="0" marL="0">
-              <a:buNone/>
-            </a:pPr>
-            <a:r>
-              <a:rPr lang="en-US" sz="1100" b="1" dirty="0">
-                <a:solidFill>
-                  <a:srgbClr val="0098D8"/>
-                </a:solidFill>
-                <a:latin typeface="Arial" pitchFamily="34" charset="0"/>
-                <a:ea typeface="Arial" pitchFamily="34" charset="-122"/>
-                <a:cs typeface="Arial" pitchFamily="34" charset="-120"/>
-              </a:rPr>
-              <a:t>Mid-Jan</a:t>
-            </a:r>
-            <a:endParaRPr lang="en-US" sz="1100" dirty="0"/>
-          </a:p>
-        </p:txBody>
-      </p:sp>
-      <p:sp>
-        <p:nvSpPr>
-          <p:cNvPr id="24" name="Text 22"/>
-          <p:cNvSpPr txBox="1"/>
-          <p:nvPr/>
-        </p:nvSpPr>
-        <p:spPr>
-          <a:xfrm>
-            <a:off x="7671816" y="1965960"/>
-            <a:ext cx="3694176" cy="502920"/>
-          </a:xfrm>
-          <a:prstGeom prst="rect">
-            <a:avLst/>
-          </a:prstGeom>
-          <a:noFill/>
-          <a:ln/>
-        </p:spPr>
-        <p:txBody>
-          <a:bodyPr wrap="square" lIns="0" tIns="0" rIns="0" bIns="0" rtlCol="0" anchor="ctr"/>
-          <a:lstStyle/>
-          <a:p>
-            <a:pPr indent="0" marL="0">
-              <a:buNone/>
-            </a:pPr>
-            <a:r>
-              <a:rPr lang="en-US" sz="1250" dirty="0">
-                <a:solidFill>
-                  <a:srgbClr val="22205D"/>
-                </a:solidFill>
-                <a:latin typeface="Arial" pitchFamily="34" charset="0"/>
-                <a:ea typeface="Arial" pitchFamily="34" charset="-122"/>
-                <a:cs typeface="Arial" pitchFamily="34" charset="-120"/>
-              </a:rPr>
-              <a:t>Review 3 months of tool data: completions and enquiries</a:t>
-            </a:r>
-            <a:endParaRPr lang="en-US" sz="1250" dirty="0"/>
-          </a:p>
-        </p:txBody>
-      </p:sp>
-      <p:sp>
-        <p:nvSpPr>
-          <p:cNvPr id="25" name="Text 23"/>
-          <p:cNvSpPr txBox="1"/>
-          <p:nvPr/>
-        </p:nvSpPr>
-        <p:spPr>
-          <a:xfrm>
-            <a:off x="6528816" y="2560320"/>
-            <a:ext cx="1097280" cy="502920"/>
-          </a:xfrm>
-          <a:prstGeom prst="rect">
-            <a:avLst/>
-          </a:prstGeom>
-          <a:noFill/>
-          <a:ln/>
-        </p:spPr>
-        <p:txBody>
-          <a:bodyPr wrap="square" lIns="0" tIns="0" rIns="0" bIns="0" rtlCol="0" anchor="ctr"/>
-          <a:lstStyle/>
-          <a:p>
-            <a:pPr indent="0" marL="0">
-              <a:buNone/>
-            </a:pPr>
-            <a:r>
-              <a:rPr lang="en-US" sz="1100" b="1" dirty="0">
-                <a:solidFill>
-                  <a:srgbClr val="0098D8"/>
-                </a:solidFill>
-                <a:latin typeface="Arial" pitchFamily="34" charset="0"/>
-                <a:ea typeface="Arial" pitchFamily="34" charset="-122"/>
-                <a:cs typeface="Arial" pitchFamily="34" charset="-120"/>
-              </a:rPr>
-              <a:t>Jan</a:t>
-            </a:r>
-            <a:endParaRPr lang="en-US" sz="1100" dirty="0"/>
-          </a:p>
-        </p:txBody>
-      </p:sp>
-      <p:sp>
-        <p:nvSpPr>
-          <p:cNvPr id="26" name="Text 24"/>
-          <p:cNvSpPr txBox="1"/>
-          <p:nvPr/>
-        </p:nvSpPr>
-        <p:spPr>
-          <a:xfrm>
-            <a:off x="7671816" y="2560320"/>
-            <a:ext cx="3694176" cy="502920"/>
-          </a:xfrm>
-          <a:prstGeom prst="rect">
-            <a:avLst/>
-          </a:prstGeom>
-          <a:noFill/>
-          <a:ln/>
-        </p:spPr>
-        <p:txBody>
-          <a:bodyPr wrap="square" lIns="0" tIns="0" rIns="0" bIns="0" rtlCol="0" anchor="ctr"/>
-          <a:lstStyle/>
-          <a:p>
-            <a:pPr indent="0" marL="0">
-              <a:buNone/>
-            </a:pPr>
-            <a:r>
-              <a:rPr lang="en-US" sz="1250" dirty="0">
-                <a:solidFill>
-                  <a:srgbClr val="22205D"/>
-                </a:solidFill>
-                <a:latin typeface="Arial" pitchFamily="34" charset="0"/>
-                <a:ea typeface="Arial" pitchFamily="34" charset="-122"/>
-                <a:cs typeface="Arial" pitchFamily="34" charset="-120"/>
-              </a:rPr>
-              <a:t>Review ad results: keep, scale or stop</a:t>
-            </a:r>
-            <a:endParaRPr lang="en-US" sz="1250" dirty="0"/>
-          </a:p>
-        </p:txBody>
-      </p:sp>
-      <p:sp>
-        <p:nvSpPr>
-          <p:cNvPr id="27" name="Text 25"/>
-          <p:cNvSpPr txBox="1"/>
-          <p:nvPr/>
-        </p:nvSpPr>
-        <p:spPr>
-          <a:xfrm>
-            <a:off x="6528816" y="3154680"/>
-            <a:ext cx="1097280" cy="502920"/>
-          </a:xfrm>
-          <a:prstGeom prst="rect">
-            <a:avLst/>
-          </a:prstGeom>
-          <a:noFill/>
-          <a:ln/>
-        </p:spPr>
-        <p:txBody>
-          <a:bodyPr wrap="square" lIns="0" tIns="0" rIns="0" bIns="0" rtlCol="0" anchor="ctr"/>
-          <a:lstStyle/>
-          <a:p>
-            <a:pPr indent="0" marL="0">
-              <a:buNone/>
-            </a:pPr>
-            <a:r>
-              <a:rPr lang="en-US" sz="1100" b="1" dirty="0">
-                <a:solidFill>
-                  <a:srgbClr val="0098D8"/>
-                </a:solidFill>
-                <a:latin typeface="Arial" pitchFamily="34" charset="0"/>
-                <a:ea typeface="Arial" pitchFamily="34" charset="-122"/>
-                <a:cs typeface="Arial" pitchFamily="34" charset="-120"/>
-              </a:rPr>
-              <a:t>Feb</a:t>
-            </a:r>
-            <a:endParaRPr lang="en-US" sz="1100" dirty="0"/>
-          </a:p>
-        </p:txBody>
-      </p:sp>
-      <p:sp>
-        <p:nvSpPr>
-          <p:cNvPr id="28" name="Text 26"/>
-          <p:cNvSpPr txBox="1"/>
-          <p:nvPr/>
-        </p:nvSpPr>
-        <p:spPr>
-          <a:xfrm>
-            <a:off x="7671816" y="3154680"/>
-            <a:ext cx="3694176" cy="502920"/>
-          </a:xfrm>
-          <a:prstGeom prst="rect">
-            <a:avLst/>
-          </a:prstGeom>
-          <a:noFill/>
-          <a:ln/>
-        </p:spPr>
-        <p:txBody>
-          <a:bodyPr wrap="square" lIns="0" tIns="0" rIns="0" bIns="0" rtlCol="0" anchor="ctr"/>
-          <a:lstStyle/>
-          <a:p>
-            <a:pPr indent="0" marL="0">
-              <a:buNone/>
-            </a:pPr>
-            <a:r>
-              <a:rPr lang="en-US" sz="1250" dirty="0">
-                <a:solidFill>
-                  <a:srgbClr val="22205D"/>
-                </a:solidFill>
-                <a:latin typeface="Arial" pitchFamily="34" charset="0"/>
-                <a:ea typeface="Arial" pitchFamily="34" charset="-122"/>
-                <a:cs typeface="Arial" pitchFamily="34" charset="-120"/>
-              </a:rPr>
-              <a:t>Review events: which ones led to meetings</a:t>
-            </a:r>
-            <a:endParaRPr lang="en-US" sz="1250" dirty="0"/>
-          </a:p>
-        </p:txBody>
-      </p:sp>
-      <p:sp>
-        <p:nvSpPr>
-          <p:cNvPr id="29" name="Text 27"/>
-          <p:cNvSpPr txBox="1"/>
-          <p:nvPr/>
-        </p:nvSpPr>
-        <p:spPr>
-          <a:xfrm>
-            <a:off x="6528816" y="3749040"/>
-            <a:ext cx="1097280" cy="502920"/>
-          </a:xfrm>
-          <a:prstGeom prst="rect">
-            <a:avLst/>
-          </a:prstGeom>
-          <a:noFill/>
-          <a:ln/>
-        </p:spPr>
-        <p:txBody>
-          <a:bodyPr wrap="square" lIns="0" tIns="0" rIns="0" bIns="0" rtlCol="0" anchor="ctr"/>
-          <a:lstStyle/>
-          <a:p>
-            <a:pPr indent="0" marL="0">
-              <a:buNone/>
-            </a:pPr>
-            <a:r>
-              <a:rPr lang="en-US" sz="1100" b="1" dirty="0">
-                <a:solidFill>
-                  <a:srgbClr val="0098D8"/>
-                </a:solidFill>
-                <a:latin typeface="Arial" pitchFamily="34" charset="0"/>
-                <a:ea typeface="Arial" pitchFamily="34" charset="-122"/>
-                <a:cs typeface="Arial" pitchFamily="34" charset="-120"/>
-              </a:rPr>
-              <a:t>Feb</a:t>
-            </a:r>
-            <a:endParaRPr lang="en-US" sz="1100" dirty="0"/>
-          </a:p>
-        </p:txBody>
-      </p:sp>
-      <p:sp>
-        <p:nvSpPr>
-          <p:cNvPr id="30" name="Text 28"/>
-          <p:cNvSpPr txBox="1"/>
-          <p:nvPr/>
-        </p:nvSpPr>
-        <p:spPr>
-          <a:xfrm>
-            <a:off x="7671816" y="3749040"/>
-            <a:ext cx="3694176" cy="502920"/>
-          </a:xfrm>
-          <a:prstGeom prst="rect">
-            <a:avLst/>
-          </a:prstGeom>
-          <a:noFill/>
-          <a:ln/>
-        </p:spPr>
-        <p:txBody>
-          <a:bodyPr wrap="square" lIns="0" tIns="0" rIns="0" bIns="0" rtlCol="0" anchor="ctr"/>
-          <a:lstStyle/>
-          <a:p>
-            <a:pPr indent="0" marL="0">
-              <a:buNone/>
-            </a:pPr>
-            <a:r>
-              <a:rPr lang="en-US" sz="1250" dirty="0">
-                <a:solidFill>
-                  <a:srgbClr val="22205D"/>
-                </a:solidFill>
-                <a:latin typeface="Arial" pitchFamily="34" charset="0"/>
-                <a:ea typeface="Arial" pitchFamily="34" charset="-122"/>
-                <a:cs typeface="Arial" pitchFamily="34" charset="-120"/>
-              </a:rPr>
-              <a:t>New case studies, including Kayali / Huda Beauty</a:t>
-            </a:r>
-            <a:endParaRPr lang="en-US" sz="1250" dirty="0"/>
-          </a:p>
-        </p:txBody>
-      </p:sp>
-      <p:sp>
-        <p:nvSpPr>
-          <p:cNvPr id="31" name="Text 29"/>
-          <p:cNvSpPr txBox="1"/>
-          <p:nvPr/>
-        </p:nvSpPr>
-        <p:spPr>
-          <a:xfrm>
-            <a:off x="6528816" y="4343400"/>
-            <a:ext cx="1097280" cy="502920"/>
-          </a:xfrm>
-          <a:prstGeom prst="rect">
-            <a:avLst/>
-          </a:prstGeom>
-          <a:noFill/>
-          <a:ln/>
-        </p:spPr>
-        <p:txBody>
-          <a:bodyPr wrap="square" lIns="0" tIns="0" rIns="0" bIns="0" rtlCol="0" anchor="ctr"/>
-          <a:lstStyle/>
-          <a:p>
-            <a:pPr indent="0" marL="0">
-              <a:buNone/>
-            </a:pPr>
-            <a:r>
-              <a:rPr lang="en-US" sz="1100" b="1" dirty="0">
-                <a:solidFill>
-                  <a:srgbClr val="0098D8"/>
-                </a:solidFill>
-                <a:latin typeface="Arial" pitchFamily="34" charset="0"/>
-                <a:ea typeface="Arial" pitchFamily="34" charset="-122"/>
-                <a:cs typeface="Arial" pitchFamily="34" charset="-120"/>
-              </a:rPr>
-              <a:t>Mar</a:t>
-            </a:r>
-            <a:endParaRPr lang="en-US" sz="1100" dirty="0"/>
-          </a:p>
-        </p:txBody>
-      </p:sp>
-      <p:sp>
-        <p:nvSpPr>
-          <p:cNvPr id="32" name="Text 30"/>
-          <p:cNvSpPr txBox="1"/>
-          <p:nvPr/>
-        </p:nvSpPr>
-        <p:spPr>
-          <a:xfrm>
-            <a:off x="7671816" y="4343400"/>
-            <a:ext cx="3694176" cy="502920"/>
-          </a:xfrm>
-          <a:prstGeom prst="rect">
-            <a:avLst/>
-          </a:prstGeom>
-          <a:noFill/>
-          <a:ln/>
-        </p:spPr>
-        <p:txBody>
-          <a:bodyPr wrap="square" lIns="0" tIns="0" rIns="0" bIns="0" rtlCol="0" anchor="ctr"/>
-          <a:lstStyle/>
-          <a:p>
-            <a:pPr indent="0" marL="0">
-              <a:buNone/>
-            </a:pPr>
-            <a:r>
-              <a:rPr lang="en-US" sz="1250" dirty="0">
-                <a:solidFill>
-                  <a:srgbClr val="22205D"/>
-                </a:solidFill>
-                <a:latin typeface="Arial" pitchFamily="34" charset="0"/>
-                <a:ea typeface="Arial" pitchFamily="34" charset="-122"/>
-                <a:cs typeface="Arial" pitchFamily="34" charset="-120"/>
-              </a:rPr>
-              <a:t>Book Q4 events (LEAP in April, GISEC in May)</a:t>
-            </a:r>
-            <a:endParaRPr lang="en-US" sz="1250" dirty="0"/>
-          </a:p>
-        </p:txBody>
-      </p:sp>
-      <p:sp>
-        <p:nvSpPr>
-          <p:cNvPr id="33" name="Text 31"/>
-          <p:cNvSpPr txBox="1"/>
-          <p:nvPr/>
-        </p:nvSpPr>
-        <p:spPr>
-          <a:xfrm>
-            <a:off x="6528816" y="4937760"/>
-            <a:ext cx="1097280" cy="502920"/>
-          </a:xfrm>
-          <a:prstGeom prst="rect">
-            <a:avLst/>
-          </a:prstGeom>
-          <a:noFill/>
-          <a:ln/>
-        </p:spPr>
-        <p:txBody>
-          <a:bodyPr wrap="square" lIns="0" tIns="0" rIns="0" bIns="0" rtlCol="0" anchor="ctr"/>
-          <a:lstStyle/>
-          <a:p>
-            <a:pPr indent="0" marL="0">
-              <a:buNone/>
-            </a:pPr>
-            <a:r>
-              <a:rPr lang="en-US" sz="1100" b="1" dirty="0">
-                <a:solidFill>
-                  <a:srgbClr val="0098D8"/>
-                </a:solidFill>
-                <a:latin typeface="Arial" pitchFamily="34" charset="0"/>
-                <a:ea typeface="Arial" pitchFamily="34" charset="-122"/>
-                <a:cs typeface="Arial" pitchFamily="34" charset="-120"/>
-              </a:rPr>
-              <a:t>Mar</a:t>
-            </a:r>
-            <a:endParaRPr lang="en-US" sz="1100" dirty="0"/>
-          </a:p>
-        </p:txBody>
-      </p:sp>
-      <p:sp>
-        <p:nvSpPr>
-          <p:cNvPr id="34" name="Text 32"/>
-          <p:cNvSpPr txBox="1"/>
-          <p:nvPr/>
-        </p:nvSpPr>
-        <p:spPr>
-          <a:xfrm>
-            <a:off x="7671816" y="4937760"/>
-            <a:ext cx="3694176" cy="502920"/>
-          </a:xfrm>
-          <a:prstGeom prst="rect">
-            <a:avLst/>
-          </a:prstGeom>
-          <a:noFill/>
-          <a:ln/>
-        </p:spPr>
-        <p:txBody>
-          <a:bodyPr wrap="square" lIns="0" tIns="0" rIns="0" bIns="0" rtlCol="0" anchor="ctr"/>
-          <a:lstStyle/>
-          <a:p>
-            <a:pPr indent="0" marL="0">
-              <a:buNone/>
-            </a:pPr>
-            <a:r>
-              <a:rPr lang="en-US" sz="1250" dirty="0">
-                <a:solidFill>
-                  <a:srgbClr val="22205D"/>
-                </a:solidFill>
-                <a:latin typeface="Arial" pitchFamily="34" charset="0"/>
-                <a:ea typeface="Arial" pitchFamily="34" charset="-122"/>
-                <a:cs typeface="Arial" pitchFamily="34" charset="-120"/>
-              </a:rPr>
-              <a:t>Q3 review and Q4 plan</a:t>
-            </a:r>
-            <a:endParaRPr lang="en-US" sz="1250" dirty="0"/>
-          </a:p>
-        </p:txBody>
-      </p:sp>
-      <p:sp>
-        <p:nvSpPr>
-          <p:cNvPr id="35" name="Text 33"/>
-          <p:cNvSpPr txBox="1"/>
-          <p:nvPr/>
-        </p:nvSpPr>
-        <p:spPr>
-          <a:xfrm>
-            <a:off x="548640" y="5852160"/>
-            <a:ext cx="11091672" cy="548640"/>
-          </a:xfrm>
-          <a:prstGeom prst="rect">
-            <a:avLst/>
-          </a:prstGeom>
-          <a:noFill/>
-          <a:ln/>
-        </p:spPr>
-        <p:txBody>
-          <a:bodyPr wrap="square" lIns="0" tIns="0" rIns="0" bIns="0" rtlCol="0" anchor="ctr"/>
-          <a:lstStyle/>
-          <a:p>
-            <a:pPr indent="0" marL="0">
-              <a:buNone/>
-            </a:pPr>
-            <a:r>
-              <a:rPr lang="en-US" sz="1300" b="1" dirty="0">
-                <a:solidFill>
-                  <a:srgbClr val="22205D"/>
-                </a:solidFill>
-                <a:latin typeface="Arial" pitchFamily="34" charset="0"/>
-                <a:ea typeface="Arial" pitchFamily="34" charset="-122"/>
-                <a:cs typeface="Arial" pitchFamily="34" charset="-120"/>
-              </a:rPr>
-              <a:t>Both quarters: LinkedIn 3 times a week with real faces, case studies and motion content. Technical content with Irfan.</a:t>
-            </a:r>
-            <a:endParaRPr lang="en-US" sz="1300" dirty="0"/>
-          </a:p>
-        </p:txBody>
-      </p:sp>
-    </p:spTree>
-  </p:cSld>
-  <p:clrMapOvr>
-    <a:masterClrMapping/>
-  </p:clrMapOvr>
-</p:sld>
-</file>
-
-<file path=ppt/slides/slide6.xml><?xml version="1.0" encoding="utf-8"?>
-<p:sld xmlns:a="http://schemas.openxmlformats.org/drawingml/2006/main" xmlns:r="http://schemas.openxmlformats.org/officeDocument/2006/relationships" xmlns:p="http://schemas.openxmlformats.org/presentationml/2006/main">
-  <p:cSld name="Slide 6">
-    <p:bg>
-      <p:bgPr>
-        <a:solidFill>
-          <a:srgbClr val="F4F6FB"/>
-        </a:solidFill>
-      </p:bgPr>
-    </p:bg>
-    <p:spTree>
-      <p:nvGrpSpPr>
-        <p:cNvPr id="1" name=""/>
-        <p:cNvGrpSpPr/>
-        <p:nvPr/>
-      </p:nvGrpSpPr>
-      <p:grpSpPr>
-        <a:xfrm>
-          <a:off x="0" y="0"/>
-          <a:ext cx="0" cy="0"/>
-          <a:chOff x="0" y="0"/>
-          <a:chExt cx="0" cy="0"/>
-        </a:xfrm>
-      </p:grpSpPr>
-      <p:sp>
-        <p:nvSpPr>
-          <p:cNvPr id="2" name="Text 0"/>
-          <p:cNvSpPr txBox="1"/>
-          <p:nvPr/>
-        </p:nvSpPr>
-        <p:spPr>
-          <a:xfrm>
-            <a:off x="548640" y="320040"/>
-            <a:ext cx="11091672" cy="594360"/>
-          </a:xfrm>
-          <a:prstGeom prst="rect">
-            <a:avLst/>
-          </a:prstGeom>
-          <a:noFill/>
-          <a:ln/>
-        </p:spPr>
-        <p:txBody>
-          <a:bodyPr wrap="square" lIns="0" tIns="0" rIns="0" bIns="0" rtlCol="0" anchor="ctr"/>
-          <a:lstStyle/>
-          <a:p>
-            <a:pPr indent="0" marL="0">
+            <a:pPr marL="0" indent="0">
               <a:buNone/>
             </a:pPr>
             <a:r>
@@ -7382,7 +4873,7 @@
           <a:bodyPr wrap="square" lIns="0" tIns="0" rIns="0" bIns="0" rtlCol="0" anchor="ctr"/>
           <a:lstStyle/>
           <a:p>
-            <a:pPr indent="0" marL="0">
+            <a:pPr marL="0" indent="0">
               <a:buNone/>
             </a:pPr>
             <a:r>
@@ -7416,18 +4907,48 @@
         </p:nvGraphicFramePr>
         <p:xfrm>
           <a:off x="548640" y="1371600"/>
-          <a:ext cx="11091672" cy="914400"/>
+          <a:ext cx="11091672" cy="4096512"/>
         </p:xfrm>
         <a:graphic>
           <a:graphicData uri="http://schemas.openxmlformats.org/drawingml/2006/table">
             <a:tbl>
               <a:tblPr/>
               <a:tblGrid>
-                <a:gridCol w="2286000"/>
-                <a:gridCol w="2011680"/>
-                <a:gridCol w="1645920"/>
-                <a:gridCol w="1828800"/>
-                <a:gridCol w="3319272"/>
+                <a:gridCol w="2286000">
+                  <a:extLst>
+                    <a:ext uri="{9D8B030D-6E8A-4147-A177-3AD203B41FA5}">
+                      <a16:colId xmlns:a16="http://schemas.microsoft.com/office/drawing/2014/main" val="20000"/>
+                    </a:ext>
+                  </a:extLst>
+                </a:gridCol>
+                <a:gridCol w="2011680">
+                  <a:extLst>
+                    <a:ext uri="{9D8B030D-6E8A-4147-A177-3AD203B41FA5}">
+                      <a16:colId xmlns:a16="http://schemas.microsoft.com/office/drawing/2014/main" val="20001"/>
+                    </a:ext>
+                  </a:extLst>
+                </a:gridCol>
+                <a:gridCol w="1645920">
+                  <a:extLst>
+                    <a:ext uri="{9D8B030D-6E8A-4147-A177-3AD203B41FA5}">
+                      <a16:colId xmlns:a16="http://schemas.microsoft.com/office/drawing/2014/main" val="20002"/>
+                    </a:ext>
+                  </a:extLst>
+                </a:gridCol>
+                <a:gridCol w="1828800">
+                  <a:extLst>
+                    <a:ext uri="{9D8B030D-6E8A-4147-A177-3AD203B41FA5}">
+                      <a16:colId xmlns:a16="http://schemas.microsoft.com/office/drawing/2014/main" val="20003"/>
+                    </a:ext>
+                  </a:extLst>
+                </a:gridCol>
+                <a:gridCol w="3319272">
+                  <a:extLst>
+                    <a:ext uri="{9D8B030D-6E8A-4147-A177-3AD203B41FA5}">
+                      <a16:colId xmlns:a16="http://schemas.microsoft.com/office/drawing/2014/main" val="20004"/>
+                    </a:ext>
+                  </a:extLst>
+                </a:gridCol>
               </a:tblGrid>
               <a:tr h="512064">
                 <a:tc>
@@ -7435,7 +4956,7 @@
                     <a:bodyPr/>
                     <a:lstStyle/>
                     <a:p>
-                      <a:pPr indent="0" marL="0">
+                      <a:pPr marL="0" indent="0">
                         <a:buNone/>
                       </a:pPr>
                       <a:r>
@@ -7503,7 +5024,7 @@
                     <a:bodyPr/>
                     <a:lstStyle/>
                     <a:p>
-                      <a:pPr indent="0" marL="0">
+                      <a:pPr marL="0" indent="0">
                         <a:buNone/>
                       </a:pPr>
                       <a:r>
@@ -7571,7 +5092,7 @@
                     <a:bodyPr/>
                     <a:lstStyle/>
                     <a:p>
-                      <a:pPr indent="0" marL="0">
+                      <a:pPr marL="0" indent="0">
                         <a:buNone/>
                       </a:pPr>
                       <a:r>
@@ -7639,7 +5160,7 @@
                     <a:bodyPr/>
                     <a:lstStyle/>
                     <a:p>
-                      <a:pPr indent="0" marL="0">
+                      <a:pPr marL="0" indent="0">
                         <a:buNone/>
                       </a:pPr>
                       <a:r>
@@ -7707,7 +5228,7 @@
                     <a:bodyPr/>
                     <a:lstStyle/>
                     <a:p>
-                      <a:pPr indent="0" marL="0">
+                      <a:pPr marL="0" indent="0">
                         <a:buNone/>
                       </a:pPr>
                       <a:r>
@@ -7770,6 +5291,11 @@
                     </a:solidFill>
                   </a:tcPr>
                 </a:tc>
+                <a:extLst>
+                  <a:ext uri="{0D108BD9-81ED-4DB2-BD59-A6C34878D82A}">
+                    <a16:rowId xmlns:a16="http://schemas.microsoft.com/office/drawing/2014/main" val="10000"/>
+                  </a:ext>
+                </a:extLst>
               </a:tr>
               <a:tr h="512064">
                 <a:tc>
@@ -7777,7 +5303,7 @@
                     <a:bodyPr/>
                     <a:lstStyle/>
                     <a:p>
-                      <a:pPr indent="0" marL="0">
+                      <a:pPr marL="0" indent="0">
                         <a:buNone/>
                       </a:pPr>
                       <a:r>
@@ -7845,7 +5371,7 @@
                     <a:bodyPr/>
                     <a:lstStyle/>
                     <a:p>
-                      <a:pPr indent="0" marL="0">
+                      <a:pPr marL="0" indent="0">
                         <a:buNone/>
                       </a:pPr>
                       <a:r>
@@ -7913,7 +5439,7 @@
                     <a:bodyPr/>
                     <a:lstStyle/>
                     <a:p>
-                      <a:pPr indent="0" marL="0">
+                      <a:pPr marL="0" indent="0">
                         <a:buNone/>
                       </a:pPr>
                       <a:r>
@@ -7981,7 +5507,7 @@
                     <a:bodyPr/>
                     <a:lstStyle/>
                     <a:p>
-                      <a:pPr indent="0" marL="0">
+                      <a:pPr marL="0" indent="0">
                         <a:buNone/>
                       </a:pPr>
                       <a:r>
@@ -8049,7 +5575,7 @@
                     <a:bodyPr/>
                     <a:lstStyle/>
                     <a:p>
-                      <a:pPr indent="0" marL="0">
+                      <a:pPr marL="0" indent="0">
                         <a:buNone/>
                       </a:pPr>
                       <a:r>
@@ -8112,6 +5638,11 @@
                     </a:solidFill>
                   </a:tcPr>
                 </a:tc>
+                <a:extLst>
+                  <a:ext uri="{0D108BD9-81ED-4DB2-BD59-A6C34878D82A}">
+                    <a16:rowId xmlns:a16="http://schemas.microsoft.com/office/drawing/2014/main" val="10001"/>
+                  </a:ext>
+                </a:extLst>
               </a:tr>
               <a:tr h="512064">
                 <a:tc>
@@ -8119,7 +5650,7 @@
                     <a:bodyPr/>
                     <a:lstStyle/>
                     <a:p>
-                      <a:pPr indent="0" marL="0">
+                      <a:pPr marL="0" indent="0">
                         <a:buNone/>
                       </a:pPr>
                       <a:r>
@@ -8187,7 +5718,7 @@
                     <a:bodyPr/>
                     <a:lstStyle/>
                     <a:p>
-                      <a:pPr indent="0" marL="0">
+                      <a:pPr marL="0" indent="0">
                         <a:buNone/>
                       </a:pPr>
                       <a:r>
@@ -8255,7 +5786,7 @@
                     <a:bodyPr/>
                     <a:lstStyle/>
                     <a:p>
-                      <a:pPr indent="0" marL="0">
+                      <a:pPr marL="0" indent="0">
                         <a:buNone/>
                       </a:pPr>
                       <a:r>
@@ -8323,7 +5854,7 @@
                     <a:bodyPr/>
                     <a:lstStyle/>
                     <a:p>
-                      <a:pPr indent="0" marL="0">
+                      <a:pPr marL="0" indent="0">
                         <a:buNone/>
                       </a:pPr>
                       <a:r>
@@ -8391,7 +5922,7 @@
                     <a:bodyPr/>
                     <a:lstStyle/>
                     <a:p>
-                      <a:pPr indent="0" marL="0">
+                      <a:pPr marL="0" indent="0">
                         <a:buNone/>
                       </a:pPr>
                       <a:r>
@@ -8454,6 +5985,11 @@
                     </a:solidFill>
                   </a:tcPr>
                 </a:tc>
+                <a:extLst>
+                  <a:ext uri="{0D108BD9-81ED-4DB2-BD59-A6C34878D82A}">
+                    <a16:rowId xmlns:a16="http://schemas.microsoft.com/office/drawing/2014/main" val="10002"/>
+                  </a:ext>
+                </a:extLst>
               </a:tr>
               <a:tr h="512064">
                 <a:tc>
@@ -8461,7 +5997,7 @@
                     <a:bodyPr/>
                     <a:lstStyle/>
                     <a:p>
-                      <a:pPr indent="0" marL="0">
+                      <a:pPr marL="0" indent="0">
                         <a:buNone/>
                       </a:pPr>
                       <a:r>
@@ -8529,7 +6065,7 @@
                     <a:bodyPr/>
                     <a:lstStyle/>
                     <a:p>
-                      <a:pPr indent="0" marL="0">
+                      <a:pPr marL="0" indent="0">
                         <a:buNone/>
                       </a:pPr>
                       <a:r>
@@ -8597,7 +6133,7 @@
                     <a:bodyPr/>
                     <a:lstStyle/>
                     <a:p>
-                      <a:pPr indent="0" marL="0">
+                      <a:pPr marL="0" indent="0">
                         <a:buNone/>
                       </a:pPr>
                       <a:r>
@@ -8665,7 +6201,7 @@
                     <a:bodyPr/>
                     <a:lstStyle/>
                     <a:p>
-                      <a:pPr indent="0" marL="0">
+                      <a:pPr marL="0" indent="0">
                         <a:buNone/>
                       </a:pPr>
                       <a:r>
@@ -8733,7 +6269,7 @@
                     <a:bodyPr/>
                     <a:lstStyle/>
                     <a:p>
-                      <a:pPr indent="0" marL="0">
+                      <a:pPr marL="0" indent="0">
                         <a:buNone/>
                       </a:pPr>
                       <a:r>
@@ -8796,6 +6332,11 @@
                     </a:solidFill>
                   </a:tcPr>
                 </a:tc>
+                <a:extLst>
+                  <a:ext uri="{0D108BD9-81ED-4DB2-BD59-A6C34878D82A}">
+                    <a16:rowId xmlns:a16="http://schemas.microsoft.com/office/drawing/2014/main" val="10003"/>
+                  </a:ext>
+                </a:extLst>
               </a:tr>
               <a:tr h="512064">
                 <a:tc>
@@ -8803,7 +6344,7 @@
                     <a:bodyPr/>
                     <a:lstStyle/>
                     <a:p>
-                      <a:pPr indent="0" marL="0">
+                      <a:pPr marL="0" indent="0">
                         <a:buNone/>
                       </a:pPr>
                       <a:r>
@@ -8871,7 +6412,7 @@
                     <a:bodyPr/>
                     <a:lstStyle/>
                     <a:p>
-                      <a:pPr indent="0" marL="0">
+                      <a:pPr marL="0" indent="0">
                         <a:buNone/>
                       </a:pPr>
                       <a:r>
@@ -8939,7 +6480,7 @@
                     <a:bodyPr/>
                     <a:lstStyle/>
                     <a:p>
-                      <a:pPr indent="0" marL="0">
+                      <a:pPr marL="0" indent="0">
                         <a:buNone/>
                       </a:pPr>
                       <a:r>
@@ -9007,7 +6548,7 @@
                     <a:bodyPr/>
                     <a:lstStyle/>
                     <a:p>
-                      <a:pPr indent="0" marL="0">
+                      <a:pPr marL="0" indent="0">
                         <a:buNone/>
                       </a:pPr>
                       <a:r>
@@ -9075,7 +6616,7 @@
                     <a:bodyPr/>
                     <a:lstStyle/>
                     <a:p>
-                      <a:pPr indent="0" marL="0">
+                      <a:pPr marL="0" indent="0">
                         <a:buNone/>
                       </a:pPr>
                       <a:r>
@@ -9138,6 +6679,11 @@
                     </a:solidFill>
                   </a:tcPr>
                 </a:tc>
+                <a:extLst>
+                  <a:ext uri="{0D108BD9-81ED-4DB2-BD59-A6C34878D82A}">
+                    <a16:rowId xmlns:a16="http://schemas.microsoft.com/office/drawing/2014/main" val="10004"/>
+                  </a:ext>
+                </a:extLst>
               </a:tr>
               <a:tr h="512064">
                 <a:tc>
@@ -9145,7 +6691,7 @@
                     <a:bodyPr/>
                     <a:lstStyle/>
                     <a:p>
-                      <a:pPr indent="0" marL="0">
+                      <a:pPr marL="0" indent="0">
                         <a:buNone/>
                       </a:pPr>
                       <a:r>
@@ -9213,7 +6759,7 @@
                     <a:bodyPr/>
                     <a:lstStyle/>
                     <a:p>
-                      <a:pPr indent="0" marL="0">
+                      <a:pPr marL="0" indent="0">
                         <a:buNone/>
                       </a:pPr>
                       <a:r>
@@ -9281,7 +6827,7 @@
                     <a:bodyPr/>
                     <a:lstStyle/>
                     <a:p>
-                      <a:pPr indent="0" marL="0">
+                      <a:pPr marL="0" indent="0">
                         <a:buNone/>
                       </a:pPr>
                       <a:r>
@@ -9349,7 +6895,7 @@
                     <a:bodyPr/>
                     <a:lstStyle/>
                     <a:p>
-                      <a:pPr indent="0" marL="0">
+                      <a:pPr marL="0" indent="0">
                         <a:buNone/>
                       </a:pPr>
                       <a:r>
@@ -9417,7 +6963,7 @@
                     <a:bodyPr/>
                     <a:lstStyle/>
                     <a:p>
-                      <a:pPr indent="0" marL="0">
+                      <a:pPr marL="0" indent="0">
                         <a:buNone/>
                       </a:pPr>
                       <a:r>
@@ -9480,6 +7026,11 @@
                     </a:solidFill>
                   </a:tcPr>
                 </a:tc>
+                <a:extLst>
+                  <a:ext uri="{0D108BD9-81ED-4DB2-BD59-A6C34878D82A}">
+                    <a16:rowId xmlns:a16="http://schemas.microsoft.com/office/drawing/2014/main" val="10005"/>
+                  </a:ext>
+                </a:extLst>
               </a:tr>
               <a:tr h="512064">
                 <a:tc>
@@ -9487,7 +7038,7 @@
                     <a:bodyPr/>
                     <a:lstStyle/>
                     <a:p>
-                      <a:pPr indent="0" marL="0">
+                      <a:pPr marL="0" indent="0">
                         <a:buNone/>
                       </a:pPr>
                       <a:r>
@@ -9555,7 +7106,7 @@
                     <a:bodyPr/>
                     <a:lstStyle/>
                     <a:p>
-                      <a:pPr indent="0" marL="0">
+                      <a:pPr marL="0" indent="0">
                         <a:buNone/>
                       </a:pPr>
                       <a:r>
@@ -9623,7 +7174,7 @@
                     <a:bodyPr/>
                     <a:lstStyle/>
                     <a:p>
-                      <a:pPr indent="0" marL="0">
+                      <a:pPr marL="0" indent="0">
                         <a:buNone/>
                       </a:pPr>
                       <a:r>
@@ -9691,7 +7242,7 @@
                     <a:bodyPr/>
                     <a:lstStyle/>
                     <a:p>
-                      <a:pPr indent="0" marL="0">
+                      <a:pPr marL="0" indent="0">
                         <a:buNone/>
                       </a:pPr>
                       <a:r>
@@ -9759,7 +7310,7 @@
                     <a:bodyPr/>
                     <a:lstStyle/>
                     <a:p>
-                      <a:pPr indent="0" marL="0">
+                      <a:pPr marL="0" indent="0">
                         <a:buNone/>
                       </a:pPr>
                       <a:r>
@@ -9822,6 +7373,11 @@
                     </a:solidFill>
                   </a:tcPr>
                 </a:tc>
+                <a:extLst>
+                  <a:ext uri="{0D108BD9-81ED-4DB2-BD59-A6C34878D82A}">
+                    <a16:rowId xmlns:a16="http://schemas.microsoft.com/office/drawing/2014/main" val="10006"/>
+                  </a:ext>
+                </a:extLst>
               </a:tr>
               <a:tr h="512064">
                 <a:tc>
@@ -9829,7 +7385,7 @@
                     <a:bodyPr/>
                     <a:lstStyle/>
                     <a:p>
-                      <a:pPr indent="0" marL="0">
+                      <a:pPr marL="0" indent="0">
                         <a:buNone/>
                       </a:pPr>
                       <a:r>
@@ -9897,7 +7453,7 @@
                     <a:bodyPr/>
                     <a:lstStyle/>
                     <a:p>
-                      <a:pPr indent="0" marL="0">
+                      <a:pPr marL="0" indent="0">
                         <a:buNone/>
                       </a:pPr>
                       <a:r>
@@ -9965,7 +7521,7 @@
                     <a:bodyPr/>
                     <a:lstStyle/>
                     <a:p>
-                      <a:pPr indent="0" marL="0">
+                      <a:pPr marL="0" indent="0">
                         <a:buNone/>
                       </a:pPr>
                       <a:r>
@@ -10033,7 +7589,7 @@
                     <a:bodyPr/>
                     <a:lstStyle/>
                     <a:p>
-                      <a:pPr indent="0" marL="0">
+                      <a:pPr marL="0" indent="0">
                         <a:buNone/>
                       </a:pPr>
                       <a:r>
@@ -10101,7 +7657,7 @@
                     <a:bodyPr/>
                     <a:lstStyle/>
                     <a:p>
-                      <a:pPr indent="0" marL="0">
+                      <a:pPr marL="0" indent="0">
                         <a:buNone/>
                       </a:pPr>
                       <a:r>
@@ -10164,50 +7720,16 @@
                     </a:solidFill>
                   </a:tcPr>
                 </a:tc>
+                <a:extLst>
+                  <a:ext uri="{0D108BD9-81ED-4DB2-BD59-A6C34878D82A}">
+                    <a16:rowId xmlns:a16="http://schemas.microsoft.com/office/drawing/2014/main" val="10007"/>
+                  </a:ext>
+                </a:extLst>
               </a:tr>
             </a:tbl>
           </a:graphicData>
         </a:graphic>
       </p:graphicFrame>
-      <p:sp>
-        <p:nvSpPr>
-          <p:cNvPr id="5" name="Text 2"/>
-          <p:cNvSpPr txBox="1"/>
-          <p:nvPr/>
-        </p:nvSpPr>
-        <p:spPr>
-          <a:xfrm>
-            <a:off x="548640" y="5715000"/>
-            <a:ext cx="11091672" cy="457200"/>
-          </a:xfrm>
-          <a:prstGeom prst="rect">
-            <a:avLst/>
-          </a:prstGeom>
-          <a:noFill/>
-          <a:ln/>
-        </p:spPr>
-        <p:txBody>
-          <a:bodyPr wrap="square" lIns="0" tIns="0" rIns="0" bIns="0" rtlCol="0" anchor="ctr"/>
-          <a:lstStyle/>
-          <a:p>
-            <a:pPr indent="0" marL="0">
-              <a:buNone/>
-            </a:pPr>
-            <a:r>
-              <a:rPr lang="en-US" sz="1300" b="1" dirty="0">
-                <a:solidFill>
-                  <a:srgbClr val="22205D"/>
-                </a:solidFill>
-                <a:latin typeface="Arial" pitchFamily="34" charset="0"/>
-                <a:ea typeface="Arial" pitchFamily="34" charset="-122"/>
-                <a:cs typeface="Arial" pitchFamily="34" charset="-120"/>
-              </a:rPr>
-              <a:t>Suggested: visit GITEX and Black Hat MEA with sales. Visiting costs far less than a stand.</a:t>
-            </a:r>
-            <a:endParaRPr lang="en-US" sz="1300" dirty="0"/>
-          </a:p>
-        </p:txBody>
-      </p:sp>
     </p:spTree>
   </p:cSld>
   <p:clrMapOvr>
@@ -10216,7 +7738,7 @@
 </p:sld>
 </file>
 
-<file path=ppt/slides/slide7.xml><?xml version="1.0" encoding="utf-8"?>
+<file path=ppt/slides/slide6.xml><?xml version="1.0" encoding="utf-8"?>
 <p:sld xmlns:a="http://schemas.openxmlformats.org/drawingml/2006/main" xmlns:r="http://schemas.openxmlformats.org/officeDocument/2006/relationships" xmlns:p="http://schemas.openxmlformats.org/presentationml/2006/main">
   <p:cSld name="Slide 7">
     <p:bg>
@@ -10224,6 +7746,7 @@
         <a:solidFill>
           <a:srgbClr val="FFFFFF"/>
         </a:solidFill>
+        <a:effectLst/>
       </p:bgPr>
     </p:bg>
     <p:spTree>
@@ -10261,7 +7784,7 @@
           <a:bodyPr wrap="square" lIns="0" tIns="0" rIns="0" bIns="0" rtlCol="0" anchor="ctr"/>
           <a:lstStyle/>
           <a:p>
-            <a:pPr indent="0" marL="0">
+            <a:pPr marL="0" indent="0">
               <a:buNone/>
             </a:pPr>
             <a:r>
@@ -10273,7 +7796,7 @@
                 <a:ea typeface="Arial" pitchFamily="34" charset="-122"/>
                 <a:cs typeface="Arial" pitchFamily="34" charset="-120"/>
               </a:rPr>
-              <a:t>How we work, and what we need</a:t>
+              <a:t>How we work moving forward</a:t>
             </a:r>
             <a:endParaRPr lang="en-US" sz="2800" dirty="0"/>
           </a:p>
@@ -10352,7 +7875,7 @@
           <a:bodyPr wrap="square" lIns="0" tIns="0" rIns="0" bIns="0" rtlCol="0" anchor="ctr"/>
           <a:lstStyle/>
           <a:p>
-            <a:pPr indent="0" marL="0">
+            <a:pPr marL="0" indent="0">
               <a:buNone/>
             </a:pPr>
             <a:r>
@@ -10391,7 +7914,7 @@
           <a:bodyPr wrap="square" lIns="0" tIns="0" rIns="0" bIns="0" rtlCol="0" anchor="ctr"/>
           <a:lstStyle/>
           <a:p>
-            <a:pPr indent="0" marL="0">
+            <a:pPr marL="0" indent="0">
               <a:buNone/>
             </a:pPr>
             <a:r>
@@ -10430,7 +7953,7 @@
           <a:bodyPr wrap="square" lIns="0" tIns="0" rIns="0" bIns="0" rtlCol="0" anchor="ctr"/>
           <a:lstStyle/>
           <a:p>
-            <a:pPr indent="0" marL="0">
+            <a:pPr marL="0" indent="0">
               <a:buNone/>
             </a:pPr>
             <a:r>
@@ -10442,7 +7965,7 @@
                 <a:ea typeface="Arial" pitchFamily="34" charset="-122"/>
                 <a:cs typeface="Arial" pitchFamily="34" charset="-120"/>
               </a:rPr>
-              <a:t>Strategy, content, reviews, reporting</a:t>
+              <a:t>Web content, social media and reporting</a:t>
             </a:r>
             <a:endParaRPr lang="en-US" sz="1100" dirty="0"/>
           </a:p>
@@ -10521,7 +8044,7 @@
           <a:bodyPr wrap="square" lIns="0" tIns="0" rIns="0" bIns="0" rtlCol="0" anchor="ctr"/>
           <a:lstStyle/>
           <a:p>
-            <a:pPr indent="0" marL="0">
+            <a:pPr marL="0" indent="0">
               <a:buNone/>
             </a:pPr>
             <a:r>
@@ -10560,7 +8083,7 @@
           <a:bodyPr wrap="square" lIns="0" tIns="0" rIns="0" bIns="0" rtlCol="0" anchor="ctr"/>
           <a:lstStyle/>
           <a:p>
-            <a:pPr indent="0" marL="0">
+            <a:pPr marL="0" indent="0">
               <a:buNone/>
             </a:pPr>
             <a:r>
@@ -10599,7 +8122,7 @@
           <a:bodyPr wrap="square" lIns="0" tIns="0" rIns="0" bIns="0" rtlCol="0" anchor="ctr"/>
           <a:lstStyle/>
           <a:p>
-            <a:pPr indent="0" marL="0">
+            <a:pPr marL="0" indent="0">
               <a:buNone/>
             </a:pPr>
             <a:r>
@@ -10690,7 +8213,7 @@
           <a:bodyPr wrap="square" lIns="0" tIns="0" rIns="0" bIns="0" rtlCol="0" anchor="ctr"/>
           <a:lstStyle/>
           <a:p>
-            <a:pPr indent="0" marL="0">
+            <a:pPr marL="0" indent="0">
               <a:buNone/>
             </a:pPr>
             <a:r>
@@ -10729,7 +8252,7 @@
           <a:bodyPr wrap="square" lIns="0" tIns="0" rIns="0" bIns="0" rtlCol="0" anchor="ctr"/>
           <a:lstStyle/>
           <a:p>
-            <a:pPr indent="0" marL="0">
+            <a:pPr marL="0" indent="0">
               <a:buNone/>
             </a:pPr>
             <a:r>
@@ -10768,7 +8291,7 @@
           <a:bodyPr wrap="square" lIns="0" tIns="0" rIns="0" bIns="0" rtlCol="0" anchor="ctr"/>
           <a:lstStyle/>
           <a:p>
-            <a:pPr indent="0" marL="0">
+            <a:pPr marL="0" indent="0">
               <a:buNone/>
             </a:pPr>
             <a:r>
@@ -10859,7 +8382,7 @@
           <a:bodyPr wrap="square" lIns="0" tIns="0" rIns="0" bIns="0" rtlCol="0" anchor="ctr"/>
           <a:lstStyle/>
           <a:p>
-            <a:pPr indent="0" marL="0">
+            <a:pPr marL="0" indent="0">
               <a:buNone/>
             </a:pPr>
             <a:r>
@@ -10898,7 +8421,7 @@
           <a:bodyPr wrap="square" lIns="0" tIns="0" rIns="0" bIns="0" rtlCol="0" anchor="ctr"/>
           <a:lstStyle/>
           <a:p>
-            <a:pPr indent="0" marL="0">
+            <a:pPr marL="0" indent="0">
               <a:buNone/>
             </a:pPr>
             <a:r>
@@ -10937,7 +8460,7 @@
           <a:bodyPr wrap="square" lIns="0" tIns="0" rIns="0" bIns="0" rtlCol="0" anchor="ctr"/>
           <a:lstStyle/>
           <a:p>
-            <a:pPr indent="0" marL="0">
+            <a:pPr marL="0" indent="0">
               <a:buNone/>
             </a:pPr>
             <a:r>
@@ -11028,7 +8551,7 @@
           <a:bodyPr wrap="square" lIns="0" tIns="0" rIns="0" bIns="0" rtlCol="0" anchor="ctr"/>
           <a:lstStyle/>
           <a:p>
-            <a:pPr indent="0" marL="0">
+            <a:pPr marL="0" indent="0">
               <a:buNone/>
             </a:pPr>
             <a:r>
@@ -11067,7 +8590,7 @@
           <a:bodyPr wrap="square" lIns="0" tIns="0" rIns="0" bIns="0" rtlCol="0" anchor="ctr"/>
           <a:lstStyle/>
           <a:p>
-            <a:pPr indent="0" marL="0">
+            <a:pPr marL="0" indent="0">
               <a:buNone/>
             </a:pPr>
             <a:r>
@@ -11106,7 +8629,7 @@
           <a:bodyPr wrap="square" lIns="0" tIns="0" rIns="0" bIns="0" rtlCol="0" anchor="ctr"/>
           <a:lstStyle/>
           <a:p>
-            <a:pPr indent="0" marL="0">
+            <a:pPr marL="0" indent="0">
               <a:buNone/>
             </a:pPr>
             <a:r>
@@ -11172,7 +8695,7 @@
           <a:bodyPr wrap="square" lIns="0" tIns="0" rIns="0" bIns="0" rtlCol="0" anchor="ctr"/>
           <a:lstStyle/>
           <a:p>
-            <a:pPr indent="0" marL="0">
+            <a:pPr marL="0" indent="0">
               <a:buNone/>
             </a:pPr>
             <a:r>
@@ -11272,587 +8795,6 @@
               <a:t>Same-day requests need a day-to-day marketing resource</a:t>
             </a:r>
             <a:endParaRPr lang="en-US" sz="1150" dirty="0"/>
-          </a:p>
-        </p:txBody>
-      </p:sp>
-      <p:sp>
-        <p:nvSpPr>
-          <p:cNvPr id="31" name="Shape 29"/>
-          <p:cNvSpPr/>
-          <p:nvPr/>
-        </p:nvSpPr>
-        <p:spPr>
-          <a:xfrm>
-            <a:off x="6675120" y="1143000"/>
-            <a:ext cx="4965192" cy="5166360"/>
-          </a:xfrm>
-          <a:prstGeom prst="roundRect">
-            <a:avLst>
-              <a:gd name="adj" fmla="val 1473"/>
-            </a:avLst>
-          </a:prstGeom>
-          <a:solidFill>
-            <a:srgbClr val="22205D"/>
-          </a:solidFill>
-          <a:ln w="12700">
-            <a:solidFill>
-              <a:srgbClr val="22205D"/>
-            </a:solidFill>
-            <a:prstDash val="solid"/>
-          </a:ln>
-        </p:spPr>
-      </p:sp>
-      <p:sp>
-        <p:nvSpPr>
-          <p:cNvPr id="32" name="Text 30"/>
-          <p:cNvSpPr txBox="1"/>
-          <p:nvPr/>
-        </p:nvSpPr>
-        <p:spPr>
-          <a:xfrm>
-            <a:off x="6995160" y="1325880"/>
-            <a:ext cx="4325112" cy="457200"/>
-          </a:xfrm>
-          <a:prstGeom prst="rect">
-            <a:avLst/>
-          </a:prstGeom>
-          <a:noFill/>
-          <a:ln/>
-        </p:spPr>
-        <p:txBody>
-          <a:bodyPr wrap="square" lIns="0" tIns="0" rIns="0" bIns="0" rtlCol="0" anchor="ctr"/>
-          <a:lstStyle/>
-          <a:p>
-            <a:pPr indent="0" marL="0">
-              <a:buNone/>
-            </a:pPr>
-            <a:r>
-              <a:rPr lang="en-US" sz="2000" b="1" dirty="0">
-                <a:solidFill>
-                  <a:srgbClr val="FFFFFF"/>
-                </a:solidFill>
-                <a:latin typeface="Arial" pitchFamily="34" charset="0"/>
-                <a:ea typeface="Arial" pitchFamily="34" charset="-122"/>
-                <a:cs typeface="Arial" pitchFamily="34" charset="-120"/>
-              </a:rPr>
-              <a:t>Decisions needed today</a:t>
-            </a:r>
-            <a:endParaRPr lang="en-US" sz="2000" dirty="0"/>
-          </a:p>
-        </p:txBody>
-      </p:sp>
-      <p:sp>
-        <p:nvSpPr>
-          <p:cNvPr id="33" name="Shape 31"/>
-          <p:cNvSpPr/>
-          <p:nvPr/>
-        </p:nvSpPr>
-        <p:spPr>
-          <a:xfrm>
-            <a:off x="6995160" y="2057400"/>
-            <a:ext cx="365760" cy="365760"/>
-          </a:xfrm>
-          <a:prstGeom prst="ellipse">
-            <a:avLst/>
-          </a:prstGeom>
-          <a:solidFill>
-            <a:srgbClr val="5CC3AE"/>
-          </a:solidFill>
-          <a:ln w="12700">
-            <a:solidFill>
-              <a:srgbClr val="5CC3AE"/>
-            </a:solidFill>
-            <a:prstDash val="solid"/>
-          </a:ln>
-        </p:spPr>
-      </p:sp>
-      <p:sp>
-        <p:nvSpPr>
-          <p:cNvPr id="34" name="Text 32"/>
-          <p:cNvSpPr txBox="1"/>
-          <p:nvPr/>
-        </p:nvSpPr>
-        <p:spPr>
-          <a:xfrm>
-            <a:off x="6995160" y="2057400"/>
-            <a:ext cx="365760" cy="365760"/>
-          </a:xfrm>
-          <a:prstGeom prst="rect">
-            <a:avLst/>
-          </a:prstGeom>
-          <a:noFill/>
-          <a:ln/>
-        </p:spPr>
-        <p:txBody>
-          <a:bodyPr wrap="square" lIns="0" tIns="0" rIns="0" bIns="0" rtlCol="0" anchor="ctr"/>
-          <a:lstStyle/>
-          <a:p>
-            <a:pPr algn="ctr" indent="0" marL="0">
-              <a:buNone/>
-            </a:pPr>
-            <a:r>
-              <a:rPr lang="en-US" sz="1300" b="1" dirty="0">
-                <a:solidFill>
-                  <a:srgbClr val="22205D"/>
-                </a:solidFill>
-                <a:latin typeface="Arial" pitchFamily="34" charset="0"/>
-                <a:ea typeface="Arial" pitchFamily="34" charset="-122"/>
-                <a:cs typeface="Arial" pitchFamily="34" charset="-120"/>
-              </a:rPr>
-              <a:t>1</a:t>
-            </a:r>
-            <a:endParaRPr lang="en-US" sz="1300" dirty="0"/>
-          </a:p>
-        </p:txBody>
-      </p:sp>
-      <p:sp>
-        <p:nvSpPr>
-          <p:cNvPr id="35" name="Text 33"/>
-          <p:cNvSpPr txBox="1"/>
-          <p:nvPr/>
-        </p:nvSpPr>
-        <p:spPr>
-          <a:xfrm>
-            <a:off x="7543800" y="1965960"/>
-            <a:ext cx="3822192" cy="594360"/>
-          </a:xfrm>
-          <a:prstGeom prst="rect">
-            <a:avLst/>
-          </a:prstGeom>
-          <a:noFill/>
-          <a:ln/>
-        </p:spPr>
-        <p:txBody>
-          <a:bodyPr wrap="square" lIns="0" tIns="0" rIns="0" bIns="0" rtlCol="0" anchor="ctr"/>
-          <a:lstStyle/>
-          <a:p>
-            <a:pPr indent="0" marL="0">
-              <a:buNone/>
-            </a:pPr>
-            <a:r>
-              <a:rPr lang="en-US" sz="1400" dirty="0">
-                <a:solidFill>
-                  <a:srgbClr val="FFFFFF"/>
-                </a:solidFill>
-                <a:latin typeface="Arial" pitchFamily="34" charset="0"/>
-                <a:ea typeface="Arial" pitchFamily="34" charset="-122"/>
-                <a:cs typeface="Arial" pitchFamily="34" charset="-120"/>
-              </a:rPr>
-              <a:t>Approve the HR brand video</a:t>
-            </a:r>
-            <a:endParaRPr lang="en-US" sz="1400" dirty="0"/>
-          </a:p>
-        </p:txBody>
-      </p:sp>
-      <p:sp>
-        <p:nvSpPr>
-          <p:cNvPr id="36" name="Shape 34"/>
-          <p:cNvSpPr/>
-          <p:nvPr/>
-        </p:nvSpPr>
-        <p:spPr>
-          <a:xfrm>
-            <a:off x="6995160" y="2880360"/>
-            <a:ext cx="365760" cy="365760"/>
-          </a:xfrm>
-          <a:prstGeom prst="ellipse">
-            <a:avLst/>
-          </a:prstGeom>
-          <a:solidFill>
-            <a:srgbClr val="5CC3AE"/>
-          </a:solidFill>
-          <a:ln w="12700">
-            <a:solidFill>
-              <a:srgbClr val="5CC3AE"/>
-            </a:solidFill>
-            <a:prstDash val="solid"/>
-          </a:ln>
-        </p:spPr>
-      </p:sp>
-      <p:sp>
-        <p:nvSpPr>
-          <p:cNvPr id="37" name="Text 35"/>
-          <p:cNvSpPr txBox="1"/>
-          <p:nvPr/>
-        </p:nvSpPr>
-        <p:spPr>
-          <a:xfrm>
-            <a:off x="6995160" y="2880360"/>
-            <a:ext cx="365760" cy="365760"/>
-          </a:xfrm>
-          <a:prstGeom prst="rect">
-            <a:avLst/>
-          </a:prstGeom>
-          <a:noFill/>
-          <a:ln/>
-        </p:spPr>
-        <p:txBody>
-          <a:bodyPr wrap="square" lIns="0" tIns="0" rIns="0" bIns="0" rtlCol="0" anchor="ctr"/>
-          <a:lstStyle/>
-          <a:p>
-            <a:pPr algn="ctr" indent="0" marL="0">
-              <a:buNone/>
-            </a:pPr>
-            <a:r>
-              <a:rPr lang="en-US" sz="1300" b="1" dirty="0">
-                <a:solidFill>
-                  <a:srgbClr val="22205D"/>
-                </a:solidFill>
-                <a:latin typeface="Arial" pitchFamily="34" charset="0"/>
-                <a:ea typeface="Arial" pitchFamily="34" charset="-122"/>
-                <a:cs typeface="Arial" pitchFamily="34" charset="-120"/>
-              </a:rPr>
-              <a:t>2</a:t>
-            </a:r>
-            <a:endParaRPr lang="en-US" sz="1300" dirty="0"/>
-          </a:p>
-        </p:txBody>
-      </p:sp>
-      <p:sp>
-        <p:nvSpPr>
-          <p:cNvPr id="38" name="Text 36"/>
-          <p:cNvSpPr txBox="1"/>
-          <p:nvPr/>
-        </p:nvSpPr>
-        <p:spPr>
-          <a:xfrm>
-            <a:off x="7543800" y="2788920"/>
-            <a:ext cx="3822192" cy="594360"/>
-          </a:xfrm>
-          <a:prstGeom prst="rect">
-            <a:avLst/>
-          </a:prstGeom>
-          <a:noFill/>
-          <a:ln/>
-        </p:spPr>
-        <p:txBody>
-          <a:bodyPr wrap="square" lIns="0" tIns="0" rIns="0" bIns="0" rtlCol="0" anchor="ctr"/>
-          <a:lstStyle/>
-          <a:p>
-            <a:pPr indent="0" marL="0">
-              <a:buNone/>
-            </a:pPr>
-            <a:r>
-              <a:rPr lang="en-US" sz="1400" dirty="0">
-                <a:solidFill>
-                  <a:srgbClr val="FFFFFF"/>
-                </a:solidFill>
-                <a:latin typeface="Arial" pitchFamily="34" charset="0"/>
-                <a:ea typeface="Arial" pitchFamily="34" charset="-122"/>
-                <a:cs typeface="Arial" pitchFamily="34" charset="-120"/>
-              </a:rPr>
-              <a:t>Approve a services ad budget: $300–600 a month for 3 months</a:t>
-            </a:r>
-            <a:endParaRPr lang="en-US" sz="1400" dirty="0"/>
-          </a:p>
-        </p:txBody>
-      </p:sp>
-      <p:sp>
-        <p:nvSpPr>
-          <p:cNvPr id="39" name="Shape 37"/>
-          <p:cNvSpPr/>
-          <p:nvPr/>
-        </p:nvSpPr>
-        <p:spPr>
-          <a:xfrm>
-            <a:off x="6995160" y="3703320"/>
-            <a:ext cx="365760" cy="365760"/>
-          </a:xfrm>
-          <a:prstGeom prst="ellipse">
-            <a:avLst/>
-          </a:prstGeom>
-          <a:solidFill>
-            <a:srgbClr val="5CC3AE"/>
-          </a:solidFill>
-          <a:ln w="12700">
-            <a:solidFill>
-              <a:srgbClr val="5CC3AE"/>
-            </a:solidFill>
-            <a:prstDash val="solid"/>
-          </a:ln>
-        </p:spPr>
-      </p:sp>
-      <p:sp>
-        <p:nvSpPr>
-          <p:cNvPr id="40" name="Text 38"/>
-          <p:cNvSpPr txBox="1"/>
-          <p:nvPr/>
-        </p:nvSpPr>
-        <p:spPr>
-          <a:xfrm>
-            <a:off x="6995160" y="3703320"/>
-            <a:ext cx="365760" cy="365760"/>
-          </a:xfrm>
-          <a:prstGeom prst="rect">
-            <a:avLst/>
-          </a:prstGeom>
-          <a:noFill/>
-          <a:ln/>
-        </p:spPr>
-        <p:txBody>
-          <a:bodyPr wrap="square" lIns="0" tIns="0" rIns="0" bIns="0" rtlCol="0" anchor="ctr"/>
-          <a:lstStyle/>
-          <a:p>
-            <a:pPr algn="ctr" indent="0" marL="0">
-              <a:buNone/>
-            </a:pPr>
-            <a:r>
-              <a:rPr lang="en-US" sz="1300" b="1" dirty="0">
-                <a:solidFill>
-                  <a:srgbClr val="22205D"/>
-                </a:solidFill>
-                <a:latin typeface="Arial" pitchFamily="34" charset="0"/>
-                <a:ea typeface="Arial" pitchFamily="34" charset="-122"/>
-                <a:cs typeface="Arial" pitchFamily="34" charset="-120"/>
-              </a:rPr>
-              <a:t>3</a:t>
-            </a:r>
-            <a:endParaRPr lang="en-US" sz="1300" dirty="0"/>
-          </a:p>
-        </p:txBody>
-      </p:sp>
-      <p:sp>
-        <p:nvSpPr>
-          <p:cNvPr id="41" name="Text 39"/>
-          <p:cNvSpPr txBox="1"/>
-          <p:nvPr/>
-        </p:nvSpPr>
-        <p:spPr>
-          <a:xfrm>
-            <a:off x="7543800" y="3611880"/>
-            <a:ext cx="3822192" cy="594360"/>
-          </a:xfrm>
-          <a:prstGeom prst="rect">
-            <a:avLst/>
-          </a:prstGeom>
-          <a:noFill/>
-          <a:ln/>
-        </p:spPr>
-        <p:txBody>
-          <a:bodyPr wrap="square" lIns="0" tIns="0" rIns="0" bIns="0" rtlCol="0" anchor="ctr"/>
-          <a:lstStyle/>
-          <a:p>
-            <a:pPr indent="0" marL="0">
-              <a:buNone/>
-            </a:pPr>
-            <a:r>
-              <a:rPr lang="en-US" sz="1400" dirty="0">
-                <a:solidFill>
-                  <a:srgbClr val="FFFFFF"/>
-                </a:solidFill>
-                <a:latin typeface="Arial" pitchFamily="34" charset="0"/>
-                <a:ea typeface="Arial" pitchFamily="34" charset="-122"/>
-                <a:cs typeface="Arial" pitchFamily="34" charset="-120"/>
-              </a:rPr>
-              <a:t>Choose events for sales from the shortlist</a:t>
-            </a:r>
-            <a:endParaRPr lang="en-US" sz="1400" dirty="0"/>
-          </a:p>
-        </p:txBody>
-      </p:sp>
-      <p:sp>
-        <p:nvSpPr>
-          <p:cNvPr id="42" name="Shape 40"/>
-          <p:cNvSpPr/>
-          <p:nvPr/>
-        </p:nvSpPr>
-        <p:spPr>
-          <a:xfrm>
-            <a:off x="6995160" y="4526280"/>
-            <a:ext cx="365760" cy="365760"/>
-          </a:xfrm>
-          <a:prstGeom prst="ellipse">
-            <a:avLst/>
-          </a:prstGeom>
-          <a:solidFill>
-            <a:srgbClr val="5CC3AE"/>
-          </a:solidFill>
-          <a:ln w="12700">
-            <a:solidFill>
-              <a:srgbClr val="5CC3AE"/>
-            </a:solidFill>
-            <a:prstDash val="solid"/>
-          </a:ln>
-        </p:spPr>
-      </p:sp>
-      <p:sp>
-        <p:nvSpPr>
-          <p:cNvPr id="43" name="Text 41"/>
-          <p:cNvSpPr txBox="1"/>
-          <p:nvPr/>
-        </p:nvSpPr>
-        <p:spPr>
-          <a:xfrm>
-            <a:off x="6995160" y="4526280"/>
-            <a:ext cx="365760" cy="365760"/>
-          </a:xfrm>
-          <a:prstGeom prst="rect">
-            <a:avLst/>
-          </a:prstGeom>
-          <a:noFill/>
-          <a:ln/>
-        </p:spPr>
-        <p:txBody>
-          <a:bodyPr wrap="square" lIns="0" tIns="0" rIns="0" bIns="0" rtlCol="0" anchor="ctr"/>
-          <a:lstStyle/>
-          <a:p>
-            <a:pPr algn="ctr" indent="0" marL="0">
-              <a:buNone/>
-            </a:pPr>
-            <a:r>
-              <a:rPr lang="en-US" sz="1300" b="1" dirty="0">
-                <a:solidFill>
-                  <a:srgbClr val="22205D"/>
-                </a:solidFill>
-                <a:latin typeface="Arial" pitchFamily="34" charset="0"/>
-                <a:ea typeface="Arial" pitchFamily="34" charset="-122"/>
-                <a:cs typeface="Arial" pitchFamily="34" charset="-120"/>
-              </a:rPr>
-              <a:t>4</a:t>
-            </a:r>
-            <a:endParaRPr lang="en-US" sz="1300" dirty="0"/>
-          </a:p>
-        </p:txBody>
-      </p:sp>
-      <p:sp>
-        <p:nvSpPr>
-          <p:cNvPr id="44" name="Text 42"/>
-          <p:cNvSpPr txBox="1"/>
-          <p:nvPr/>
-        </p:nvSpPr>
-        <p:spPr>
-          <a:xfrm>
-            <a:off x="7543800" y="4434840"/>
-            <a:ext cx="3822192" cy="594360"/>
-          </a:xfrm>
-          <a:prstGeom prst="rect">
-            <a:avLst/>
-          </a:prstGeom>
-          <a:noFill/>
-          <a:ln/>
-        </p:spPr>
-        <p:txBody>
-          <a:bodyPr wrap="square" lIns="0" tIns="0" rIns="0" bIns="0" rtlCol="0" anchor="ctr"/>
-          <a:lstStyle/>
-          <a:p>
-            <a:pPr indent="0" marL="0">
-              <a:buNone/>
-            </a:pPr>
-            <a:r>
-              <a:rPr lang="en-US" sz="1400" dirty="0">
-                <a:solidFill>
-                  <a:srgbClr val="FFFFFF"/>
-                </a:solidFill>
-                <a:latin typeface="Arial" pitchFamily="34" charset="0"/>
-                <a:ea typeface="Arial" pitchFamily="34" charset="-122"/>
-                <a:cs typeface="Arial" pitchFamily="34" charset="-120"/>
-              </a:rPr>
-              <a:t>Dev time to launch both tools by Oct 14</a:t>
-            </a:r>
-            <a:endParaRPr lang="en-US" sz="1400" dirty="0"/>
-          </a:p>
-        </p:txBody>
-      </p:sp>
-      <p:sp>
-        <p:nvSpPr>
-          <p:cNvPr id="45" name="Shape 43"/>
-          <p:cNvSpPr/>
-          <p:nvPr/>
-        </p:nvSpPr>
-        <p:spPr>
-          <a:xfrm>
-            <a:off x="6995160" y="5349240"/>
-            <a:ext cx="365760" cy="365760"/>
-          </a:xfrm>
-          <a:prstGeom prst="ellipse">
-            <a:avLst/>
-          </a:prstGeom>
-          <a:solidFill>
-            <a:srgbClr val="5CC3AE"/>
-          </a:solidFill>
-          <a:ln w="12700">
-            <a:solidFill>
-              <a:srgbClr val="5CC3AE"/>
-            </a:solidFill>
-            <a:prstDash val="solid"/>
-          </a:ln>
-        </p:spPr>
-      </p:sp>
-      <p:sp>
-        <p:nvSpPr>
-          <p:cNvPr id="46" name="Text 44"/>
-          <p:cNvSpPr txBox="1"/>
-          <p:nvPr/>
-        </p:nvSpPr>
-        <p:spPr>
-          <a:xfrm>
-            <a:off x="6995160" y="5349240"/>
-            <a:ext cx="365760" cy="365760"/>
-          </a:xfrm>
-          <a:prstGeom prst="rect">
-            <a:avLst/>
-          </a:prstGeom>
-          <a:noFill/>
-          <a:ln/>
-        </p:spPr>
-        <p:txBody>
-          <a:bodyPr wrap="square" lIns="0" tIns="0" rIns="0" bIns="0" rtlCol="0" anchor="ctr"/>
-          <a:lstStyle/>
-          <a:p>
-            <a:pPr algn="ctr" indent="0" marL="0">
-              <a:buNone/>
-            </a:pPr>
-            <a:r>
-              <a:rPr lang="en-US" sz="1300" b="1" dirty="0">
-                <a:solidFill>
-                  <a:srgbClr val="22205D"/>
-                </a:solidFill>
-                <a:latin typeface="Arial" pitchFamily="34" charset="0"/>
-                <a:ea typeface="Arial" pitchFamily="34" charset="-122"/>
-                <a:cs typeface="Arial" pitchFamily="34" charset="-120"/>
-              </a:rPr>
-              <a:t>5</a:t>
-            </a:r>
-            <a:endParaRPr lang="en-US" sz="1300" dirty="0"/>
-          </a:p>
-        </p:txBody>
-      </p:sp>
-      <p:sp>
-        <p:nvSpPr>
-          <p:cNvPr id="47" name="Text 45"/>
-          <p:cNvSpPr txBox="1"/>
-          <p:nvPr/>
-        </p:nvSpPr>
-        <p:spPr>
-          <a:xfrm>
-            <a:off x="7543800" y="5257800"/>
-            <a:ext cx="3822192" cy="594360"/>
-          </a:xfrm>
-          <a:prstGeom prst="rect">
-            <a:avLst/>
-          </a:prstGeom>
-          <a:noFill/>
-          <a:ln/>
-        </p:spPr>
-        <p:txBody>
-          <a:bodyPr wrap="square" lIns="0" tIns="0" rIns="0" bIns="0" rtlCol="0" anchor="ctr"/>
-          <a:lstStyle/>
-          <a:p>
-            <a:pPr indent="0" marL="0">
-              <a:buNone/>
-            </a:pPr>
-            <a:r>
-              <a:rPr lang="en-US" sz="1400" dirty="0">
-                <a:solidFill>
-                  <a:srgbClr val="FFFFFF"/>
-                </a:solidFill>
-                <a:latin typeface="Arial" pitchFamily="34" charset="0"/>
-                <a:ea typeface="Arial" pitchFamily="34" charset="-122"/>
-                <a:cs typeface="Arial" pitchFamily="34" charset="-120"/>
-              </a:rPr>
-              <a:t>A day-to-day marketing resource for urgent and same-day work</a:t>
-            </a:r>
-            <a:endParaRPr lang="en-US" sz="1400" dirty="0"/>
           </a:p>
         </p:txBody>
       </p:sp>
@@ -12157,4 +9099,299 @@
     </a:ext>
   </a:extLst>
 </a:theme>
+</file>
+
+<file path=ppt/theme/theme2.xml><?xml version="1.0" encoding="utf-8"?>
+<a:theme xmlns:a="http://schemas.openxmlformats.org/drawingml/2006/main" name="Office Theme">
+  <a:themeElements>
+    <a:clrScheme name="Office">
+      <a:dk1>
+        <a:sysClr val="windowText" lastClr="000000"/>
+      </a:dk1>
+      <a:lt1>
+        <a:sysClr val="window" lastClr="FFFFFF"/>
+      </a:lt1>
+      <a:dk2>
+        <a:srgbClr val="44546A"/>
+      </a:dk2>
+      <a:lt2>
+        <a:srgbClr val="E7E6E6"/>
+      </a:lt2>
+      <a:accent1>
+        <a:srgbClr val="4472C4"/>
+      </a:accent1>
+      <a:accent2>
+        <a:srgbClr val="ED7D31"/>
+      </a:accent2>
+      <a:accent3>
+        <a:srgbClr val="A5A5A5"/>
+      </a:accent3>
+      <a:accent4>
+        <a:srgbClr val="FFC000"/>
+      </a:accent4>
+      <a:accent5>
+        <a:srgbClr val="5B9BD5"/>
+      </a:accent5>
+      <a:accent6>
+        <a:srgbClr val="70AD47"/>
+      </a:accent6>
+      <a:hlink>
+        <a:srgbClr val="0563C1"/>
+      </a:hlink>
+      <a:folHlink>
+        <a:srgbClr val="954F72"/>
+      </a:folHlink>
+    </a:clrScheme>
+    <a:fontScheme name="Office">
+      <a:majorFont>
+        <a:latin typeface="Calibri Light" panose="020F0302020204030204"/>
+        <a:ea typeface=""/>
+        <a:cs typeface=""/>
+        <a:font script="Jpan" typeface="游ゴシック Light"/>
+        <a:font script="Hang" typeface="맑은 고딕"/>
+        <a:font script="Hans" typeface="等线 Light"/>
+        <a:font script="Hant" typeface="新細明體"/>
+        <a:font script="Arab" typeface="Times New Roman"/>
+        <a:font script="Hebr" typeface="Times New Roman"/>
+        <a:font script="Thai" typeface="Angsana New"/>
+        <a:font script="Ethi" typeface="Nyala"/>
+        <a:font script="Beng" typeface="Vrinda"/>
+        <a:font script="Gujr" typeface="Shruti"/>
+        <a:font script="Khmr" typeface="MoolBoran"/>
+        <a:font script="Knda" typeface="Tunga"/>
+        <a:font script="Guru" typeface="Raavi"/>
+        <a:font script="Cans" typeface="Euphemia"/>
+        <a:font script="Cher" typeface="Plantagenet Cherokee"/>
+        <a:font script="Yiii" typeface="Microsoft Yi Baiti"/>
+        <a:font script="Tibt" typeface="Microsoft Himalaya"/>
+        <a:font script="Thaa" typeface="MV Boli"/>
+        <a:font script="Deva" typeface="Mangal"/>
+        <a:font script="Telu" typeface="Gautami"/>
+        <a:font script="Taml" typeface="Latha"/>
+        <a:font script="Syrc" typeface="Estrangelo Edessa"/>
+        <a:font script="Orya" typeface="Kalinga"/>
+        <a:font script="Mlym" typeface="Kartika"/>
+        <a:font script="Laoo" typeface="DokChampa"/>
+        <a:font script="Sinh" typeface="Iskoola Pota"/>
+        <a:font script="Mong" typeface="Mongolian Baiti"/>
+        <a:font script="Viet" typeface="Times New Roman"/>
+        <a:font script="Uigh" typeface="Microsoft Uighur"/>
+        <a:font script="Geor" typeface="Sylfaen"/>
+        <a:font script="Armn" typeface="Arial"/>
+        <a:font script="Bugi" typeface="Leelawadee UI"/>
+        <a:font script="Bopo" typeface="Microsoft JhengHei"/>
+        <a:font script="Java" typeface="Javanese Text"/>
+        <a:font script="Lisu" typeface="Segoe UI"/>
+        <a:font script="Mymr" typeface="Myanmar Text"/>
+        <a:font script="Nkoo" typeface="Ebrima"/>
+        <a:font script="Olck" typeface="Nirmala UI"/>
+        <a:font script="Osma" typeface="Ebrima"/>
+        <a:font script="Phag" typeface="Phagspa"/>
+        <a:font script="Syrn" typeface="Estrangelo Edessa"/>
+        <a:font script="Syrj" typeface="Estrangelo Edessa"/>
+        <a:font script="Syre" typeface="Estrangelo Edessa"/>
+        <a:font script="Sora" typeface="Nirmala UI"/>
+        <a:font script="Tale" typeface="Microsoft Tai Le"/>
+        <a:font script="Talu" typeface="Microsoft New Tai Lue"/>
+        <a:font script="Tfng" typeface="Ebrima"/>
+      </a:majorFont>
+      <a:minorFont>
+        <a:latin typeface="Calibri" panose="020F0502020204030204"/>
+        <a:ea typeface=""/>
+        <a:cs typeface=""/>
+        <a:font script="Jpan" typeface="游ゴシック"/>
+        <a:font script="Hang" typeface="맑은 고딕"/>
+        <a:font script="Hans" typeface="等线"/>
+        <a:font script="Hant" typeface="新細明體"/>
+        <a:font script="Arab" typeface="Arial"/>
+        <a:font script="Hebr" typeface="Arial"/>
+        <a:font script="Thai" typeface="Cordia New"/>
+        <a:font script="Ethi" typeface="Nyala"/>
+        <a:font script="Beng" typeface="Vrinda"/>
+        <a:font script="Gujr" typeface="Shruti"/>
+        <a:font script="Khmr" typeface="DaunPenh"/>
+        <a:font script="Knda" typeface="Tunga"/>
+        <a:font script="Guru" typeface="Raavi"/>
+        <a:font script="Cans" typeface="Euphemia"/>
+        <a:font script="Cher" typeface="Plantagenet Cherokee"/>
+        <a:font script="Yiii" typeface="Microsoft Yi Baiti"/>
+        <a:font script="Tibt" typeface="Microsoft Himalaya"/>
+        <a:font script="Thaa" typeface="MV Boli"/>
+        <a:font script="Deva" typeface="Mangal"/>
+        <a:font script="Telu" typeface="Gautami"/>
+        <a:font script="Taml" typeface="Latha"/>
+        <a:font script="Syrc" typeface="Estrangelo Edessa"/>
+        <a:font script="Orya" typeface="Kalinga"/>
+        <a:font script="Mlym" typeface="Kartika"/>
+        <a:font script="Laoo" typeface="DokChampa"/>
+        <a:font script="Sinh" typeface="Iskoola Pota"/>
+        <a:font script="Mong" typeface="Mongolian Baiti"/>
+        <a:font script="Viet" typeface="Arial"/>
+        <a:font script="Uigh" typeface="Microsoft Uighur"/>
+        <a:font script="Geor" typeface="Sylfaen"/>
+        <a:font script="Armn" typeface="Arial"/>
+        <a:font script="Bugi" typeface="Leelawadee UI"/>
+        <a:font script="Bopo" typeface="Microsoft JhengHei"/>
+        <a:font script="Java" typeface="Javanese Text"/>
+        <a:font script="Lisu" typeface="Segoe UI"/>
+        <a:font script="Mymr" typeface="Myanmar Text"/>
+        <a:font script="Nkoo" typeface="Ebrima"/>
+        <a:font script="Olck" typeface="Nirmala UI"/>
+        <a:font script="Osma" typeface="Ebrima"/>
+        <a:font script="Phag" typeface="Phagspa"/>
+        <a:font script="Syrn" typeface="Estrangelo Edessa"/>
+        <a:font script="Syrj" typeface="Estrangelo Edessa"/>
+        <a:font script="Syre" typeface="Estrangelo Edessa"/>
+        <a:font script="Sora" typeface="Nirmala UI"/>
+        <a:font script="Tale" typeface="Microsoft Tai Le"/>
+        <a:font script="Talu" typeface="Microsoft New Tai Lue"/>
+        <a:font script="Tfng" typeface="Ebrima"/>
+      </a:minorFont>
+    </a:fontScheme>
+    <a:fmtScheme name="Office">
+      <a:fillStyleLst>
+        <a:solidFill>
+          <a:schemeClr val="phClr"/>
+        </a:solidFill>
+        <a:gradFill rotWithShape="1">
+          <a:gsLst>
+            <a:gs pos="0">
+              <a:schemeClr val="phClr">
+                <a:lumMod val="110000"/>
+                <a:satMod val="105000"/>
+                <a:tint val="67000"/>
+              </a:schemeClr>
+            </a:gs>
+            <a:gs pos="50000">
+              <a:schemeClr val="phClr">
+                <a:lumMod val="105000"/>
+                <a:satMod val="103000"/>
+                <a:tint val="73000"/>
+              </a:schemeClr>
+            </a:gs>
+            <a:gs pos="100000">
+              <a:schemeClr val="phClr">
+                <a:lumMod val="105000"/>
+                <a:satMod val="109000"/>
+                <a:tint val="81000"/>
+              </a:schemeClr>
+            </a:gs>
+          </a:gsLst>
+          <a:lin ang="5400000" scaled="0"/>
+        </a:gradFill>
+        <a:gradFill rotWithShape="1">
+          <a:gsLst>
+            <a:gs pos="0">
+              <a:schemeClr val="phClr">
+                <a:satMod val="103000"/>
+                <a:lumMod val="102000"/>
+                <a:tint val="94000"/>
+              </a:schemeClr>
+            </a:gs>
+            <a:gs pos="50000">
+              <a:schemeClr val="phClr">
+                <a:satMod val="110000"/>
+                <a:lumMod val="100000"/>
+                <a:shade val="100000"/>
+              </a:schemeClr>
+            </a:gs>
+            <a:gs pos="100000">
+              <a:schemeClr val="phClr">
+                <a:lumMod val="99000"/>
+                <a:satMod val="120000"/>
+                <a:shade val="78000"/>
+              </a:schemeClr>
+            </a:gs>
+          </a:gsLst>
+          <a:lin ang="5400000" scaled="0"/>
+        </a:gradFill>
+      </a:fillStyleLst>
+      <a:lnStyleLst>
+        <a:ln w="6350" cap="flat" cmpd="sng" algn="ctr">
+          <a:solidFill>
+            <a:schemeClr val="phClr"/>
+          </a:solidFill>
+          <a:prstDash val="solid"/>
+          <a:miter lim="800000"/>
+        </a:ln>
+        <a:ln w="12700" cap="flat" cmpd="sng" algn="ctr">
+          <a:solidFill>
+            <a:schemeClr val="phClr"/>
+          </a:solidFill>
+          <a:prstDash val="solid"/>
+          <a:miter lim="800000"/>
+        </a:ln>
+        <a:ln w="19050" cap="flat" cmpd="sng" algn="ctr">
+          <a:solidFill>
+            <a:schemeClr val="phClr"/>
+          </a:solidFill>
+          <a:prstDash val="solid"/>
+          <a:miter lim="800000"/>
+        </a:ln>
+      </a:lnStyleLst>
+      <a:effectStyleLst>
+        <a:effectStyle>
+          <a:effectLst/>
+        </a:effectStyle>
+        <a:effectStyle>
+          <a:effectLst/>
+        </a:effectStyle>
+        <a:effectStyle>
+          <a:effectLst>
+            <a:outerShdw blurRad="57150" dist="19050" dir="5400000" algn="ctr" rotWithShape="0">
+              <a:srgbClr val="000000">
+                <a:alpha val="63000"/>
+              </a:srgbClr>
+            </a:outerShdw>
+          </a:effectLst>
+        </a:effectStyle>
+      </a:effectStyleLst>
+      <a:bgFillStyleLst>
+        <a:solidFill>
+          <a:schemeClr val="phClr"/>
+        </a:solidFill>
+        <a:solidFill>
+          <a:schemeClr val="phClr">
+            <a:tint val="95000"/>
+            <a:satMod val="170000"/>
+          </a:schemeClr>
+        </a:solidFill>
+        <a:gradFill rotWithShape="1">
+          <a:gsLst>
+            <a:gs pos="0">
+              <a:schemeClr val="phClr">
+                <a:tint val="93000"/>
+                <a:satMod val="150000"/>
+                <a:shade val="98000"/>
+                <a:lumMod val="102000"/>
+              </a:schemeClr>
+            </a:gs>
+            <a:gs pos="50000">
+              <a:schemeClr val="phClr">
+                <a:tint val="98000"/>
+                <a:satMod val="130000"/>
+                <a:shade val="90000"/>
+                <a:lumMod val="103000"/>
+              </a:schemeClr>
+            </a:gs>
+            <a:gs pos="100000">
+              <a:schemeClr val="phClr">
+                <a:shade val="63000"/>
+                <a:satMod val="120000"/>
+              </a:schemeClr>
+            </a:gs>
+          </a:gsLst>
+          <a:lin ang="5400000" scaled="0"/>
+        </a:gradFill>
+      </a:bgFillStyleLst>
+    </a:fmtScheme>
+  </a:themeElements>
+  <a:objectDefaults/>
+  <a:extraClrSchemeLst/>
+  <a:extLst>
+    <a:ext uri="{05A4C25C-085E-4340-85A3-A5531E510DB2}">
+      <thm15:themeFamily xmlns:thm15="http://schemas.microsoft.com/office/thememl/2012/main" name="Office Theme" id="{62F939B6-93AF-4DB8-9C6B-D6C7DFDC589F}" vid="{4A3C46E8-61CC-4603-A589-7422A47A8E4A}"/>
+    </a:ext>
+  </a:extLst>
+</a:theme>
 </file>